--- a/content/05-teaching-resources/slides/digital-infrastructure/01-network-design-addressing-and-transmission.pptx
+++ b/content/05-teaching-resources/slides/digital-infrastructure/01-network-design-addressing-and-transmission.pptx
@@ -8,13 +8,19 @@
     <p:sldId id="256" r:id="rId7"/>
     <p:sldId id="257" r:id="rId8"/>
     <p:sldId id="258" r:id="rId9"/>
-    <p:sldId id="259" r:id="rId11"/>
+    <p:sldId id="259" r:id="rId10"/>
     <p:sldId id="260" r:id="rId12"/>
     <p:sldId id="261" r:id="rId13"/>
     <p:sldId id="262" r:id="rId14"/>
     <p:sldId id="263" r:id="rId15"/>
     <p:sldId id="264" r:id="rId16"/>
     <p:sldId id="265" r:id="rId17"/>
+    <p:sldId id="266" r:id="rId18"/>
+    <p:sldId id="267" r:id="rId19"/>
+    <p:sldId id="268" r:id="rId20"/>
+    <p:sldId id="269" r:id="rId21"/>
+    <p:sldId id="270" r:id="rId22"/>
+    <p:sldId id="271" r:id="rId23"/>
   </p:sldIdLst>
   <p:sldSz cx="12191695" cy="6858000" type="screen4x3"/>
   <p:notesSz cx="6858000" cy="9144000"/>
@@ -581,7 +587,22 @@
           <a:lstStyle/>
           <a:p>
             <a:r>
-              <a:t>Practise: how many hosts does a /26 give? (2 to the power 6, minus 2 = 62).</a:t>
+              <a:t>Answers:</a:t>
+            </a:r>
+          </a:p>
+          <a:p>
+            <a:r>
+              <a:t>1. Spreads traffic across several servers.</a:t>
+            </a:r>
+          </a:p>
+          <a:p>
+            <a:r>
+              <a:t>2. A secondary system automatically taking over if the primary fails.</a:t>
+            </a:r>
+          </a:p>
+          <a:p>
+            <a:r>
+              <a:t>3. To guarantee bandwidth for important traffic such as voice.</a:t>
             </a:r>
           </a:p>
         </p:txBody>
@@ -651,7 +672,22 @@
           <a:lstStyle/>
           <a:p>
             <a:r>
-              <a:t>Give students a few minutes to answer on mini whiteboards or paper, then reveal the answers on the next slide.</a:t>
+              <a:t>Answers:</a:t>
+            </a:r>
+          </a:p>
+          <a:p>
+            <a:r>
+              <a:t>1. Any two: EMI, static, crosstalk.</a:t>
+            </a:r>
+          </a:p>
+          <a:p>
+            <a:r>
+              <a:t>2. BS EN 50174.</a:t>
+            </a:r>
+          </a:p>
+          <a:p>
+            <a:r>
+              <a:t>3. 802.11ax.</a:t>
             </a:r>
           </a:p>
         </p:txBody>
@@ -721,7 +757,7 @@
           <a:lstStyle/>
           <a:p>
             <a:r>
-              <a:t>Talk through any answers the class found difficult.</a:t>
+              <a:t>Practise: how many hosts does a /26 give? (2 to the power 6, minus 2 = 62).</a:t>
             </a:r>
           </a:p>
         </p:txBody>
@@ -747,6 +783,231 @@
 </file>
 
 <file path=ppt/notesSlides/notesSlide5.xml><?xml version="1.0" encoding="utf-8"?>
+<p:notes xmlns:a="http://schemas.openxmlformats.org/drawingml/2006/main" xmlns:p="http://schemas.openxmlformats.org/presentationml/2006/main" xmlns:r="http://schemas.openxmlformats.org/officeDocument/2006/relationships">
+  <p:cSld>
+    <p:spTree>
+      <p:nvGrpSpPr>
+        <p:cNvPr id="1" name=""/>
+        <p:cNvGrpSpPr/>
+        <p:nvPr/>
+      </p:nvGrpSpPr>
+      <p:grpSpPr>
+        <a:xfrm>
+          <a:off x="0" y="0"/>
+          <a:ext cx="0" cy="0"/>
+          <a:chOff x="0" y="0"/>
+          <a:chExt cx="0" cy="0"/>
+        </a:xfrm>
+      </p:grpSpPr>
+      <p:sp>
+        <p:nvSpPr>
+          <p:cNvPr id="2" name="Slide Image Placeholder 1"/>
+          <p:cNvSpPr>
+            <a:spLocks noGrp="1"/>
+          </p:cNvSpPr>
+          <p:nvPr>
+            <p:ph type="sldImg" idx="2"/>
+          </p:nvPr>
+        </p:nvSpPr>
+        <p:spPr/>
+      </p:sp>
+      <p:sp>
+        <p:nvSpPr>
+          <p:cNvPr id="3" name="Notes Placeholder 2"/>
+          <p:cNvSpPr>
+            <a:spLocks noGrp="1"/>
+          </p:cNvSpPr>
+          <p:nvPr>
+            <p:ph type="body" idx="3" sz="quarter"/>
+          </p:nvPr>
+        </p:nvSpPr>
+        <p:spPr/>
+        <p:txBody>
+          <a:bodyPr/>
+          <a:lstStyle/>
+          <a:p>
+            <a:r>
+              <a:t>Answers:</a:t>
+            </a:r>
+          </a:p>
+          <a:p>
+            <a:r>
+              <a:t>1. 32.</a:t>
+            </a:r>
+          </a:p>
+          <a:p>
+            <a:r>
+              <a:t>2. 254.</a:t>
+            </a:r>
+          </a:p>
+          <a:p>
+            <a:r>
+              <a:t>3. IPv4 addresses have run out.</a:t>
+            </a:r>
+          </a:p>
+        </p:txBody>
+      </p:sp>
+      <p:sp>
+        <p:nvSpPr>
+          <p:cNvPr id="4" name="Slide Number Placeholder 3"/>
+          <p:cNvSpPr>
+            <a:spLocks noGrp="1"/>
+          </p:cNvSpPr>
+          <p:nvPr>
+            <p:ph type="sldNum" idx="5" sz="quarter"/>
+          </p:nvPr>
+        </p:nvSpPr>
+        <p:spPr/>
+      </p:sp>
+    </p:spTree>
+  </p:cSld>
+  <p:clrMapOvr>
+    <a:masterClrMapping/>
+  </p:clrMapOvr>
+</p:notes>
+</file>
+
+<file path=ppt/notesSlides/notesSlide6.xml><?xml version="1.0" encoding="utf-8"?>
+<p:notes xmlns:a="http://schemas.openxmlformats.org/drawingml/2006/main" xmlns:p="http://schemas.openxmlformats.org/presentationml/2006/main" xmlns:r="http://schemas.openxmlformats.org/officeDocument/2006/relationships">
+  <p:cSld>
+    <p:spTree>
+      <p:nvGrpSpPr>
+        <p:cNvPr id="1" name=""/>
+        <p:cNvGrpSpPr/>
+        <p:nvPr/>
+      </p:nvGrpSpPr>
+      <p:grpSpPr>
+        <a:xfrm>
+          <a:off x="0" y="0"/>
+          <a:ext cx="0" cy="0"/>
+          <a:chOff x="0" y="0"/>
+          <a:chExt cx="0" cy="0"/>
+        </a:xfrm>
+      </p:grpSpPr>
+      <p:sp>
+        <p:nvSpPr>
+          <p:cNvPr id="2" name="Slide Image Placeholder 1"/>
+          <p:cNvSpPr>
+            <a:spLocks noGrp="1"/>
+          </p:cNvSpPr>
+          <p:nvPr>
+            <p:ph type="sldImg" idx="2"/>
+          </p:nvPr>
+        </p:nvSpPr>
+        <p:spPr/>
+      </p:sp>
+      <p:sp>
+        <p:nvSpPr>
+          <p:cNvPr id="3" name="Notes Placeholder 2"/>
+          <p:cNvSpPr>
+            <a:spLocks noGrp="1"/>
+          </p:cNvSpPr>
+          <p:nvPr>
+            <p:ph type="body" idx="3" sz="quarter"/>
+          </p:nvPr>
+        </p:nvSpPr>
+        <p:spPr/>
+        <p:txBody>
+          <a:bodyPr/>
+          <a:lstStyle/>
+          <a:p>
+            <a:r>
+              <a:t>Give students a few minutes to answer on mini whiteboards or paper, then reveal the answers on the next slide.</a:t>
+            </a:r>
+          </a:p>
+        </p:txBody>
+      </p:sp>
+      <p:sp>
+        <p:nvSpPr>
+          <p:cNvPr id="4" name="Slide Number Placeholder 3"/>
+          <p:cNvSpPr>
+            <a:spLocks noGrp="1"/>
+          </p:cNvSpPr>
+          <p:nvPr>
+            <p:ph type="sldNum" idx="5" sz="quarter"/>
+          </p:nvPr>
+        </p:nvSpPr>
+        <p:spPr/>
+      </p:sp>
+    </p:spTree>
+  </p:cSld>
+  <p:clrMapOvr>
+    <a:masterClrMapping/>
+  </p:clrMapOvr>
+</p:notes>
+</file>
+
+<file path=ppt/notesSlides/notesSlide7.xml><?xml version="1.0" encoding="utf-8"?>
+<p:notes xmlns:a="http://schemas.openxmlformats.org/drawingml/2006/main" xmlns:p="http://schemas.openxmlformats.org/presentationml/2006/main" xmlns:r="http://schemas.openxmlformats.org/officeDocument/2006/relationships">
+  <p:cSld>
+    <p:spTree>
+      <p:nvGrpSpPr>
+        <p:cNvPr id="1" name=""/>
+        <p:cNvGrpSpPr/>
+        <p:nvPr/>
+      </p:nvGrpSpPr>
+      <p:grpSpPr>
+        <a:xfrm>
+          <a:off x="0" y="0"/>
+          <a:ext cx="0" cy="0"/>
+          <a:chOff x="0" y="0"/>
+          <a:chExt cx="0" cy="0"/>
+        </a:xfrm>
+      </p:grpSpPr>
+      <p:sp>
+        <p:nvSpPr>
+          <p:cNvPr id="2" name="Slide Image Placeholder 1"/>
+          <p:cNvSpPr>
+            <a:spLocks noGrp="1"/>
+          </p:cNvSpPr>
+          <p:nvPr>
+            <p:ph type="sldImg" idx="2"/>
+          </p:nvPr>
+        </p:nvSpPr>
+        <p:spPr/>
+      </p:sp>
+      <p:sp>
+        <p:nvSpPr>
+          <p:cNvPr id="3" name="Notes Placeholder 2"/>
+          <p:cNvSpPr>
+            <a:spLocks noGrp="1"/>
+          </p:cNvSpPr>
+          <p:nvPr>
+            <p:ph type="body" idx="3" sz="quarter"/>
+          </p:nvPr>
+        </p:nvSpPr>
+        <p:spPr/>
+        <p:txBody>
+          <a:bodyPr/>
+          <a:lstStyle/>
+          <a:p>
+            <a:r>
+              <a:t>Talk through any answers the class found difficult.</a:t>
+            </a:r>
+          </a:p>
+        </p:txBody>
+      </p:sp>
+      <p:sp>
+        <p:nvSpPr>
+          <p:cNvPr id="4" name="Slide Number Placeholder 3"/>
+          <p:cNvSpPr>
+            <a:spLocks noGrp="1"/>
+          </p:cNvSpPr>
+          <p:nvPr>
+            <p:ph type="sldNum" idx="5" sz="quarter"/>
+          </p:nvPr>
+        </p:nvSpPr>
+        <p:spPr/>
+      </p:sp>
+    </p:spTree>
+  </p:cSld>
+  <p:clrMapOvr>
+    <a:masterClrMapping/>
+  </p:clrMapOvr>
+</p:notes>
+</file>
+
+<file path=ppt/notesSlides/notesSlide8.xml><?xml version="1.0" encoding="utf-8"?>
 <p:notes xmlns:a="http://schemas.openxmlformats.org/drawingml/2006/main" xmlns:p="http://schemas.openxmlformats.org/presentationml/2006/main" xmlns:r="http://schemas.openxmlformats.org/officeDocument/2006/relationships">
   <p:cSld>
     <p:spTree>
@@ -4122,6 +4383,3515 @@
     <p:bg>
       <p:bgPr>
         <a:solidFill>
+          <a:srgbClr val="FFFFFF"/>
+        </a:solidFill>
+        <a:effectLst/>
+      </p:bgPr>
+    </p:bg>
+    <p:spTree>
+      <p:nvGrpSpPr>
+        <p:cNvPr id="1" name=""/>
+        <p:cNvGrpSpPr/>
+        <p:nvPr/>
+      </p:nvGrpSpPr>
+      <p:grpSpPr/>
+      <p:sp>
+        <p:nvSpPr>
+          <p:cNvPr id="2" name="TextBox 1"/>
+          <p:cNvSpPr txBox="1"/>
+          <p:nvPr/>
+        </p:nvSpPr>
+        <p:spPr>
+          <a:xfrm>
+            <a:off x="548640" y="320040"/>
+            <a:ext cx="11094415" cy="274320"/>
+          </a:xfrm>
+          <a:prstGeom prst="rect">
+            <a:avLst/>
+          </a:prstGeom>
+          <a:noFill/>
+        </p:spPr>
+        <p:txBody>
+          <a:bodyPr wrap="square" anchor="t" lIns="0" rIns="0" tIns="0" bIns="0"/>
+          <a:lstStyle/>
+          <a:p>
+            <a:pPr algn="l"/>
+            <a:r>
+              <a:rPr sz="1100" b="1" i="0">
+                <a:solidFill>
+                  <a:srgbClr val="54595D"/>
+                </a:solidFill>
+                <a:latin typeface="Calibri"/>
+              </a:rPr>
+              <a:t>DIGITAL INFRASTRUCTURE  ·  Digital Infrastructure Content Area 2</a:t>
+            </a:r>
+          </a:p>
+        </p:txBody>
+      </p:sp>
+      <p:sp>
+        <p:nvSpPr>
+          <p:cNvPr id="3" name="TextBox 2"/>
+          <p:cNvSpPr txBox="1"/>
+          <p:nvPr/>
+        </p:nvSpPr>
+        <p:spPr>
+          <a:xfrm>
+            <a:off x="548640" y="566928"/>
+            <a:ext cx="11094415" cy="822960"/>
+          </a:xfrm>
+          <a:prstGeom prst="rect">
+            <a:avLst/>
+          </a:prstGeom>
+          <a:noFill/>
+        </p:spPr>
+        <p:txBody>
+          <a:bodyPr wrap="square" anchor="ctr" lIns="0" rIns="0" tIns="0" bIns="0"/>
+          <a:lstStyle/>
+          <a:p>
+            <a:pPr algn="l"/>
+            <a:r>
+              <a:rPr sz="3200" b="1" i="0">
+                <a:solidFill>
+                  <a:srgbClr val="03306E"/>
+                </a:solidFill>
+                <a:latin typeface="Cambria"/>
+              </a:rPr>
+              <a:t>IPv4 and IPv6</a:t>
+            </a:r>
+          </a:p>
+        </p:txBody>
+      </p:sp>
+      <p:sp>
+        <p:nvSpPr>
+          <p:cNvPr id="4" name="TextBox 3"/>
+          <p:cNvSpPr txBox="1"/>
+          <p:nvPr/>
+        </p:nvSpPr>
+        <p:spPr>
+          <a:xfrm>
+            <a:off x="548640" y="6446520"/>
+            <a:ext cx="8229600" cy="274320"/>
+          </a:xfrm>
+          <a:prstGeom prst="rect">
+            <a:avLst/>
+          </a:prstGeom>
+          <a:noFill/>
+        </p:spPr>
+        <p:txBody>
+          <a:bodyPr wrap="square" anchor="t" lIns="0" rIns="0" tIns="0" bIns="0"/>
+          <a:lstStyle/>
+          <a:p>
+            <a:pPr algn="l"/>
+            <a:r>
+              <a:rPr sz="1000" b="0" i="0">
+                <a:solidFill>
+                  <a:srgbClr val="54595D"/>
+                </a:solidFill>
+                <a:latin typeface="Calibri"/>
+              </a:rPr>
+              <a:t>Digital Support and Security T Level  ·  Network Design, Addressing and Transmission</a:t>
+            </a:r>
+          </a:p>
+        </p:txBody>
+      </p:sp>
+      <p:sp>
+        <p:nvSpPr>
+          <p:cNvPr id="5" name="TextBox 4"/>
+          <p:cNvSpPr txBox="1"/>
+          <p:nvPr/>
+        </p:nvSpPr>
+        <p:spPr>
+          <a:xfrm>
+            <a:off x="10728655" y="6446520"/>
+            <a:ext cx="914400" cy="274320"/>
+          </a:xfrm>
+          <a:prstGeom prst="rect">
+            <a:avLst/>
+          </a:prstGeom>
+          <a:noFill/>
+        </p:spPr>
+        <p:txBody>
+          <a:bodyPr wrap="square" anchor="t" lIns="0" rIns="0" tIns="0" bIns="0"/>
+          <a:lstStyle/>
+          <a:p>
+            <a:pPr algn="r"/>
+            <a:r>
+              <a:rPr sz="1000" b="0" i="0">
+                <a:solidFill>
+                  <a:srgbClr val="54595D"/>
+                </a:solidFill>
+                <a:latin typeface="Calibri"/>
+              </a:rPr>
+              <a:t>10</a:t>
+            </a:r>
+          </a:p>
+        </p:txBody>
+      </p:sp>
+      <p:sp>
+        <p:nvSpPr>
+          <p:cNvPr id="6" name="TextBox 5"/>
+          <p:cNvSpPr txBox="1"/>
+          <p:nvPr/>
+        </p:nvSpPr>
+        <p:spPr>
+          <a:xfrm>
+            <a:off x="548640" y="1554480"/>
+            <a:ext cx="6720840" cy="4617720"/>
+          </a:xfrm>
+          <a:prstGeom prst="rect">
+            <a:avLst/>
+          </a:prstGeom>
+          <a:noFill/>
+        </p:spPr>
+        <p:txBody>
+          <a:bodyPr wrap="square" lIns="0" rIns="0" tIns="0" bIns="0">
+            <a:spAutoFit/>
+          </a:bodyPr>
+          <a:lstStyle/>
+          <a:p>
+            <a:pPr>
+              <a:spcAft>
+                <a:spcPts val="1260"/>
+              </a:spcAft>
+            </a:pPr>
+            <a:r>
+              <a:rPr sz="2100" b="0">
+                <a:solidFill>
+                  <a:srgbClr val="202122"/>
+                </a:solidFill>
+                <a:latin typeface="Calibri"/>
+              </a:rPr>
+              <a:t>IPv4 addresses are 32 bits, written as four decimal numbers such as 192.168.1.10. The subnet mask (such as 255.255.255.0, or /24) shows which part is the network and which part identifies the host.</a:t>
+            </a:r>
+          </a:p>
+          <a:p>
+            <a:pPr>
+              <a:spcAft>
+                <a:spcPts val="1260"/>
+              </a:spcAft>
+            </a:pPr>
+            <a:r>
+              <a:rPr sz="2100" b="0">
+                <a:solidFill>
+                  <a:srgbClr val="202122"/>
+                </a:solidFill>
+                <a:latin typeface="Calibri"/>
+              </a:rPr>
+              <a:t>Subnetting splits one network into smaller ones, improving security and reducing broadcast traffic. The number of usable hosts is 2 to the power of the host bits, minus 2 (the network and broadcast addresses).</a:t>
+            </a:r>
+          </a:p>
+          <a:p>
+            <a:pPr>
+              <a:spcAft>
+                <a:spcPts val="1260"/>
+              </a:spcAft>
+            </a:pPr>
+            <a:r>
+              <a:rPr sz="2100" b="0">
+                <a:solidFill>
+                  <a:srgbClr val="202122"/>
+                </a:solidFill>
+                <a:latin typeface="Calibri"/>
+              </a:rPr>
+              <a:t>IPv4 has run out of addresses, so IPv6 uses 128-bit addresses written in hexadecimal. Types include unicast (one device), multicast (a group) and anycast (the nearest of a group).</a:t>
+            </a:r>
+          </a:p>
+        </p:txBody>
+      </p:sp>
+      <p:sp>
+        <p:nvSpPr>
+          <p:cNvPr id="7" name="Rounded Rectangle 6"/>
+          <p:cNvSpPr/>
+          <p:nvPr/>
+        </p:nvSpPr>
+        <p:spPr>
+          <a:xfrm>
+            <a:off x="7772400" y="1554480"/>
+            <a:ext cx="3867912" cy="4526280"/>
+          </a:xfrm>
+          <a:prstGeom prst="roundRect">
+            <a:avLst>
+              <a:gd name="adj" fmla="val 8000"/>
+            </a:avLst>
+          </a:prstGeom>
+          <a:solidFill>
+            <a:srgbClr val="03306E"/>
+          </a:solidFill>
+          <a:ln>
+            <a:noFill/>
+          </a:ln>
+          <a:effectLst/>
+        </p:spPr>
+        <p:style>
+          <a:lnRef idx="1">
+            <a:schemeClr val="accent1"/>
+          </a:lnRef>
+          <a:fillRef idx="3">
+            <a:schemeClr val="accent1"/>
+          </a:fillRef>
+          <a:effectRef idx="2">
+            <a:schemeClr val="accent1"/>
+          </a:effectRef>
+          <a:fontRef idx="minor">
+            <a:schemeClr val="lt1"/>
+          </a:fontRef>
+        </p:style>
+        <p:txBody>
+          <a:bodyPr rtlCol="0" anchor="ctr"/>
+          <a:lstStyle/>
+          <a:p/>
+        </p:txBody>
+      </p:sp>
+      <p:sp>
+        <p:nvSpPr>
+          <p:cNvPr id="8" name="Oval 7"/>
+          <p:cNvSpPr/>
+          <p:nvPr/>
+        </p:nvSpPr>
+        <p:spPr>
+          <a:xfrm>
+            <a:off x="8046720" y="1828800"/>
+            <a:ext cx="548640" cy="548640"/>
+          </a:xfrm>
+          <a:prstGeom prst="ellipse">
+            <a:avLst/>
+          </a:prstGeom>
+          <a:solidFill>
+            <a:srgbClr val="33C17A"/>
+          </a:solidFill>
+          <a:ln>
+            <a:noFill/>
+          </a:ln>
+          <a:effectLst/>
+        </p:spPr>
+        <p:style>
+          <a:lnRef idx="1">
+            <a:schemeClr val="accent1"/>
+          </a:lnRef>
+          <a:fillRef idx="3">
+            <a:schemeClr val="accent1"/>
+          </a:fillRef>
+          <a:effectRef idx="2">
+            <a:schemeClr val="accent1"/>
+          </a:effectRef>
+          <a:fontRef idx="minor">
+            <a:schemeClr val="lt1"/>
+          </a:fontRef>
+        </p:style>
+        <p:txBody>
+          <a:bodyPr rtlCol="0" anchor="ctr" lIns="0" rIns="0" tIns="0" bIns="0"/>
+          <a:lstStyle/>
+          <a:p>
+            <a:pPr algn="ctr"/>
+            <a:r>
+              <a:rPr sz="1300" b="1">
+                <a:solidFill>
+                  <a:srgbClr val="202122"/>
+                </a:solidFill>
+                <a:latin typeface="Calibri"/>
+              </a:rPr>
+              <a:t>e.g.</a:t>
+            </a:r>
+          </a:p>
+        </p:txBody>
+      </p:sp>
+      <p:sp>
+        <p:nvSpPr>
+          <p:cNvPr id="9" name="TextBox 8"/>
+          <p:cNvSpPr txBox="1"/>
+          <p:nvPr/>
+        </p:nvSpPr>
+        <p:spPr>
+          <a:xfrm>
+            <a:off x="8046720" y="2560320"/>
+            <a:ext cx="3291840" cy="365760"/>
+          </a:xfrm>
+          <a:prstGeom prst="rect">
+            <a:avLst/>
+          </a:prstGeom>
+          <a:noFill/>
+        </p:spPr>
+        <p:txBody>
+          <a:bodyPr wrap="square" anchor="t" lIns="0" rIns="0" tIns="0" bIns="0"/>
+          <a:lstStyle/>
+          <a:p>
+            <a:pPr algn="l"/>
+            <a:r>
+              <a:rPr sz="1300" b="1" i="0">
+                <a:solidFill>
+                  <a:srgbClr val="A9C8F0"/>
+                </a:solidFill>
+                <a:latin typeface="Calibri"/>
+              </a:rPr>
+              <a:t>EXAMPLE</a:t>
+            </a:r>
+          </a:p>
+        </p:txBody>
+      </p:sp>
+      <p:sp>
+        <p:nvSpPr>
+          <p:cNvPr id="10" name="TextBox 9"/>
+          <p:cNvSpPr txBox="1"/>
+          <p:nvPr/>
+        </p:nvSpPr>
+        <p:spPr>
+          <a:xfrm>
+            <a:off x="8046720" y="2971800"/>
+            <a:ext cx="3291840" cy="2971800"/>
+          </a:xfrm>
+          <a:prstGeom prst="rect">
+            <a:avLst/>
+          </a:prstGeom>
+          <a:noFill/>
+        </p:spPr>
+        <p:txBody>
+          <a:bodyPr wrap="square" anchor="t" lIns="0" rIns="0" tIns="0" bIns="0"/>
+          <a:lstStyle/>
+          <a:p>
+            <a:pPr algn="l"/>
+            <a:r>
+              <a:rPr sz="1900" b="0" i="0">
+                <a:solidFill>
+                  <a:srgbClr val="FFFFFF"/>
+                </a:solidFill>
+                <a:latin typeface="Cambria"/>
+              </a:rPr>
+              <a:t>192.168.10.0/26 leaves 6 host bits: 2 to the power 6 = 64, minus 2 = 62 usable addresses per subnet, giving four subnets from one /24.</a:t>
+            </a:r>
+          </a:p>
+        </p:txBody>
+      </p:sp>
+    </p:spTree>
+  </p:cSld>
+  <p:clrMapOvr>
+    <a:masterClrMapping/>
+  </p:clrMapOvr>
+</p:sld>
+</file>
+
+<file path=ppt/slides/slide11.xml><?xml version="1.0" encoding="utf-8"?>
+<p:sld xmlns:a="http://schemas.openxmlformats.org/drawingml/2006/main" xmlns:p="http://schemas.openxmlformats.org/presentationml/2006/main" xmlns:r="http://schemas.openxmlformats.org/officeDocument/2006/relationships">
+  <p:cSld>
+    <p:bg>
+      <p:bgPr>
+        <a:solidFill>
+          <a:srgbClr val="FFFFFF"/>
+        </a:solidFill>
+        <a:effectLst/>
+      </p:bgPr>
+    </p:bg>
+    <p:spTree>
+      <p:nvGrpSpPr>
+        <p:cNvPr id="1" name=""/>
+        <p:cNvGrpSpPr/>
+        <p:nvPr/>
+      </p:nvGrpSpPr>
+      <p:grpSpPr/>
+      <p:sp>
+        <p:nvSpPr>
+          <p:cNvPr id="2" name="TextBox 1"/>
+          <p:cNvSpPr txBox="1"/>
+          <p:nvPr/>
+        </p:nvSpPr>
+        <p:spPr>
+          <a:xfrm>
+            <a:off x="548640" y="320040"/>
+            <a:ext cx="11094415" cy="274320"/>
+          </a:xfrm>
+          <a:prstGeom prst="rect">
+            <a:avLst/>
+          </a:prstGeom>
+          <a:noFill/>
+        </p:spPr>
+        <p:txBody>
+          <a:bodyPr wrap="square" anchor="t" lIns="0" rIns="0" tIns="0" bIns="0"/>
+          <a:lstStyle/>
+          <a:p>
+            <a:pPr algn="l"/>
+            <a:r>
+              <a:rPr sz="1100" b="1" i="0">
+                <a:solidFill>
+                  <a:srgbClr val="54595D"/>
+                </a:solidFill>
+                <a:latin typeface="Calibri"/>
+              </a:rPr>
+              <a:t>DIGITAL INFRASTRUCTURE  ·  Digital Infrastructure Content Area 2</a:t>
+            </a:r>
+          </a:p>
+        </p:txBody>
+      </p:sp>
+      <p:sp>
+        <p:nvSpPr>
+          <p:cNvPr id="3" name="TextBox 2"/>
+          <p:cNvSpPr txBox="1"/>
+          <p:nvPr/>
+        </p:nvSpPr>
+        <p:spPr>
+          <a:xfrm>
+            <a:off x="548640" y="566928"/>
+            <a:ext cx="11094415" cy="822960"/>
+          </a:xfrm>
+          <a:prstGeom prst="rect">
+            <a:avLst/>
+          </a:prstGeom>
+          <a:noFill/>
+        </p:spPr>
+        <p:txBody>
+          <a:bodyPr wrap="square" anchor="ctr" lIns="0" rIns="0" tIns="0" bIns="0"/>
+          <a:lstStyle/>
+          <a:p>
+            <a:pPr algn="l"/>
+            <a:r>
+              <a:rPr sz="3200" b="1" i="0">
+                <a:solidFill>
+                  <a:srgbClr val="03306E"/>
+                </a:solidFill>
+                <a:latin typeface="Cambria"/>
+              </a:rPr>
+              <a:t>IPv4 and IPv6</a:t>
+            </a:r>
+          </a:p>
+        </p:txBody>
+      </p:sp>
+      <p:sp>
+        <p:nvSpPr>
+          <p:cNvPr id="4" name="TextBox 3"/>
+          <p:cNvSpPr txBox="1"/>
+          <p:nvPr/>
+        </p:nvSpPr>
+        <p:spPr>
+          <a:xfrm>
+            <a:off x="548640" y="6446520"/>
+            <a:ext cx="8229600" cy="274320"/>
+          </a:xfrm>
+          <a:prstGeom prst="rect">
+            <a:avLst/>
+          </a:prstGeom>
+          <a:noFill/>
+        </p:spPr>
+        <p:txBody>
+          <a:bodyPr wrap="square" anchor="t" lIns="0" rIns="0" tIns="0" bIns="0"/>
+          <a:lstStyle/>
+          <a:p>
+            <a:pPr algn="l"/>
+            <a:r>
+              <a:rPr sz="1000" b="0" i="0">
+                <a:solidFill>
+                  <a:srgbClr val="54595D"/>
+                </a:solidFill>
+                <a:latin typeface="Calibri"/>
+              </a:rPr>
+              <a:t>Digital Support and Security T Level  ·  Network Design, Addressing and Transmission</a:t>
+            </a:r>
+          </a:p>
+        </p:txBody>
+      </p:sp>
+      <p:sp>
+        <p:nvSpPr>
+          <p:cNvPr id="5" name="TextBox 4"/>
+          <p:cNvSpPr txBox="1"/>
+          <p:nvPr/>
+        </p:nvSpPr>
+        <p:spPr>
+          <a:xfrm>
+            <a:off x="10728655" y="6446520"/>
+            <a:ext cx="914400" cy="274320"/>
+          </a:xfrm>
+          <a:prstGeom prst="rect">
+            <a:avLst/>
+          </a:prstGeom>
+          <a:noFill/>
+        </p:spPr>
+        <p:txBody>
+          <a:bodyPr wrap="square" anchor="t" lIns="0" rIns="0" tIns="0" bIns="0"/>
+          <a:lstStyle/>
+          <a:p>
+            <a:pPr algn="r"/>
+            <a:r>
+              <a:rPr sz="1000" b="0" i="0">
+                <a:solidFill>
+                  <a:srgbClr val="54595D"/>
+                </a:solidFill>
+                <a:latin typeface="Calibri"/>
+              </a:rPr>
+              <a:t>11</a:t>
+            </a:r>
+          </a:p>
+        </p:txBody>
+      </p:sp>
+      <p:sp>
+        <p:nvSpPr>
+          <p:cNvPr id="6" name="Rounded Rectangle 5"/>
+          <p:cNvSpPr/>
+          <p:nvPr/>
+        </p:nvSpPr>
+        <p:spPr>
+          <a:xfrm>
+            <a:off x="548640" y="1600200"/>
+            <a:ext cx="5364327" cy="640080"/>
+          </a:xfrm>
+          <a:prstGeom prst="roundRect">
+            <a:avLst>
+              <a:gd name="adj" fmla="val 15000"/>
+            </a:avLst>
+          </a:prstGeom>
+          <a:solidFill>
+            <a:srgbClr val="03306E"/>
+          </a:solidFill>
+          <a:ln>
+            <a:noFill/>
+          </a:ln>
+          <a:effectLst/>
+        </p:spPr>
+        <p:style>
+          <a:lnRef idx="1">
+            <a:schemeClr val="accent1"/>
+          </a:lnRef>
+          <a:fillRef idx="3">
+            <a:schemeClr val="accent1"/>
+          </a:fillRef>
+          <a:effectRef idx="2">
+            <a:schemeClr val="accent1"/>
+          </a:effectRef>
+          <a:fontRef idx="minor">
+            <a:schemeClr val="lt1"/>
+          </a:fontRef>
+        </p:style>
+        <p:txBody>
+          <a:bodyPr rtlCol="0" anchor="ctr"/>
+          <a:lstStyle/>
+          <a:p/>
+        </p:txBody>
+      </p:sp>
+      <p:sp>
+        <p:nvSpPr>
+          <p:cNvPr id="7" name="TextBox 6"/>
+          <p:cNvSpPr txBox="1"/>
+          <p:nvPr/>
+        </p:nvSpPr>
+        <p:spPr>
+          <a:xfrm>
+            <a:off x="777240" y="1600200"/>
+            <a:ext cx="4907127" cy="640080"/>
+          </a:xfrm>
+          <a:prstGeom prst="rect">
+            <a:avLst/>
+          </a:prstGeom>
+          <a:noFill/>
+        </p:spPr>
+        <p:txBody>
+          <a:bodyPr wrap="square" anchor="ctr" lIns="0" rIns="0" tIns="0" bIns="0"/>
+          <a:lstStyle/>
+          <a:p>
+            <a:pPr algn="l"/>
+            <a:r>
+              <a:rPr sz="2000" b="1" i="0">
+                <a:solidFill>
+                  <a:srgbClr val="FFFFFF"/>
+                </a:solidFill>
+                <a:latin typeface="Calibri"/>
+              </a:rPr>
+              <a:t>IPv4</a:t>
+            </a:r>
+          </a:p>
+        </p:txBody>
+      </p:sp>
+      <p:sp>
+        <p:nvSpPr>
+          <p:cNvPr id="8" name="Rounded Rectangle 7"/>
+          <p:cNvSpPr/>
+          <p:nvPr/>
+        </p:nvSpPr>
+        <p:spPr>
+          <a:xfrm>
+            <a:off x="548640" y="2377440"/>
+            <a:ext cx="5364327" cy="3794760"/>
+          </a:xfrm>
+          <a:prstGeom prst="roundRect">
+            <a:avLst>
+              <a:gd name="adj" fmla="val 4000"/>
+            </a:avLst>
+          </a:prstGeom>
+          <a:solidFill>
+            <a:srgbClr val="EAF3FF"/>
+          </a:solidFill>
+          <a:ln>
+            <a:noFill/>
+          </a:ln>
+          <a:effectLst/>
+        </p:spPr>
+        <p:style>
+          <a:lnRef idx="1">
+            <a:schemeClr val="accent1"/>
+          </a:lnRef>
+          <a:fillRef idx="3">
+            <a:schemeClr val="accent1"/>
+          </a:fillRef>
+          <a:effectRef idx="2">
+            <a:schemeClr val="accent1"/>
+          </a:effectRef>
+          <a:fontRef idx="minor">
+            <a:schemeClr val="lt1"/>
+          </a:fontRef>
+        </p:style>
+        <p:txBody>
+          <a:bodyPr rtlCol="0" anchor="ctr"/>
+          <a:lstStyle/>
+          <a:p/>
+        </p:txBody>
+      </p:sp>
+      <p:sp>
+        <p:nvSpPr>
+          <p:cNvPr id="9" name="TextBox 8"/>
+          <p:cNvSpPr txBox="1"/>
+          <p:nvPr/>
+        </p:nvSpPr>
+        <p:spPr>
+          <a:xfrm>
+            <a:off x="822959" y="2606040"/>
+            <a:ext cx="4815687" cy="3337560"/>
+          </a:xfrm>
+          <a:prstGeom prst="rect">
+            <a:avLst/>
+          </a:prstGeom>
+          <a:noFill/>
+        </p:spPr>
+        <p:txBody>
+          <a:bodyPr wrap="square" lIns="0" rIns="0" tIns="0" bIns="0">
+            <a:spAutoFit/>
+          </a:bodyPr>
+          <a:lstStyle/>
+          <a:p>
+            <a:pPr marL="274320" indent="-274320">
+              <a:spcAft>
+                <a:spcPts val="990"/>
+              </a:spcAft>
+              <a:buClr>
+                <a:srgbClr val="0645AD"/>
+              </a:buClr>
+              <a:buFont typeface="Arial"/>
+              <a:buChar char="•"/>
+            </a:pPr>
+            <a:r>
+              <a:rPr sz="2200" b="0">
+                <a:solidFill>
+                  <a:srgbClr val="202122"/>
+                </a:solidFill>
+                <a:latin typeface="Calibri"/>
+              </a:rPr>
+              <a:t>32-bit address, e.g. 192.168.1.10</a:t>
+            </a:r>
+          </a:p>
+          <a:p>
+            <a:pPr marL="274320" indent="-274320">
+              <a:spcAft>
+                <a:spcPts val="990"/>
+              </a:spcAft>
+              <a:buClr>
+                <a:srgbClr val="0645AD"/>
+              </a:buClr>
+              <a:buFont typeface="Arial"/>
+              <a:buChar char="•"/>
+            </a:pPr>
+            <a:r>
+              <a:rPr sz="2200" b="0">
+                <a:solidFill>
+                  <a:srgbClr val="202122"/>
+                </a:solidFill>
+                <a:latin typeface="Calibri"/>
+              </a:rPr>
+              <a:t>Subnet mask splits network and host, e.g. /24</a:t>
+            </a:r>
+          </a:p>
+          <a:p>
+            <a:pPr marL="274320" indent="-274320">
+              <a:spcAft>
+                <a:spcPts val="990"/>
+              </a:spcAft>
+              <a:buClr>
+                <a:srgbClr val="0645AD"/>
+              </a:buClr>
+              <a:buFont typeface="Arial"/>
+              <a:buChar char="•"/>
+            </a:pPr>
+            <a:r>
+              <a:rPr sz="2200" b="0">
+                <a:solidFill>
+                  <a:srgbClr val="202122"/>
+                </a:solidFill>
+                <a:latin typeface="Calibri"/>
+              </a:rPr>
+              <a:t>Subnetting divides a network into smaller ones</a:t>
+            </a:r>
+          </a:p>
+          <a:p>
+            <a:pPr marL="274320" indent="-274320">
+              <a:spcAft>
+                <a:spcPts val="990"/>
+              </a:spcAft>
+              <a:buClr>
+                <a:srgbClr val="0645AD"/>
+              </a:buClr>
+              <a:buFont typeface="Arial"/>
+              <a:buChar char="•"/>
+            </a:pPr>
+            <a:r>
+              <a:rPr sz="2200" b="0">
+                <a:solidFill>
+                  <a:srgbClr val="202122"/>
+                </a:solidFill>
+                <a:latin typeface="Calibri"/>
+              </a:rPr>
+              <a:t>Private ranges, e.g. 10.0.0.0/8</a:t>
+            </a:r>
+          </a:p>
+        </p:txBody>
+      </p:sp>
+      <p:sp>
+        <p:nvSpPr>
+          <p:cNvPr id="10" name="Rounded Rectangle 9"/>
+          <p:cNvSpPr/>
+          <p:nvPr/>
+        </p:nvSpPr>
+        <p:spPr>
+          <a:xfrm>
+            <a:off x="6278727" y="1600200"/>
+            <a:ext cx="5364327" cy="640080"/>
+          </a:xfrm>
+          <a:prstGeom prst="roundRect">
+            <a:avLst>
+              <a:gd name="adj" fmla="val 15000"/>
+            </a:avLst>
+          </a:prstGeom>
+          <a:solidFill>
+            <a:srgbClr val="0645AD"/>
+          </a:solidFill>
+          <a:ln>
+            <a:noFill/>
+          </a:ln>
+          <a:effectLst/>
+        </p:spPr>
+        <p:style>
+          <a:lnRef idx="1">
+            <a:schemeClr val="accent1"/>
+          </a:lnRef>
+          <a:fillRef idx="3">
+            <a:schemeClr val="accent1"/>
+          </a:fillRef>
+          <a:effectRef idx="2">
+            <a:schemeClr val="accent1"/>
+          </a:effectRef>
+          <a:fontRef idx="minor">
+            <a:schemeClr val="lt1"/>
+          </a:fontRef>
+        </p:style>
+        <p:txBody>
+          <a:bodyPr rtlCol="0" anchor="ctr"/>
+          <a:lstStyle/>
+          <a:p/>
+        </p:txBody>
+      </p:sp>
+      <p:sp>
+        <p:nvSpPr>
+          <p:cNvPr id="11" name="TextBox 10"/>
+          <p:cNvSpPr txBox="1"/>
+          <p:nvPr/>
+        </p:nvSpPr>
+        <p:spPr>
+          <a:xfrm>
+            <a:off x="6507327" y="1600200"/>
+            <a:ext cx="4907127" cy="640080"/>
+          </a:xfrm>
+          <a:prstGeom prst="rect">
+            <a:avLst/>
+          </a:prstGeom>
+          <a:noFill/>
+        </p:spPr>
+        <p:txBody>
+          <a:bodyPr wrap="square" anchor="ctr" lIns="0" rIns="0" tIns="0" bIns="0"/>
+          <a:lstStyle/>
+          <a:p>
+            <a:pPr algn="l"/>
+            <a:r>
+              <a:rPr sz="2000" b="1" i="0">
+                <a:solidFill>
+                  <a:srgbClr val="FFFFFF"/>
+                </a:solidFill>
+                <a:latin typeface="Calibri"/>
+              </a:rPr>
+              <a:t>IPv6</a:t>
+            </a:r>
+          </a:p>
+        </p:txBody>
+      </p:sp>
+      <p:sp>
+        <p:nvSpPr>
+          <p:cNvPr id="12" name="Rounded Rectangle 11"/>
+          <p:cNvSpPr/>
+          <p:nvPr/>
+        </p:nvSpPr>
+        <p:spPr>
+          <a:xfrm>
+            <a:off x="6278727" y="2377440"/>
+            <a:ext cx="5364327" cy="3794760"/>
+          </a:xfrm>
+          <a:prstGeom prst="roundRect">
+            <a:avLst>
+              <a:gd name="adj" fmla="val 4000"/>
+            </a:avLst>
+          </a:prstGeom>
+          <a:solidFill>
+            <a:srgbClr val="EAF3FF"/>
+          </a:solidFill>
+          <a:ln>
+            <a:noFill/>
+          </a:ln>
+          <a:effectLst/>
+        </p:spPr>
+        <p:style>
+          <a:lnRef idx="1">
+            <a:schemeClr val="accent1"/>
+          </a:lnRef>
+          <a:fillRef idx="3">
+            <a:schemeClr val="accent1"/>
+          </a:fillRef>
+          <a:effectRef idx="2">
+            <a:schemeClr val="accent1"/>
+          </a:effectRef>
+          <a:fontRef idx="minor">
+            <a:schemeClr val="lt1"/>
+          </a:fontRef>
+        </p:style>
+        <p:txBody>
+          <a:bodyPr rtlCol="0" anchor="ctr"/>
+          <a:lstStyle/>
+          <a:p/>
+        </p:txBody>
+      </p:sp>
+      <p:sp>
+        <p:nvSpPr>
+          <p:cNvPr id="13" name="TextBox 12"/>
+          <p:cNvSpPr txBox="1"/>
+          <p:nvPr/>
+        </p:nvSpPr>
+        <p:spPr>
+          <a:xfrm>
+            <a:off x="6553047" y="2606040"/>
+            <a:ext cx="4815687" cy="3337560"/>
+          </a:xfrm>
+          <a:prstGeom prst="rect">
+            <a:avLst/>
+          </a:prstGeom>
+          <a:noFill/>
+        </p:spPr>
+        <p:txBody>
+          <a:bodyPr wrap="square" lIns="0" rIns="0" tIns="0" bIns="0">
+            <a:spAutoFit/>
+          </a:bodyPr>
+          <a:lstStyle/>
+          <a:p>
+            <a:pPr marL="274320" indent="-274320">
+              <a:spcAft>
+                <a:spcPts val="990"/>
+              </a:spcAft>
+              <a:buClr>
+                <a:srgbClr val="0645AD"/>
+              </a:buClr>
+              <a:buFont typeface="Arial"/>
+              <a:buChar char="•"/>
+            </a:pPr>
+            <a:r>
+              <a:rPr sz="2200" b="0">
+                <a:solidFill>
+                  <a:srgbClr val="202122"/>
+                </a:solidFill>
+                <a:latin typeface="Calibri"/>
+              </a:rPr>
+              <a:t>128-bit address in hexadecimal</a:t>
+            </a:r>
+          </a:p>
+          <a:p>
+            <a:pPr marL="274320" indent="-274320">
+              <a:spcAft>
+                <a:spcPts val="990"/>
+              </a:spcAft>
+              <a:buClr>
+                <a:srgbClr val="0645AD"/>
+              </a:buClr>
+              <a:buFont typeface="Arial"/>
+              <a:buChar char="•"/>
+            </a:pPr>
+            <a:r>
+              <a:rPr sz="2200" b="1">
+                <a:solidFill>
+                  <a:srgbClr val="202122"/>
+                </a:solidFill>
+                <a:latin typeface="Calibri"/>
+              </a:rPr>
+              <a:t>Unicast:</a:t>
+            </a:r>
+            <a:r>
+              <a:rPr sz="2200" b="0">
+                <a:solidFill>
+                  <a:srgbClr val="202122"/>
+                </a:solidFill>
+                <a:latin typeface="Calibri"/>
+              </a:rPr>
+              <a:t> one interface</a:t>
+            </a:r>
+          </a:p>
+          <a:p>
+            <a:pPr marL="274320" indent="-274320">
+              <a:spcAft>
+                <a:spcPts val="990"/>
+              </a:spcAft>
+              <a:buClr>
+                <a:srgbClr val="0645AD"/>
+              </a:buClr>
+              <a:buFont typeface="Arial"/>
+              <a:buChar char="•"/>
+            </a:pPr>
+            <a:r>
+              <a:rPr sz="2200" b="1">
+                <a:solidFill>
+                  <a:srgbClr val="202122"/>
+                </a:solidFill>
+                <a:latin typeface="Calibri"/>
+              </a:rPr>
+              <a:t>Multicast:</a:t>
+            </a:r>
+            <a:r>
+              <a:rPr sz="2200" b="0">
+                <a:solidFill>
+                  <a:srgbClr val="202122"/>
+                </a:solidFill>
+                <a:latin typeface="Calibri"/>
+              </a:rPr>
+              <a:t> a group</a:t>
+            </a:r>
+          </a:p>
+          <a:p>
+            <a:pPr marL="274320" indent="-274320">
+              <a:spcAft>
+                <a:spcPts val="990"/>
+              </a:spcAft>
+              <a:buClr>
+                <a:srgbClr val="0645AD"/>
+              </a:buClr>
+              <a:buFont typeface="Arial"/>
+              <a:buChar char="•"/>
+            </a:pPr>
+            <a:r>
+              <a:rPr sz="2200" b="1">
+                <a:solidFill>
+                  <a:srgbClr val="202122"/>
+                </a:solidFill>
+                <a:latin typeface="Calibri"/>
+              </a:rPr>
+              <a:t>Anycast:</a:t>
+            </a:r>
+            <a:r>
+              <a:rPr sz="2200" b="0">
+                <a:solidFill>
+                  <a:srgbClr val="202122"/>
+                </a:solidFill>
+                <a:latin typeface="Calibri"/>
+              </a:rPr>
+              <a:t> the nearest of a group</a:t>
+            </a:r>
+          </a:p>
+          <a:p>
+            <a:pPr marL="274320" indent="-274320">
+              <a:spcAft>
+                <a:spcPts val="990"/>
+              </a:spcAft>
+              <a:buClr>
+                <a:srgbClr val="0645AD"/>
+              </a:buClr>
+              <a:buFont typeface="Arial"/>
+              <a:buChar char="•"/>
+            </a:pPr>
+            <a:r>
+              <a:rPr sz="2200" b="0">
+                <a:solidFill>
+                  <a:srgbClr val="202122"/>
+                </a:solidFill>
+                <a:latin typeface="Calibri"/>
+              </a:rPr>
+              <a:t>Link-local and global addresses</a:t>
+            </a:r>
+          </a:p>
+        </p:txBody>
+      </p:sp>
+    </p:spTree>
+  </p:cSld>
+  <p:clrMapOvr>
+    <a:masterClrMapping/>
+  </p:clrMapOvr>
+</p:sld>
+</file>
+
+<file path=ppt/slides/slide12.xml><?xml version="1.0" encoding="utf-8"?>
+<p:sld xmlns:a="http://schemas.openxmlformats.org/drawingml/2006/main" xmlns:p="http://schemas.openxmlformats.org/presentationml/2006/main" xmlns:r="http://schemas.openxmlformats.org/officeDocument/2006/relationships">
+  <p:cSld>
+    <p:bg>
+      <p:bgPr>
+        <a:solidFill>
+          <a:srgbClr val="FFFFFF"/>
+        </a:solidFill>
+        <a:effectLst/>
+      </p:bgPr>
+    </p:bg>
+    <p:spTree>
+      <p:nvGrpSpPr>
+        <p:cNvPr id="1" name=""/>
+        <p:cNvGrpSpPr/>
+        <p:nvPr/>
+      </p:nvGrpSpPr>
+      <p:grpSpPr/>
+      <p:sp>
+        <p:nvSpPr>
+          <p:cNvPr id="2" name="TextBox 1"/>
+          <p:cNvSpPr txBox="1"/>
+          <p:nvPr/>
+        </p:nvSpPr>
+        <p:spPr>
+          <a:xfrm>
+            <a:off x="548640" y="320040"/>
+            <a:ext cx="11094415" cy="274320"/>
+          </a:xfrm>
+          <a:prstGeom prst="rect">
+            <a:avLst/>
+          </a:prstGeom>
+          <a:noFill/>
+        </p:spPr>
+        <p:txBody>
+          <a:bodyPr wrap="square" anchor="t" lIns="0" rIns="0" tIns="0" bIns="0"/>
+          <a:lstStyle/>
+          <a:p>
+            <a:pPr algn="l"/>
+            <a:r>
+              <a:rPr sz="1100" b="1" i="0">
+                <a:solidFill>
+                  <a:srgbClr val="54595D"/>
+                </a:solidFill>
+                <a:latin typeface="Calibri"/>
+              </a:rPr>
+              <a:t>DIGITAL INFRASTRUCTURE  ·  Digital Infrastructure Content Area 2</a:t>
+            </a:r>
+          </a:p>
+        </p:txBody>
+      </p:sp>
+      <p:sp>
+        <p:nvSpPr>
+          <p:cNvPr id="3" name="TextBox 2"/>
+          <p:cNvSpPr txBox="1"/>
+          <p:nvPr/>
+        </p:nvSpPr>
+        <p:spPr>
+          <a:xfrm>
+            <a:off x="548640" y="566928"/>
+            <a:ext cx="11094415" cy="822960"/>
+          </a:xfrm>
+          <a:prstGeom prst="rect">
+            <a:avLst/>
+          </a:prstGeom>
+          <a:noFill/>
+        </p:spPr>
+        <p:txBody>
+          <a:bodyPr wrap="square" anchor="ctr" lIns="0" rIns="0" tIns="0" bIns="0"/>
+          <a:lstStyle/>
+          <a:p>
+            <a:pPr algn="l"/>
+            <a:r>
+              <a:rPr sz="3200" b="1" i="0">
+                <a:solidFill>
+                  <a:srgbClr val="03306E"/>
+                </a:solidFill>
+                <a:latin typeface="Cambria"/>
+              </a:rPr>
+              <a:t>Quick check: IPv4 and IPv6</a:t>
+            </a:r>
+          </a:p>
+        </p:txBody>
+      </p:sp>
+      <p:sp>
+        <p:nvSpPr>
+          <p:cNvPr id="4" name="TextBox 3"/>
+          <p:cNvSpPr txBox="1"/>
+          <p:nvPr/>
+        </p:nvSpPr>
+        <p:spPr>
+          <a:xfrm>
+            <a:off x="548640" y="6446520"/>
+            <a:ext cx="8229600" cy="274320"/>
+          </a:xfrm>
+          <a:prstGeom prst="rect">
+            <a:avLst/>
+          </a:prstGeom>
+          <a:noFill/>
+        </p:spPr>
+        <p:txBody>
+          <a:bodyPr wrap="square" anchor="t" lIns="0" rIns="0" tIns="0" bIns="0"/>
+          <a:lstStyle/>
+          <a:p>
+            <a:pPr algn="l"/>
+            <a:r>
+              <a:rPr sz="1000" b="0" i="0">
+                <a:solidFill>
+                  <a:srgbClr val="54595D"/>
+                </a:solidFill>
+                <a:latin typeface="Calibri"/>
+              </a:rPr>
+              <a:t>Digital Support and Security T Level  ·  Network Design, Addressing and Transmission</a:t>
+            </a:r>
+          </a:p>
+        </p:txBody>
+      </p:sp>
+      <p:sp>
+        <p:nvSpPr>
+          <p:cNvPr id="5" name="TextBox 4"/>
+          <p:cNvSpPr txBox="1"/>
+          <p:nvPr/>
+        </p:nvSpPr>
+        <p:spPr>
+          <a:xfrm>
+            <a:off x="10728655" y="6446520"/>
+            <a:ext cx="914400" cy="274320"/>
+          </a:xfrm>
+          <a:prstGeom prst="rect">
+            <a:avLst/>
+          </a:prstGeom>
+          <a:noFill/>
+        </p:spPr>
+        <p:txBody>
+          <a:bodyPr wrap="square" anchor="t" lIns="0" rIns="0" tIns="0" bIns="0"/>
+          <a:lstStyle/>
+          <a:p>
+            <a:pPr algn="r"/>
+            <a:r>
+              <a:rPr sz="1000" b="0" i="0">
+                <a:solidFill>
+                  <a:srgbClr val="54595D"/>
+                </a:solidFill>
+                <a:latin typeface="Calibri"/>
+              </a:rPr>
+              <a:t>12</a:t>
+            </a:r>
+          </a:p>
+        </p:txBody>
+      </p:sp>
+      <p:sp>
+        <p:nvSpPr>
+          <p:cNvPr id="6" name="Oval 5"/>
+          <p:cNvSpPr/>
+          <p:nvPr/>
+        </p:nvSpPr>
+        <p:spPr>
+          <a:xfrm>
+            <a:off x="548640" y="1691640"/>
+            <a:ext cx="502920" cy="502920"/>
+          </a:xfrm>
+          <a:prstGeom prst="ellipse">
+            <a:avLst/>
+          </a:prstGeom>
+          <a:solidFill>
+            <a:srgbClr val="33C17A"/>
+          </a:solidFill>
+          <a:ln>
+            <a:noFill/>
+          </a:ln>
+          <a:effectLst/>
+        </p:spPr>
+        <p:style>
+          <a:lnRef idx="1">
+            <a:schemeClr val="accent1"/>
+          </a:lnRef>
+          <a:fillRef idx="3">
+            <a:schemeClr val="accent1"/>
+          </a:fillRef>
+          <a:effectRef idx="2">
+            <a:schemeClr val="accent1"/>
+          </a:effectRef>
+          <a:fontRef idx="minor">
+            <a:schemeClr val="lt1"/>
+          </a:fontRef>
+        </p:style>
+        <p:txBody>
+          <a:bodyPr rtlCol="0" anchor="ctr" lIns="0" rIns="0" tIns="0" bIns="0"/>
+          <a:lstStyle/>
+          <a:p>
+            <a:pPr algn="ctr"/>
+            <a:r>
+              <a:rPr sz="1600" b="1">
+                <a:solidFill>
+                  <a:srgbClr val="202122"/>
+                </a:solidFill>
+                <a:latin typeface="Calibri"/>
+              </a:rPr>
+              <a:t>1</a:t>
+            </a:r>
+          </a:p>
+        </p:txBody>
+      </p:sp>
+      <p:sp>
+        <p:nvSpPr>
+          <p:cNvPr id="7" name="TextBox 6"/>
+          <p:cNvSpPr txBox="1"/>
+          <p:nvPr/>
+        </p:nvSpPr>
+        <p:spPr>
+          <a:xfrm>
+            <a:off x="1371600" y="1645920"/>
+            <a:ext cx="10271455" cy="1188720"/>
+          </a:xfrm>
+          <a:prstGeom prst="rect">
+            <a:avLst/>
+          </a:prstGeom>
+          <a:noFill/>
+        </p:spPr>
+        <p:txBody>
+          <a:bodyPr wrap="square" anchor="t" lIns="0" rIns="0" tIns="0" bIns="0"/>
+          <a:lstStyle/>
+          <a:p>
+            <a:pPr algn="l"/>
+            <a:r>
+              <a:rPr sz="2400" b="0" i="0">
+                <a:solidFill>
+                  <a:srgbClr val="202122"/>
+                </a:solidFill>
+                <a:latin typeface="Calibri"/>
+              </a:rPr>
+              <a:t>How many bits in an IPv4 address?</a:t>
+            </a:r>
+          </a:p>
+        </p:txBody>
+      </p:sp>
+      <p:sp>
+        <p:nvSpPr>
+          <p:cNvPr id="8" name="Oval 7"/>
+          <p:cNvSpPr/>
+          <p:nvPr/>
+        </p:nvSpPr>
+        <p:spPr>
+          <a:xfrm>
+            <a:off x="548640" y="3108960"/>
+            <a:ext cx="502920" cy="502920"/>
+          </a:xfrm>
+          <a:prstGeom prst="ellipse">
+            <a:avLst/>
+          </a:prstGeom>
+          <a:solidFill>
+            <a:srgbClr val="33C17A"/>
+          </a:solidFill>
+          <a:ln>
+            <a:noFill/>
+          </a:ln>
+          <a:effectLst/>
+        </p:spPr>
+        <p:style>
+          <a:lnRef idx="1">
+            <a:schemeClr val="accent1"/>
+          </a:lnRef>
+          <a:fillRef idx="3">
+            <a:schemeClr val="accent1"/>
+          </a:fillRef>
+          <a:effectRef idx="2">
+            <a:schemeClr val="accent1"/>
+          </a:effectRef>
+          <a:fontRef idx="minor">
+            <a:schemeClr val="lt1"/>
+          </a:fontRef>
+        </p:style>
+        <p:txBody>
+          <a:bodyPr rtlCol="0" anchor="ctr" lIns="0" rIns="0" tIns="0" bIns="0"/>
+          <a:lstStyle/>
+          <a:p>
+            <a:pPr algn="ctr"/>
+            <a:r>
+              <a:rPr sz="1600" b="1">
+                <a:solidFill>
+                  <a:srgbClr val="202122"/>
+                </a:solidFill>
+                <a:latin typeface="Calibri"/>
+              </a:rPr>
+              <a:t>2</a:t>
+            </a:r>
+          </a:p>
+        </p:txBody>
+      </p:sp>
+      <p:sp>
+        <p:nvSpPr>
+          <p:cNvPr id="9" name="TextBox 8"/>
+          <p:cNvSpPr txBox="1"/>
+          <p:nvPr/>
+        </p:nvSpPr>
+        <p:spPr>
+          <a:xfrm>
+            <a:off x="1371600" y="3063240"/>
+            <a:ext cx="10271455" cy="1188720"/>
+          </a:xfrm>
+          <a:prstGeom prst="rect">
+            <a:avLst/>
+          </a:prstGeom>
+          <a:noFill/>
+        </p:spPr>
+        <p:txBody>
+          <a:bodyPr wrap="square" anchor="t" lIns="0" rIns="0" tIns="0" bIns="0"/>
+          <a:lstStyle/>
+          <a:p>
+            <a:pPr algn="l"/>
+            <a:r>
+              <a:rPr sz="2400" b="0" i="0">
+                <a:solidFill>
+                  <a:srgbClr val="202122"/>
+                </a:solidFill>
+                <a:latin typeface="Calibri"/>
+              </a:rPr>
+              <a:t>How many usable hosts in a /24?</a:t>
+            </a:r>
+          </a:p>
+        </p:txBody>
+      </p:sp>
+      <p:sp>
+        <p:nvSpPr>
+          <p:cNvPr id="10" name="Oval 9"/>
+          <p:cNvSpPr/>
+          <p:nvPr/>
+        </p:nvSpPr>
+        <p:spPr>
+          <a:xfrm>
+            <a:off x="548640" y="4526280"/>
+            <a:ext cx="502920" cy="502920"/>
+          </a:xfrm>
+          <a:prstGeom prst="ellipse">
+            <a:avLst/>
+          </a:prstGeom>
+          <a:solidFill>
+            <a:srgbClr val="33C17A"/>
+          </a:solidFill>
+          <a:ln>
+            <a:noFill/>
+          </a:ln>
+          <a:effectLst/>
+        </p:spPr>
+        <p:style>
+          <a:lnRef idx="1">
+            <a:schemeClr val="accent1"/>
+          </a:lnRef>
+          <a:fillRef idx="3">
+            <a:schemeClr val="accent1"/>
+          </a:fillRef>
+          <a:effectRef idx="2">
+            <a:schemeClr val="accent1"/>
+          </a:effectRef>
+          <a:fontRef idx="minor">
+            <a:schemeClr val="lt1"/>
+          </a:fontRef>
+        </p:style>
+        <p:txBody>
+          <a:bodyPr rtlCol="0" anchor="ctr" lIns="0" rIns="0" tIns="0" bIns="0"/>
+          <a:lstStyle/>
+          <a:p>
+            <a:pPr algn="ctr"/>
+            <a:r>
+              <a:rPr sz="1600" b="1">
+                <a:solidFill>
+                  <a:srgbClr val="202122"/>
+                </a:solidFill>
+                <a:latin typeface="Calibri"/>
+              </a:rPr>
+              <a:t>3</a:t>
+            </a:r>
+          </a:p>
+        </p:txBody>
+      </p:sp>
+      <p:sp>
+        <p:nvSpPr>
+          <p:cNvPr id="11" name="TextBox 10"/>
+          <p:cNvSpPr txBox="1"/>
+          <p:nvPr/>
+        </p:nvSpPr>
+        <p:spPr>
+          <a:xfrm>
+            <a:off x="1371600" y="4480560"/>
+            <a:ext cx="10271455" cy="1188720"/>
+          </a:xfrm>
+          <a:prstGeom prst="rect">
+            <a:avLst/>
+          </a:prstGeom>
+          <a:noFill/>
+        </p:spPr>
+        <p:txBody>
+          <a:bodyPr wrap="square" anchor="t" lIns="0" rIns="0" tIns="0" bIns="0"/>
+          <a:lstStyle/>
+          <a:p>
+            <a:pPr algn="l"/>
+            <a:r>
+              <a:rPr sz="2400" b="0" i="0">
+                <a:solidFill>
+                  <a:srgbClr val="202122"/>
+                </a:solidFill>
+                <a:latin typeface="Calibri"/>
+              </a:rPr>
+              <a:t>Why was IPv6 introduced?</a:t>
+            </a:r>
+          </a:p>
+        </p:txBody>
+      </p:sp>
+      <p:sp>
+        <p:nvSpPr>
+          <p:cNvPr id="12" name="TextBox 11"/>
+          <p:cNvSpPr txBox="1"/>
+          <p:nvPr/>
+        </p:nvSpPr>
+        <p:spPr>
+          <a:xfrm>
+            <a:off x="548640" y="5852160"/>
+            <a:ext cx="11094415" cy="365760"/>
+          </a:xfrm>
+          <a:prstGeom prst="rect">
+            <a:avLst/>
+          </a:prstGeom>
+          <a:noFill/>
+        </p:spPr>
+        <p:txBody>
+          <a:bodyPr wrap="square" anchor="t" lIns="0" rIns="0" tIns="0" bIns="0"/>
+          <a:lstStyle/>
+          <a:p>
+            <a:pPr algn="l"/>
+            <a:r>
+              <a:rPr sz="1300" b="0" i="1">
+                <a:solidFill>
+                  <a:srgbClr val="54595D"/>
+                </a:solidFill>
+                <a:latin typeface="Calibri"/>
+              </a:rPr>
+              <a:t>Answer on mini whiteboards or in your book. Answers are in the speaker notes.</a:t>
+            </a:r>
+          </a:p>
+        </p:txBody>
+      </p:sp>
+    </p:spTree>
+  </p:cSld>
+  <p:clrMapOvr>
+    <a:masterClrMapping/>
+  </p:clrMapOvr>
+</p:sld>
+</file>
+
+<file path=ppt/slides/slide13.xml><?xml version="1.0" encoding="utf-8"?>
+<p:sld xmlns:a="http://schemas.openxmlformats.org/drawingml/2006/main" xmlns:p="http://schemas.openxmlformats.org/presentationml/2006/main" xmlns:r="http://schemas.openxmlformats.org/officeDocument/2006/relationships">
+  <p:cSld>
+    <p:bg>
+      <p:bgPr>
+        <a:solidFill>
+          <a:srgbClr val="FFFFFF"/>
+        </a:solidFill>
+        <a:effectLst/>
+      </p:bgPr>
+    </p:bg>
+    <p:spTree>
+      <p:nvGrpSpPr>
+        <p:cNvPr id="1" name=""/>
+        <p:cNvGrpSpPr/>
+        <p:nvPr/>
+      </p:nvGrpSpPr>
+      <p:grpSpPr/>
+      <p:sp>
+        <p:nvSpPr>
+          <p:cNvPr id="2" name="TextBox 1"/>
+          <p:cNvSpPr txBox="1"/>
+          <p:nvPr/>
+        </p:nvSpPr>
+        <p:spPr>
+          <a:xfrm>
+            <a:off x="548640" y="320040"/>
+            <a:ext cx="11094415" cy="274320"/>
+          </a:xfrm>
+          <a:prstGeom prst="rect">
+            <a:avLst/>
+          </a:prstGeom>
+          <a:noFill/>
+        </p:spPr>
+        <p:txBody>
+          <a:bodyPr wrap="square" anchor="t" lIns="0" rIns="0" tIns="0" bIns="0"/>
+          <a:lstStyle/>
+          <a:p>
+            <a:pPr algn="l"/>
+            <a:r>
+              <a:rPr sz="1100" b="1" i="0">
+                <a:solidFill>
+                  <a:srgbClr val="54595D"/>
+                </a:solidFill>
+                <a:latin typeface="Calibri"/>
+              </a:rPr>
+              <a:t>DIGITAL INFRASTRUCTURE  ·  Digital Infrastructure Content Area 2</a:t>
+            </a:r>
+          </a:p>
+        </p:txBody>
+      </p:sp>
+      <p:sp>
+        <p:nvSpPr>
+          <p:cNvPr id="3" name="TextBox 2"/>
+          <p:cNvSpPr txBox="1"/>
+          <p:nvPr/>
+        </p:nvSpPr>
+        <p:spPr>
+          <a:xfrm>
+            <a:off x="548640" y="566928"/>
+            <a:ext cx="11094415" cy="822960"/>
+          </a:xfrm>
+          <a:prstGeom prst="rect">
+            <a:avLst/>
+          </a:prstGeom>
+          <a:noFill/>
+        </p:spPr>
+        <p:txBody>
+          <a:bodyPr wrap="square" anchor="ctr" lIns="0" rIns="0" tIns="0" bIns="0"/>
+          <a:lstStyle/>
+          <a:p>
+            <a:pPr algn="l"/>
+            <a:r>
+              <a:rPr sz="3200" b="1" i="0">
+                <a:solidFill>
+                  <a:srgbClr val="03306E"/>
+                </a:solidFill>
+                <a:latin typeface="Cambria"/>
+              </a:rPr>
+              <a:t>Check your understanding</a:t>
+            </a:r>
+          </a:p>
+        </p:txBody>
+      </p:sp>
+      <p:sp>
+        <p:nvSpPr>
+          <p:cNvPr id="4" name="TextBox 3"/>
+          <p:cNvSpPr txBox="1"/>
+          <p:nvPr/>
+        </p:nvSpPr>
+        <p:spPr>
+          <a:xfrm>
+            <a:off x="548640" y="6446520"/>
+            <a:ext cx="8229600" cy="274320"/>
+          </a:xfrm>
+          <a:prstGeom prst="rect">
+            <a:avLst/>
+          </a:prstGeom>
+          <a:noFill/>
+        </p:spPr>
+        <p:txBody>
+          <a:bodyPr wrap="square" anchor="t" lIns="0" rIns="0" tIns="0" bIns="0"/>
+          <a:lstStyle/>
+          <a:p>
+            <a:pPr algn="l"/>
+            <a:r>
+              <a:rPr sz="1000" b="0" i="0">
+                <a:solidFill>
+                  <a:srgbClr val="54595D"/>
+                </a:solidFill>
+                <a:latin typeface="Calibri"/>
+              </a:rPr>
+              <a:t>Digital Support and Security T Level  ·  Network Design, Addressing and Transmission</a:t>
+            </a:r>
+          </a:p>
+        </p:txBody>
+      </p:sp>
+      <p:sp>
+        <p:nvSpPr>
+          <p:cNvPr id="5" name="TextBox 4"/>
+          <p:cNvSpPr txBox="1"/>
+          <p:nvPr/>
+        </p:nvSpPr>
+        <p:spPr>
+          <a:xfrm>
+            <a:off x="10728655" y="6446520"/>
+            <a:ext cx="914400" cy="274320"/>
+          </a:xfrm>
+          <a:prstGeom prst="rect">
+            <a:avLst/>
+          </a:prstGeom>
+          <a:noFill/>
+        </p:spPr>
+        <p:txBody>
+          <a:bodyPr wrap="square" anchor="t" lIns="0" rIns="0" tIns="0" bIns="0"/>
+          <a:lstStyle/>
+          <a:p>
+            <a:pPr algn="r"/>
+            <a:r>
+              <a:rPr sz="1000" b="0" i="0">
+                <a:solidFill>
+                  <a:srgbClr val="54595D"/>
+                </a:solidFill>
+                <a:latin typeface="Calibri"/>
+              </a:rPr>
+              <a:t>13</a:t>
+            </a:r>
+          </a:p>
+        </p:txBody>
+      </p:sp>
+      <p:sp>
+        <p:nvSpPr>
+          <p:cNvPr id="6" name="Oval 5"/>
+          <p:cNvSpPr/>
+          <p:nvPr/>
+        </p:nvSpPr>
+        <p:spPr>
+          <a:xfrm>
+            <a:off x="548640" y="1618488"/>
+            <a:ext cx="411480" cy="411480"/>
+          </a:xfrm>
+          <a:prstGeom prst="ellipse">
+            <a:avLst/>
+          </a:prstGeom>
+          <a:solidFill>
+            <a:srgbClr val="33C17A"/>
+          </a:solidFill>
+          <a:ln>
+            <a:noFill/>
+          </a:ln>
+          <a:effectLst/>
+        </p:spPr>
+        <p:style>
+          <a:lnRef idx="1">
+            <a:schemeClr val="accent1"/>
+          </a:lnRef>
+          <a:fillRef idx="3">
+            <a:schemeClr val="accent1"/>
+          </a:fillRef>
+          <a:effectRef idx="2">
+            <a:schemeClr val="accent1"/>
+          </a:effectRef>
+          <a:fontRef idx="minor">
+            <a:schemeClr val="lt1"/>
+          </a:fontRef>
+        </p:style>
+        <p:txBody>
+          <a:bodyPr rtlCol="0" anchor="ctr" lIns="0" rIns="0" tIns="0" bIns="0"/>
+          <a:lstStyle/>
+          <a:p>
+            <a:pPr algn="ctr"/>
+            <a:r>
+              <a:rPr sz="1400" b="1">
+                <a:solidFill>
+                  <a:srgbClr val="202122"/>
+                </a:solidFill>
+                <a:latin typeface="Calibri"/>
+              </a:rPr>
+              <a:t>1</a:t>
+            </a:r>
+          </a:p>
+        </p:txBody>
+      </p:sp>
+      <p:sp>
+        <p:nvSpPr>
+          <p:cNvPr id="7" name="TextBox 6"/>
+          <p:cNvSpPr txBox="1"/>
+          <p:nvPr/>
+        </p:nvSpPr>
+        <p:spPr>
+          <a:xfrm>
+            <a:off x="1234440" y="1600200"/>
+            <a:ext cx="10408615" cy="791870"/>
+          </a:xfrm>
+          <a:prstGeom prst="rect">
+            <a:avLst/>
+          </a:prstGeom>
+          <a:noFill/>
+        </p:spPr>
+        <p:txBody>
+          <a:bodyPr wrap="square" anchor="t" lIns="0" rIns="0" tIns="0" bIns="0"/>
+          <a:lstStyle/>
+          <a:p>
+            <a:pPr algn="l"/>
+            <a:r>
+              <a:rPr sz="2200" b="0" i="0">
+                <a:solidFill>
+                  <a:srgbClr val="202122"/>
+                </a:solidFill>
+                <a:latin typeface="Calibri"/>
+              </a:rPr>
+              <a:t>What does load balancing do?</a:t>
+            </a:r>
+          </a:p>
+        </p:txBody>
+      </p:sp>
+      <p:sp>
+        <p:nvSpPr>
+          <p:cNvPr id="8" name="Oval 7"/>
+          <p:cNvSpPr/>
+          <p:nvPr/>
+        </p:nvSpPr>
+        <p:spPr>
+          <a:xfrm>
+            <a:off x="548640" y="2574950"/>
+            <a:ext cx="411480" cy="411480"/>
+          </a:xfrm>
+          <a:prstGeom prst="ellipse">
+            <a:avLst/>
+          </a:prstGeom>
+          <a:solidFill>
+            <a:srgbClr val="33C17A"/>
+          </a:solidFill>
+          <a:ln>
+            <a:noFill/>
+          </a:ln>
+          <a:effectLst/>
+        </p:spPr>
+        <p:style>
+          <a:lnRef idx="1">
+            <a:schemeClr val="accent1"/>
+          </a:lnRef>
+          <a:fillRef idx="3">
+            <a:schemeClr val="accent1"/>
+          </a:fillRef>
+          <a:effectRef idx="2">
+            <a:schemeClr val="accent1"/>
+          </a:effectRef>
+          <a:fontRef idx="minor">
+            <a:schemeClr val="lt1"/>
+          </a:fontRef>
+        </p:style>
+        <p:txBody>
+          <a:bodyPr rtlCol="0" anchor="ctr" lIns="0" rIns="0" tIns="0" bIns="0"/>
+          <a:lstStyle/>
+          <a:p>
+            <a:pPr algn="ctr"/>
+            <a:r>
+              <a:rPr sz="1400" b="1">
+                <a:solidFill>
+                  <a:srgbClr val="202122"/>
+                </a:solidFill>
+                <a:latin typeface="Calibri"/>
+              </a:rPr>
+              <a:t>2</a:t>
+            </a:r>
+          </a:p>
+        </p:txBody>
+      </p:sp>
+      <p:sp>
+        <p:nvSpPr>
+          <p:cNvPr id="9" name="TextBox 8"/>
+          <p:cNvSpPr txBox="1"/>
+          <p:nvPr/>
+        </p:nvSpPr>
+        <p:spPr>
+          <a:xfrm>
+            <a:off x="1234440" y="2556662"/>
+            <a:ext cx="10408615" cy="791870"/>
+          </a:xfrm>
+          <a:prstGeom prst="rect">
+            <a:avLst/>
+          </a:prstGeom>
+          <a:noFill/>
+        </p:spPr>
+        <p:txBody>
+          <a:bodyPr wrap="square" anchor="t" lIns="0" rIns="0" tIns="0" bIns="0"/>
+          <a:lstStyle/>
+          <a:p>
+            <a:pPr algn="l"/>
+            <a:r>
+              <a:rPr sz="2200" b="0" i="0">
+                <a:solidFill>
+                  <a:srgbClr val="202122"/>
+                </a:solidFill>
+                <a:latin typeface="Calibri"/>
+              </a:rPr>
+              <a:t>Convert decimal 255 to binary.</a:t>
+            </a:r>
+          </a:p>
+        </p:txBody>
+      </p:sp>
+      <p:sp>
+        <p:nvSpPr>
+          <p:cNvPr id="10" name="Oval 9"/>
+          <p:cNvSpPr/>
+          <p:nvPr/>
+        </p:nvSpPr>
+        <p:spPr>
+          <a:xfrm>
+            <a:off x="548640" y="3531412"/>
+            <a:ext cx="411480" cy="411480"/>
+          </a:xfrm>
+          <a:prstGeom prst="ellipse">
+            <a:avLst/>
+          </a:prstGeom>
+          <a:solidFill>
+            <a:srgbClr val="33C17A"/>
+          </a:solidFill>
+          <a:ln>
+            <a:noFill/>
+          </a:ln>
+          <a:effectLst/>
+        </p:spPr>
+        <p:style>
+          <a:lnRef idx="1">
+            <a:schemeClr val="accent1"/>
+          </a:lnRef>
+          <a:fillRef idx="3">
+            <a:schemeClr val="accent1"/>
+          </a:fillRef>
+          <a:effectRef idx="2">
+            <a:schemeClr val="accent1"/>
+          </a:effectRef>
+          <a:fontRef idx="minor">
+            <a:schemeClr val="lt1"/>
+          </a:fontRef>
+        </p:style>
+        <p:txBody>
+          <a:bodyPr rtlCol="0" anchor="ctr" lIns="0" rIns="0" tIns="0" bIns="0"/>
+          <a:lstStyle/>
+          <a:p>
+            <a:pPr algn="ctr"/>
+            <a:r>
+              <a:rPr sz="1400" b="1">
+                <a:solidFill>
+                  <a:srgbClr val="202122"/>
+                </a:solidFill>
+                <a:latin typeface="Calibri"/>
+              </a:rPr>
+              <a:t>3</a:t>
+            </a:r>
+          </a:p>
+        </p:txBody>
+      </p:sp>
+      <p:sp>
+        <p:nvSpPr>
+          <p:cNvPr id="11" name="TextBox 10"/>
+          <p:cNvSpPr txBox="1"/>
+          <p:nvPr/>
+        </p:nvSpPr>
+        <p:spPr>
+          <a:xfrm>
+            <a:off x="1234440" y="3513124"/>
+            <a:ext cx="10408615" cy="791870"/>
+          </a:xfrm>
+          <a:prstGeom prst="rect">
+            <a:avLst/>
+          </a:prstGeom>
+          <a:noFill/>
+        </p:spPr>
+        <p:txBody>
+          <a:bodyPr wrap="square" anchor="t" lIns="0" rIns="0" tIns="0" bIns="0"/>
+          <a:lstStyle/>
+          <a:p>
+            <a:pPr algn="l"/>
+            <a:r>
+              <a:rPr sz="2200" b="0" i="0">
+                <a:solidFill>
+                  <a:srgbClr val="202122"/>
+                </a:solidFill>
+                <a:latin typeface="Calibri"/>
+              </a:rPr>
+              <a:t>Why keep data cables away from power cables?</a:t>
+            </a:r>
+          </a:p>
+        </p:txBody>
+      </p:sp>
+      <p:sp>
+        <p:nvSpPr>
+          <p:cNvPr id="12" name="Oval 11"/>
+          <p:cNvSpPr/>
+          <p:nvPr/>
+        </p:nvSpPr>
+        <p:spPr>
+          <a:xfrm>
+            <a:off x="548640" y="4487875"/>
+            <a:ext cx="411480" cy="411480"/>
+          </a:xfrm>
+          <a:prstGeom prst="ellipse">
+            <a:avLst/>
+          </a:prstGeom>
+          <a:solidFill>
+            <a:srgbClr val="33C17A"/>
+          </a:solidFill>
+          <a:ln>
+            <a:noFill/>
+          </a:ln>
+          <a:effectLst/>
+        </p:spPr>
+        <p:style>
+          <a:lnRef idx="1">
+            <a:schemeClr val="accent1"/>
+          </a:lnRef>
+          <a:fillRef idx="3">
+            <a:schemeClr val="accent1"/>
+          </a:fillRef>
+          <a:effectRef idx="2">
+            <a:schemeClr val="accent1"/>
+          </a:effectRef>
+          <a:fontRef idx="minor">
+            <a:schemeClr val="lt1"/>
+          </a:fontRef>
+        </p:style>
+        <p:txBody>
+          <a:bodyPr rtlCol="0" anchor="ctr" lIns="0" rIns="0" tIns="0" bIns="0"/>
+          <a:lstStyle/>
+          <a:p>
+            <a:pPr algn="ctr"/>
+            <a:r>
+              <a:rPr sz="1400" b="1">
+                <a:solidFill>
+                  <a:srgbClr val="202122"/>
+                </a:solidFill>
+                <a:latin typeface="Calibri"/>
+              </a:rPr>
+              <a:t>4</a:t>
+            </a:r>
+          </a:p>
+        </p:txBody>
+      </p:sp>
+      <p:sp>
+        <p:nvSpPr>
+          <p:cNvPr id="13" name="TextBox 12"/>
+          <p:cNvSpPr txBox="1"/>
+          <p:nvPr/>
+        </p:nvSpPr>
+        <p:spPr>
+          <a:xfrm>
+            <a:off x="1234440" y="4469587"/>
+            <a:ext cx="10408615" cy="791870"/>
+          </a:xfrm>
+          <a:prstGeom prst="rect">
+            <a:avLst/>
+          </a:prstGeom>
+          <a:noFill/>
+        </p:spPr>
+        <p:txBody>
+          <a:bodyPr wrap="square" anchor="t" lIns="0" rIns="0" tIns="0" bIns="0"/>
+          <a:lstStyle/>
+          <a:p>
+            <a:pPr algn="l"/>
+            <a:r>
+              <a:rPr sz="2200" b="0" i="0">
+                <a:solidFill>
+                  <a:srgbClr val="202122"/>
+                </a:solidFill>
+                <a:latin typeface="Calibri"/>
+              </a:rPr>
+              <a:t>How many bits in an IPv6 address?</a:t>
+            </a:r>
+          </a:p>
+        </p:txBody>
+      </p:sp>
+      <p:sp>
+        <p:nvSpPr>
+          <p:cNvPr id="14" name="Oval 13"/>
+          <p:cNvSpPr/>
+          <p:nvPr/>
+        </p:nvSpPr>
+        <p:spPr>
+          <a:xfrm>
+            <a:off x="548640" y="5444337"/>
+            <a:ext cx="411480" cy="411480"/>
+          </a:xfrm>
+          <a:prstGeom prst="ellipse">
+            <a:avLst/>
+          </a:prstGeom>
+          <a:solidFill>
+            <a:srgbClr val="33C17A"/>
+          </a:solidFill>
+          <a:ln>
+            <a:noFill/>
+          </a:ln>
+          <a:effectLst/>
+        </p:spPr>
+        <p:style>
+          <a:lnRef idx="1">
+            <a:schemeClr val="accent1"/>
+          </a:lnRef>
+          <a:fillRef idx="3">
+            <a:schemeClr val="accent1"/>
+          </a:fillRef>
+          <a:effectRef idx="2">
+            <a:schemeClr val="accent1"/>
+          </a:effectRef>
+          <a:fontRef idx="minor">
+            <a:schemeClr val="lt1"/>
+          </a:fontRef>
+        </p:style>
+        <p:txBody>
+          <a:bodyPr rtlCol="0" anchor="ctr" lIns="0" rIns="0" tIns="0" bIns="0"/>
+          <a:lstStyle/>
+          <a:p>
+            <a:pPr algn="ctr"/>
+            <a:r>
+              <a:rPr sz="1400" b="1">
+                <a:solidFill>
+                  <a:srgbClr val="202122"/>
+                </a:solidFill>
+                <a:latin typeface="Calibri"/>
+              </a:rPr>
+              <a:t>5</a:t>
+            </a:r>
+          </a:p>
+        </p:txBody>
+      </p:sp>
+      <p:sp>
+        <p:nvSpPr>
+          <p:cNvPr id="15" name="TextBox 14"/>
+          <p:cNvSpPr txBox="1"/>
+          <p:nvPr/>
+        </p:nvSpPr>
+        <p:spPr>
+          <a:xfrm>
+            <a:off x="1234440" y="5426049"/>
+            <a:ext cx="10408615" cy="791870"/>
+          </a:xfrm>
+          <a:prstGeom prst="rect">
+            <a:avLst/>
+          </a:prstGeom>
+          <a:noFill/>
+        </p:spPr>
+        <p:txBody>
+          <a:bodyPr wrap="square" anchor="t" lIns="0" rIns="0" tIns="0" bIns="0"/>
+          <a:lstStyle/>
+          <a:p>
+            <a:pPr algn="l"/>
+            <a:r>
+              <a:rPr sz="2200" b="0" i="0">
+                <a:solidFill>
+                  <a:srgbClr val="202122"/>
+                </a:solidFill>
+                <a:latin typeface="Calibri"/>
+              </a:rPr>
+              <a:t>How many usable hosts in a /24 subnet?</a:t>
+            </a:r>
+          </a:p>
+        </p:txBody>
+      </p:sp>
+    </p:spTree>
+  </p:cSld>
+  <p:clrMapOvr>
+    <a:masterClrMapping/>
+  </p:clrMapOvr>
+</p:sld>
+</file>
+
+<file path=ppt/slides/slide14.xml><?xml version="1.0" encoding="utf-8"?>
+<p:sld xmlns:a="http://schemas.openxmlformats.org/drawingml/2006/main" xmlns:p="http://schemas.openxmlformats.org/presentationml/2006/main" xmlns:r="http://schemas.openxmlformats.org/officeDocument/2006/relationships">
+  <p:cSld>
+    <p:bg>
+      <p:bgPr>
+        <a:solidFill>
+          <a:srgbClr val="FFFFFF"/>
+        </a:solidFill>
+        <a:effectLst/>
+      </p:bgPr>
+    </p:bg>
+    <p:spTree>
+      <p:nvGrpSpPr>
+        <p:cNvPr id="1" name=""/>
+        <p:cNvGrpSpPr/>
+        <p:nvPr/>
+      </p:nvGrpSpPr>
+      <p:grpSpPr/>
+      <p:sp>
+        <p:nvSpPr>
+          <p:cNvPr id="2" name="TextBox 1"/>
+          <p:cNvSpPr txBox="1"/>
+          <p:nvPr/>
+        </p:nvSpPr>
+        <p:spPr>
+          <a:xfrm>
+            <a:off x="548640" y="320040"/>
+            <a:ext cx="11094415" cy="274320"/>
+          </a:xfrm>
+          <a:prstGeom prst="rect">
+            <a:avLst/>
+          </a:prstGeom>
+          <a:noFill/>
+        </p:spPr>
+        <p:txBody>
+          <a:bodyPr wrap="square" anchor="t" lIns="0" rIns="0" tIns="0" bIns="0"/>
+          <a:lstStyle/>
+          <a:p>
+            <a:pPr algn="l"/>
+            <a:r>
+              <a:rPr sz="1100" b="1" i="0">
+                <a:solidFill>
+                  <a:srgbClr val="54595D"/>
+                </a:solidFill>
+                <a:latin typeface="Calibri"/>
+              </a:rPr>
+              <a:t>DIGITAL INFRASTRUCTURE  ·  Digital Infrastructure Content Area 2</a:t>
+            </a:r>
+          </a:p>
+        </p:txBody>
+      </p:sp>
+      <p:sp>
+        <p:nvSpPr>
+          <p:cNvPr id="3" name="TextBox 2"/>
+          <p:cNvSpPr txBox="1"/>
+          <p:nvPr/>
+        </p:nvSpPr>
+        <p:spPr>
+          <a:xfrm>
+            <a:off x="548640" y="566928"/>
+            <a:ext cx="11094415" cy="822960"/>
+          </a:xfrm>
+          <a:prstGeom prst="rect">
+            <a:avLst/>
+          </a:prstGeom>
+          <a:noFill/>
+        </p:spPr>
+        <p:txBody>
+          <a:bodyPr wrap="square" anchor="ctr" lIns="0" rIns="0" tIns="0" bIns="0"/>
+          <a:lstStyle/>
+          <a:p>
+            <a:pPr algn="l"/>
+            <a:r>
+              <a:rPr sz="3200" b="1" i="0">
+                <a:solidFill>
+                  <a:srgbClr val="03306E"/>
+                </a:solidFill>
+                <a:latin typeface="Cambria"/>
+              </a:rPr>
+              <a:t>Answers</a:t>
+            </a:r>
+          </a:p>
+        </p:txBody>
+      </p:sp>
+      <p:sp>
+        <p:nvSpPr>
+          <p:cNvPr id="4" name="TextBox 3"/>
+          <p:cNvSpPr txBox="1"/>
+          <p:nvPr/>
+        </p:nvSpPr>
+        <p:spPr>
+          <a:xfrm>
+            <a:off x="548640" y="6446520"/>
+            <a:ext cx="8229600" cy="274320"/>
+          </a:xfrm>
+          <a:prstGeom prst="rect">
+            <a:avLst/>
+          </a:prstGeom>
+          <a:noFill/>
+        </p:spPr>
+        <p:txBody>
+          <a:bodyPr wrap="square" anchor="t" lIns="0" rIns="0" tIns="0" bIns="0"/>
+          <a:lstStyle/>
+          <a:p>
+            <a:pPr algn="l"/>
+            <a:r>
+              <a:rPr sz="1000" b="0" i="0">
+                <a:solidFill>
+                  <a:srgbClr val="54595D"/>
+                </a:solidFill>
+                <a:latin typeface="Calibri"/>
+              </a:rPr>
+              <a:t>Digital Support and Security T Level  ·  Network Design, Addressing and Transmission</a:t>
+            </a:r>
+          </a:p>
+        </p:txBody>
+      </p:sp>
+      <p:sp>
+        <p:nvSpPr>
+          <p:cNvPr id="5" name="TextBox 4"/>
+          <p:cNvSpPr txBox="1"/>
+          <p:nvPr/>
+        </p:nvSpPr>
+        <p:spPr>
+          <a:xfrm>
+            <a:off x="10728655" y="6446520"/>
+            <a:ext cx="914400" cy="274320"/>
+          </a:xfrm>
+          <a:prstGeom prst="rect">
+            <a:avLst/>
+          </a:prstGeom>
+          <a:noFill/>
+        </p:spPr>
+        <p:txBody>
+          <a:bodyPr wrap="square" anchor="t" lIns="0" rIns="0" tIns="0" bIns="0"/>
+          <a:lstStyle/>
+          <a:p>
+            <a:pPr algn="r"/>
+            <a:r>
+              <a:rPr sz="1000" b="0" i="0">
+                <a:solidFill>
+                  <a:srgbClr val="54595D"/>
+                </a:solidFill>
+                <a:latin typeface="Calibri"/>
+              </a:rPr>
+              <a:t>14</a:t>
+            </a:r>
+          </a:p>
+        </p:txBody>
+      </p:sp>
+      <p:sp>
+        <p:nvSpPr>
+          <p:cNvPr id="6" name="Oval 5"/>
+          <p:cNvSpPr/>
+          <p:nvPr/>
+        </p:nvSpPr>
+        <p:spPr>
+          <a:xfrm>
+            <a:off x="548640" y="1618488"/>
+            <a:ext cx="411480" cy="411480"/>
+          </a:xfrm>
+          <a:prstGeom prst="ellipse">
+            <a:avLst/>
+          </a:prstGeom>
+          <a:solidFill>
+            <a:srgbClr val="33C17A"/>
+          </a:solidFill>
+          <a:ln>
+            <a:noFill/>
+          </a:ln>
+          <a:effectLst/>
+        </p:spPr>
+        <p:style>
+          <a:lnRef idx="1">
+            <a:schemeClr val="accent1"/>
+          </a:lnRef>
+          <a:fillRef idx="3">
+            <a:schemeClr val="accent1"/>
+          </a:fillRef>
+          <a:effectRef idx="2">
+            <a:schemeClr val="accent1"/>
+          </a:effectRef>
+          <a:fontRef idx="minor">
+            <a:schemeClr val="lt1"/>
+          </a:fontRef>
+        </p:style>
+        <p:txBody>
+          <a:bodyPr rtlCol="0" anchor="ctr" lIns="0" rIns="0" tIns="0" bIns="0"/>
+          <a:lstStyle/>
+          <a:p>
+            <a:pPr algn="ctr"/>
+            <a:r>
+              <a:rPr sz="1400" b="1">
+                <a:solidFill>
+                  <a:srgbClr val="202122"/>
+                </a:solidFill>
+                <a:latin typeface="Calibri"/>
+              </a:rPr>
+              <a:t>1</a:t>
+            </a:r>
+          </a:p>
+        </p:txBody>
+      </p:sp>
+      <p:sp>
+        <p:nvSpPr>
+          <p:cNvPr id="7" name="TextBox 6"/>
+          <p:cNvSpPr txBox="1"/>
+          <p:nvPr/>
+        </p:nvSpPr>
+        <p:spPr>
+          <a:xfrm>
+            <a:off x="1234440" y="1600200"/>
+            <a:ext cx="10408615" cy="791870"/>
+          </a:xfrm>
+          <a:prstGeom prst="rect">
+            <a:avLst/>
+          </a:prstGeom>
+          <a:noFill/>
+        </p:spPr>
+        <p:txBody>
+          <a:bodyPr wrap="square" anchor="t" lIns="0" rIns="0" tIns="0" bIns="0"/>
+          <a:lstStyle/>
+          <a:p>
+            <a:pPr algn="l"/>
+            <a:r>
+              <a:rPr sz="1800" b="0" i="0">
+                <a:solidFill>
+                  <a:srgbClr val="54595D"/>
+                </a:solidFill>
+                <a:latin typeface="Calibri"/>
+              </a:rPr>
+              <a:t>What does load balancing do?</a:t>
+            </a:r>
+          </a:p>
+          <a:p>
+            <a:r>
+              <a:rPr sz="1800" b="1">
+                <a:solidFill>
+                  <a:srgbClr val="03306E"/>
+                </a:solidFill>
+                <a:latin typeface="Calibri"/>
+              </a:rPr>
+              <a:t>Spreads traffic across several servers.</a:t>
+            </a:r>
+          </a:p>
+        </p:txBody>
+      </p:sp>
+      <p:sp>
+        <p:nvSpPr>
+          <p:cNvPr id="8" name="Oval 7"/>
+          <p:cNvSpPr/>
+          <p:nvPr/>
+        </p:nvSpPr>
+        <p:spPr>
+          <a:xfrm>
+            <a:off x="548640" y="2574950"/>
+            <a:ext cx="411480" cy="411480"/>
+          </a:xfrm>
+          <a:prstGeom prst="ellipse">
+            <a:avLst/>
+          </a:prstGeom>
+          <a:solidFill>
+            <a:srgbClr val="33C17A"/>
+          </a:solidFill>
+          <a:ln>
+            <a:noFill/>
+          </a:ln>
+          <a:effectLst/>
+        </p:spPr>
+        <p:style>
+          <a:lnRef idx="1">
+            <a:schemeClr val="accent1"/>
+          </a:lnRef>
+          <a:fillRef idx="3">
+            <a:schemeClr val="accent1"/>
+          </a:fillRef>
+          <a:effectRef idx="2">
+            <a:schemeClr val="accent1"/>
+          </a:effectRef>
+          <a:fontRef idx="minor">
+            <a:schemeClr val="lt1"/>
+          </a:fontRef>
+        </p:style>
+        <p:txBody>
+          <a:bodyPr rtlCol="0" anchor="ctr" lIns="0" rIns="0" tIns="0" bIns="0"/>
+          <a:lstStyle/>
+          <a:p>
+            <a:pPr algn="ctr"/>
+            <a:r>
+              <a:rPr sz="1400" b="1">
+                <a:solidFill>
+                  <a:srgbClr val="202122"/>
+                </a:solidFill>
+                <a:latin typeface="Calibri"/>
+              </a:rPr>
+              <a:t>2</a:t>
+            </a:r>
+          </a:p>
+        </p:txBody>
+      </p:sp>
+      <p:sp>
+        <p:nvSpPr>
+          <p:cNvPr id="9" name="TextBox 8"/>
+          <p:cNvSpPr txBox="1"/>
+          <p:nvPr/>
+        </p:nvSpPr>
+        <p:spPr>
+          <a:xfrm>
+            <a:off x="1234440" y="2556662"/>
+            <a:ext cx="10408615" cy="791870"/>
+          </a:xfrm>
+          <a:prstGeom prst="rect">
+            <a:avLst/>
+          </a:prstGeom>
+          <a:noFill/>
+        </p:spPr>
+        <p:txBody>
+          <a:bodyPr wrap="square" anchor="t" lIns="0" rIns="0" tIns="0" bIns="0"/>
+          <a:lstStyle/>
+          <a:p>
+            <a:pPr algn="l"/>
+            <a:r>
+              <a:rPr sz="1800" b="0" i="0">
+                <a:solidFill>
+                  <a:srgbClr val="54595D"/>
+                </a:solidFill>
+                <a:latin typeface="Calibri"/>
+              </a:rPr>
+              <a:t>Convert decimal 255 to binary.</a:t>
+            </a:r>
+          </a:p>
+          <a:p>
+            <a:r>
+              <a:rPr sz="1800" b="1">
+                <a:solidFill>
+                  <a:srgbClr val="03306E"/>
+                </a:solidFill>
+                <a:latin typeface="Calibri"/>
+              </a:rPr>
+              <a:t>11111111.</a:t>
+            </a:r>
+          </a:p>
+        </p:txBody>
+      </p:sp>
+      <p:sp>
+        <p:nvSpPr>
+          <p:cNvPr id="10" name="Oval 9"/>
+          <p:cNvSpPr/>
+          <p:nvPr/>
+        </p:nvSpPr>
+        <p:spPr>
+          <a:xfrm>
+            <a:off x="548640" y="3531412"/>
+            <a:ext cx="411480" cy="411480"/>
+          </a:xfrm>
+          <a:prstGeom prst="ellipse">
+            <a:avLst/>
+          </a:prstGeom>
+          <a:solidFill>
+            <a:srgbClr val="33C17A"/>
+          </a:solidFill>
+          <a:ln>
+            <a:noFill/>
+          </a:ln>
+          <a:effectLst/>
+        </p:spPr>
+        <p:style>
+          <a:lnRef idx="1">
+            <a:schemeClr val="accent1"/>
+          </a:lnRef>
+          <a:fillRef idx="3">
+            <a:schemeClr val="accent1"/>
+          </a:fillRef>
+          <a:effectRef idx="2">
+            <a:schemeClr val="accent1"/>
+          </a:effectRef>
+          <a:fontRef idx="minor">
+            <a:schemeClr val="lt1"/>
+          </a:fontRef>
+        </p:style>
+        <p:txBody>
+          <a:bodyPr rtlCol="0" anchor="ctr" lIns="0" rIns="0" tIns="0" bIns="0"/>
+          <a:lstStyle/>
+          <a:p>
+            <a:pPr algn="ctr"/>
+            <a:r>
+              <a:rPr sz="1400" b="1">
+                <a:solidFill>
+                  <a:srgbClr val="202122"/>
+                </a:solidFill>
+                <a:latin typeface="Calibri"/>
+              </a:rPr>
+              <a:t>3</a:t>
+            </a:r>
+          </a:p>
+        </p:txBody>
+      </p:sp>
+      <p:sp>
+        <p:nvSpPr>
+          <p:cNvPr id="11" name="TextBox 10"/>
+          <p:cNvSpPr txBox="1"/>
+          <p:nvPr/>
+        </p:nvSpPr>
+        <p:spPr>
+          <a:xfrm>
+            <a:off x="1234440" y="3513124"/>
+            <a:ext cx="10408615" cy="791870"/>
+          </a:xfrm>
+          <a:prstGeom prst="rect">
+            <a:avLst/>
+          </a:prstGeom>
+          <a:noFill/>
+        </p:spPr>
+        <p:txBody>
+          <a:bodyPr wrap="square" anchor="t" lIns="0" rIns="0" tIns="0" bIns="0"/>
+          <a:lstStyle/>
+          <a:p>
+            <a:pPr algn="l"/>
+            <a:r>
+              <a:rPr sz="1800" b="0" i="0">
+                <a:solidFill>
+                  <a:srgbClr val="54595D"/>
+                </a:solidFill>
+                <a:latin typeface="Calibri"/>
+              </a:rPr>
+              <a:t>Why keep data cables away from power cables?</a:t>
+            </a:r>
+          </a:p>
+          <a:p>
+            <a:r>
+              <a:rPr sz="1800" b="1">
+                <a:solidFill>
+                  <a:srgbClr val="03306E"/>
+                </a:solidFill>
+                <a:latin typeface="Calibri"/>
+              </a:rPr>
+              <a:t>To avoid electromagnetic interference.</a:t>
+            </a:r>
+          </a:p>
+        </p:txBody>
+      </p:sp>
+      <p:sp>
+        <p:nvSpPr>
+          <p:cNvPr id="12" name="Oval 11"/>
+          <p:cNvSpPr/>
+          <p:nvPr/>
+        </p:nvSpPr>
+        <p:spPr>
+          <a:xfrm>
+            <a:off x="548640" y="4487875"/>
+            <a:ext cx="411480" cy="411480"/>
+          </a:xfrm>
+          <a:prstGeom prst="ellipse">
+            <a:avLst/>
+          </a:prstGeom>
+          <a:solidFill>
+            <a:srgbClr val="33C17A"/>
+          </a:solidFill>
+          <a:ln>
+            <a:noFill/>
+          </a:ln>
+          <a:effectLst/>
+        </p:spPr>
+        <p:style>
+          <a:lnRef idx="1">
+            <a:schemeClr val="accent1"/>
+          </a:lnRef>
+          <a:fillRef idx="3">
+            <a:schemeClr val="accent1"/>
+          </a:fillRef>
+          <a:effectRef idx="2">
+            <a:schemeClr val="accent1"/>
+          </a:effectRef>
+          <a:fontRef idx="minor">
+            <a:schemeClr val="lt1"/>
+          </a:fontRef>
+        </p:style>
+        <p:txBody>
+          <a:bodyPr rtlCol="0" anchor="ctr" lIns="0" rIns="0" tIns="0" bIns="0"/>
+          <a:lstStyle/>
+          <a:p>
+            <a:pPr algn="ctr"/>
+            <a:r>
+              <a:rPr sz="1400" b="1">
+                <a:solidFill>
+                  <a:srgbClr val="202122"/>
+                </a:solidFill>
+                <a:latin typeface="Calibri"/>
+              </a:rPr>
+              <a:t>4</a:t>
+            </a:r>
+          </a:p>
+        </p:txBody>
+      </p:sp>
+      <p:sp>
+        <p:nvSpPr>
+          <p:cNvPr id="13" name="TextBox 12"/>
+          <p:cNvSpPr txBox="1"/>
+          <p:nvPr/>
+        </p:nvSpPr>
+        <p:spPr>
+          <a:xfrm>
+            <a:off x="1234440" y="4469587"/>
+            <a:ext cx="10408615" cy="791870"/>
+          </a:xfrm>
+          <a:prstGeom prst="rect">
+            <a:avLst/>
+          </a:prstGeom>
+          <a:noFill/>
+        </p:spPr>
+        <p:txBody>
+          <a:bodyPr wrap="square" anchor="t" lIns="0" rIns="0" tIns="0" bIns="0"/>
+          <a:lstStyle/>
+          <a:p>
+            <a:pPr algn="l"/>
+            <a:r>
+              <a:rPr sz="1800" b="0" i="0">
+                <a:solidFill>
+                  <a:srgbClr val="54595D"/>
+                </a:solidFill>
+                <a:latin typeface="Calibri"/>
+              </a:rPr>
+              <a:t>How many bits in an IPv6 address?</a:t>
+            </a:r>
+          </a:p>
+          <a:p>
+            <a:r>
+              <a:rPr sz="1800" b="1">
+                <a:solidFill>
+                  <a:srgbClr val="03306E"/>
+                </a:solidFill>
+                <a:latin typeface="Calibri"/>
+              </a:rPr>
+              <a:t>128.</a:t>
+            </a:r>
+          </a:p>
+        </p:txBody>
+      </p:sp>
+      <p:sp>
+        <p:nvSpPr>
+          <p:cNvPr id="14" name="Oval 13"/>
+          <p:cNvSpPr/>
+          <p:nvPr/>
+        </p:nvSpPr>
+        <p:spPr>
+          <a:xfrm>
+            <a:off x="548640" y="5444337"/>
+            <a:ext cx="411480" cy="411480"/>
+          </a:xfrm>
+          <a:prstGeom prst="ellipse">
+            <a:avLst/>
+          </a:prstGeom>
+          <a:solidFill>
+            <a:srgbClr val="33C17A"/>
+          </a:solidFill>
+          <a:ln>
+            <a:noFill/>
+          </a:ln>
+          <a:effectLst/>
+        </p:spPr>
+        <p:style>
+          <a:lnRef idx="1">
+            <a:schemeClr val="accent1"/>
+          </a:lnRef>
+          <a:fillRef idx="3">
+            <a:schemeClr val="accent1"/>
+          </a:fillRef>
+          <a:effectRef idx="2">
+            <a:schemeClr val="accent1"/>
+          </a:effectRef>
+          <a:fontRef idx="minor">
+            <a:schemeClr val="lt1"/>
+          </a:fontRef>
+        </p:style>
+        <p:txBody>
+          <a:bodyPr rtlCol="0" anchor="ctr" lIns="0" rIns="0" tIns="0" bIns="0"/>
+          <a:lstStyle/>
+          <a:p>
+            <a:pPr algn="ctr"/>
+            <a:r>
+              <a:rPr sz="1400" b="1">
+                <a:solidFill>
+                  <a:srgbClr val="202122"/>
+                </a:solidFill>
+                <a:latin typeface="Calibri"/>
+              </a:rPr>
+              <a:t>5</a:t>
+            </a:r>
+          </a:p>
+        </p:txBody>
+      </p:sp>
+      <p:sp>
+        <p:nvSpPr>
+          <p:cNvPr id="15" name="TextBox 14"/>
+          <p:cNvSpPr txBox="1"/>
+          <p:nvPr/>
+        </p:nvSpPr>
+        <p:spPr>
+          <a:xfrm>
+            <a:off x="1234440" y="5426049"/>
+            <a:ext cx="10408615" cy="791870"/>
+          </a:xfrm>
+          <a:prstGeom prst="rect">
+            <a:avLst/>
+          </a:prstGeom>
+          <a:noFill/>
+        </p:spPr>
+        <p:txBody>
+          <a:bodyPr wrap="square" anchor="t" lIns="0" rIns="0" tIns="0" bIns="0"/>
+          <a:lstStyle/>
+          <a:p>
+            <a:pPr algn="l"/>
+            <a:r>
+              <a:rPr sz="1800" b="0" i="0">
+                <a:solidFill>
+                  <a:srgbClr val="54595D"/>
+                </a:solidFill>
+                <a:latin typeface="Calibri"/>
+              </a:rPr>
+              <a:t>How many usable hosts in a /24 subnet?</a:t>
+            </a:r>
+          </a:p>
+          <a:p>
+            <a:r>
+              <a:rPr sz="1800" b="1">
+                <a:solidFill>
+                  <a:srgbClr val="03306E"/>
+                </a:solidFill>
+                <a:latin typeface="Calibri"/>
+              </a:rPr>
+              <a:t>254.</a:t>
+            </a:r>
+          </a:p>
+        </p:txBody>
+      </p:sp>
+    </p:spTree>
+  </p:cSld>
+  <p:clrMapOvr>
+    <a:masterClrMapping/>
+  </p:clrMapOvr>
+</p:sld>
+</file>
+
+<file path=ppt/slides/slide15.xml><?xml version="1.0" encoding="utf-8"?>
+<p:sld xmlns:a="http://schemas.openxmlformats.org/drawingml/2006/main" xmlns:p="http://schemas.openxmlformats.org/presentationml/2006/main" xmlns:r="http://schemas.openxmlformats.org/officeDocument/2006/relationships">
+  <p:cSld>
+    <p:bg>
+      <p:bgPr>
+        <a:solidFill>
+          <a:srgbClr val="FFFFFF"/>
+        </a:solidFill>
+        <a:effectLst/>
+      </p:bgPr>
+    </p:bg>
+    <p:spTree>
+      <p:nvGrpSpPr>
+        <p:cNvPr id="1" name=""/>
+        <p:cNvGrpSpPr/>
+        <p:nvPr/>
+      </p:nvGrpSpPr>
+      <p:grpSpPr/>
+      <p:sp>
+        <p:nvSpPr>
+          <p:cNvPr id="2" name="TextBox 1"/>
+          <p:cNvSpPr txBox="1"/>
+          <p:nvPr/>
+        </p:nvSpPr>
+        <p:spPr>
+          <a:xfrm>
+            <a:off x="548640" y="320040"/>
+            <a:ext cx="11094415" cy="274320"/>
+          </a:xfrm>
+          <a:prstGeom prst="rect">
+            <a:avLst/>
+          </a:prstGeom>
+          <a:noFill/>
+        </p:spPr>
+        <p:txBody>
+          <a:bodyPr wrap="square" anchor="t" lIns="0" rIns="0" tIns="0" bIns="0"/>
+          <a:lstStyle/>
+          <a:p>
+            <a:pPr algn="l"/>
+            <a:r>
+              <a:rPr sz="1100" b="1" i="0">
+                <a:solidFill>
+                  <a:srgbClr val="54595D"/>
+                </a:solidFill>
+                <a:latin typeface="Calibri"/>
+              </a:rPr>
+              <a:t>DIGITAL INFRASTRUCTURE  ·  Digital Infrastructure Content Area 2</a:t>
+            </a:r>
+          </a:p>
+        </p:txBody>
+      </p:sp>
+      <p:sp>
+        <p:nvSpPr>
+          <p:cNvPr id="3" name="TextBox 2"/>
+          <p:cNvSpPr txBox="1"/>
+          <p:nvPr/>
+        </p:nvSpPr>
+        <p:spPr>
+          <a:xfrm>
+            <a:off x="548640" y="566928"/>
+            <a:ext cx="11094415" cy="822960"/>
+          </a:xfrm>
+          <a:prstGeom prst="rect">
+            <a:avLst/>
+          </a:prstGeom>
+          <a:noFill/>
+        </p:spPr>
+        <p:txBody>
+          <a:bodyPr wrap="square" anchor="ctr" lIns="0" rIns="0" tIns="0" bIns="0"/>
+          <a:lstStyle/>
+          <a:p>
+            <a:pPr algn="l"/>
+            <a:r>
+              <a:rPr sz="3200" b="1" i="0">
+                <a:solidFill>
+                  <a:srgbClr val="03306E"/>
+                </a:solidFill>
+                <a:latin typeface="Cambria"/>
+              </a:rPr>
+              <a:t>Activity: Subnet the office</a:t>
+            </a:r>
+          </a:p>
+        </p:txBody>
+      </p:sp>
+      <p:sp>
+        <p:nvSpPr>
+          <p:cNvPr id="4" name="TextBox 3"/>
+          <p:cNvSpPr txBox="1"/>
+          <p:nvPr/>
+        </p:nvSpPr>
+        <p:spPr>
+          <a:xfrm>
+            <a:off x="548640" y="6446520"/>
+            <a:ext cx="8229600" cy="274320"/>
+          </a:xfrm>
+          <a:prstGeom prst="rect">
+            <a:avLst/>
+          </a:prstGeom>
+          <a:noFill/>
+        </p:spPr>
+        <p:txBody>
+          <a:bodyPr wrap="square" anchor="t" lIns="0" rIns="0" tIns="0" bIns="0"/>
+          <a:lstStyle/>
+          <a:p>
+            <a:pPr algn="l"/>
+            <a:r>
+              <a:rPr sz="1000" b="0" i="0">
+                <a:solidFill>
+                  <a:srgbClr val="54595D"/>
+                </a:solidFill>
+                <a:latin typeface="Calibri"/>
+              </a:rPr>
+              <a:t>Digital Support and Security T Level  ·  Network Design, Addressing and Transmission</a:t>
+            </a:r>
+          </a:p>
+        </p:txBody>
+      </p:sp>
+      <p:sp>
+        <p:nvSpPr>
+          <p:cNvPr id="5" name="TextBox 4"/>
+          <p:cNvSpPr txBox="1"/>
+          <p:nvPr/>
+        </p:nvSpPr>
+        <p:spPr>
+          <a:xfrm>
+            <a:off x="10728655" y="6446520"/>
+            <a:ext cx="914400" cy="274320"/>
+          </a:xfrm>
+          <a:prstGeom prst="rect">
+            <a:avLst/>
+          </a:prstGeom>
+          <a:noFill/>
+        </p:spPr>
+        <p:txBody>
+          <a:bodyPr wrap="square" anchor="t" lIns="0" rIns="0" tIns="0" bIns="0"/>
+          <a:lstStyle/>
+          <a:p>
+            <a:pPr algn="r"/>
+            <a:r>
+              <a:rPr sz="1000" b="0" i="0">
+                <a:solidFill>
+                  <a:srgbClr val="54595D"/>
+                </a:solidFill>
+                <a:latin typeface="Calibri"/>
+              </a:rPr>
+              <a:t>15</a:t>
+            </a:r>
+          </a:p>
+        </p:txBody>
+      </p:sp>
+      <p:sp>
+        <p:nvSpPr>
+          <p:cNvPr id="6" name="Rounded Rectangle 5"/>
+          <p:cNvSpPr/>
+          <p:nvPr/>
+        </p:nvSpPr>
+        <p:spPr>
+          <a:xfrm>
+            <a:off x="548640" y="1508760"/>
+            <a:ext cx="2011680" cy="457200"/>
+          </a:xfrm>
+          <a:prstGeom prst="roundRect">
+            <a:avLst>
+              <a:gd name="adj" fmla="val 50000"/>
+            </a:avLst>
+          </a:prstGeom>
+          <a:solidFill>
+            <a:srgbClr val="33C17A"/>
+          </a:solidFill>
+          <a:ln>
+            <a:noFill/>
+          </a:ln>
+          <a:effectLst/>
+        </p:spPr>
+        <p:style>
+          <a:lnRef idx="1">
+            <a:schemeClr val="accent1"/>
+          </a:lnRef>
+          <a:fillRef idx="3">
+            <a:schemeClr val="accent1"/>
+          </a:fillRef>
+          <a:effectRef idx="2">
+            <a:schemeClr val="accent1"/>
+          </a:effectRef>
+          <a:fontRef idx="minor">
+            <a:schemeClr val="lt1"/>
+          </a:fontRef>
+        </p:style>
+        <p:txBody>
+          <a:bodyPr rtlCol="0" anchor="ctr"/>
+          <a:lstStyle/>
+          <a:p/>
+        </p:txBody>
+      </p:sp>
+      <p:sp>
+        <p:nvSpPr>
+          <p:cNvPr id="7" name="TextBox 6"/>
+          <p:cNvSpPr txBox="1"/>
+          <p:nvPr/>
+        </p:nvSpPr>
+        <p:spPr>
+          <a:xfrm>
+            <a:off x="548640" y="1508760"/>
+            <a:ext cx="2011680" cy="457200"/>
+          </a:xfrm>
+          <a:prstGeom prst="rect">
+            <a:avLst/>
+          </a:prstGeom>
+          <a:noFill/>
+        </p:spPr>
+        <p:txBody>
+          <a:bodyPr wrap="square" anchor="ctr" lIns="0" rIns="0" tIns="0" bIns="0"/>
+          <a:lstStyle/>
+          <a:p>
+            <a:pPr algn="ctr"/>
+            <a:r>
+              <a:rPr sz="1400" b="1" i="0">
+                <a:solidFill>
+                  <a:srgbClr val="202122"/>
+                </a:solidFill>
+                <a:latin typeface="Calibri"/>
+              </a:rPr>
+              <a:t>25 minutes</a:t>
+            </a:r>
+          </a:p>
+        </p:txBody>
+      </p:sp>
+      <p:sp>
+        <p:nvSpPr>
+          <p:cNvPr id="8" name="TextBox 7"/>
+          <p:cNvSpPr txBox="1"/>
+          <p:nvPr/>
+        </p:nvSpPr>
+        <p:spPr>
+          <a:xfrm>
+            <a:off x="2743200" y="1508760"/>
+            <a:ext cx="4754880" cy="457200"/>
+          </a:xfrm>
+          <a:prstGeom prst="rect">
+            <a:avLst/>
+          </a:prstGeom>
+          <a:noFill/>
+        </p:spPr>
+        <p:txBody>
+          <a:bodyPr wrap="square" anchor="ctr" lIns="0" rIns="0" tIns="0" bIns="0"/>
+          <a:lstStyle/>
+          <a:p>
+            <a:pPr algn="l"/>
+            <a:r>
+              <a:rPr sz="1400" b="0" i="1">
+                <a:solidFill>
+                  <a:srgbClr val="54595D"/>
+                </a:solidFill>
+                <a:latin typeface="Calibri"/>
+              </a:rPr>
+              <a:t>Individual</a:t>
+            </a:r>
+          </a:p>
+        </p:txBody>
+      </p:sp>
+      <p:sp>
+        <p:nvSpPr>
+          <p:cNvPr id="9" name="Oval 8"/>
+          <p:cNvSpPr/>
+          <p:nvPr/>
+        </p:nvSpPr>
+        <p:spPr>
+          <a:xfrm>
+            <a:off x="548640" y="2482596"/>
+            <a:ext cx="384048" cy="384048"/>
+          </a:xfrm>
+          <a:prstGeom prst="ellipse">
+            <a:avLst/>
+          </a:prstGeom>
+          <a:solidFill>
+            <a:srgbClr val="0645AD"/>
+          </a:solidFill>
+          <a:ln>
+            <a:noFill/>
+          </a:ln>
+          <a:effectLst/>
+        </p:spPr>
+        <p:style>
+          <a:lnRef idx="1">
+            <a:schemeClr val="accent1"/>
+          </a:lnRef>
+          <a:fillRef idx="3">
+            <a:schemeClr val="accent1"/>
+          </a:fillRef>
+          <a:effectRef idx="2">
+            <a:schemeClr val="accent1"/>
+          </a:effectRef>
+          <a:fontRef idx="minor">
+            <a:schemeClr val="lt1"/>
+          </a:fontRef>
+        </p:style>
+        <p:txBody>
+          <a:bodyPr rtlCol="0" anchor="ctr" lIns="0" rIns="0" tIns="0" bIns="0"/>
+          <a:lstStyle/>
+          <a:p>
+            <a:pPr algn="ctr"/>
+            <a:r>
+              <a:rPr sz="1300" b="1">
+                <a:solidFill>
+                  <a:srgbClr val="FFFFFF"/>
+                </a:solidFill>
+                <a:latin typeface="Calibri"/>
+              </a:rPr>
+              <a:t>1</a:t>
+            </a:r>
+          </a:p>
+        </p:txBody>
+      </p:sp>
+      <p:sp>
+        <p:nvSpPr>
+          <p:cNvPr id="10" name="TextBox 9"/>
+          <p:cNvSpPr txBox="1"/>
+          <p:nvPr/>
+        </p:nvSpPr>
+        <p:spPr>
+          <a:xfrm>
+            <a:off x="1143000" y="2240280"/>
+            <a:ext cx="5943600" cy="868680"/>
+          </a:xfrm>
+          <a:prstGeom prst="rect">
+            <a:avLst/>
+          </a:prstGeom>
+          <a:noFill/>
+        </p:spPr>
+        <p:txBody>
+          <a:bodyPr wrap="square" anchor="ctr" lIns="0" rIns="0" tIns="0" bIns="0"/>
+          <a:lstStyle/>
+          <a:p>
+            <a:pPr algn="l"/>
+            <a:r>
+              <a:rPr sz="1700" b="0" i="0">
+                <a:solidFill>
+                  <a:srgbClr val="202122"/>
+                </a:solidFill>
+                <a:latin typeface="Calibri"/>
+              </a:rPr>
+              <a:t>You have 192.168.10.0/24 for an office with four departments of up to 50 devices each.</a:t>
+            </a:r>
+          </a:p>
+        </p:txBody>
+      </p:sp>
+      <p:sp>
+        <p:nvSpPr>
+          <p:cNvPr id="11" name="Oval 10"/>
+          <p:cNvSpPr/>
+          <p:nvPr/>
+        </p:nvSpPr>
+        <p:spPr>
+          <a:xfrm>
+            <a:off x="548640" y="3461004"/>
+            <a:ext cx="384048" cy="384048"/>
+          </a:xfrm>
+          <a:prstGeom prst="ellipse">
+            <a:avLst/>
+          </a:prstGeom>
+          <a:solidFill>
+            <a:srgbClr val="0645AD"/>
+          </a:solidFill>
+          <a:ln>
+            <a:noFill/>
+          </a:ln>
+          <a:effectLst/>
+        </p:spPr>
+        <p:style>
+          <a:lnRef idx="1">
+            <a:schemeClr val="accent1"/>
+          </a:lnRef>
+          <a:fillRef idx="3">
+            <a:schemeClr val="accent1"/>
+          </a:fillRef>
+          <a:effectRef idx="2">
+            <a:schemeClr val="accent1"/>
+          </a:effectRef>
+          <a:fontRef idx="minor">
+            <a:schemeClr val="lt1"/>
+          </a:fontRef>
+        </p:style>
+        <p:txBody>
+          <a:bodyPr rtlCol="0" anchor="ctr" lIns="0" rIns="0" tIns="0" bIns="0"/>
+          <a:lstStyle/>
+          <a:p>
+            <a:pPr algn="ctr"/>
+            <a:r>
+              <a:rPr sz="1300" b="1">
+                <a:solidFill>
+                  <a:srgbClr val="FFFFFF"/>
+                </a:solidFill>
+                <a:latin typeface="Calibri"/>
+              </a:rPr>
+              <a:t>2</a:t>
+            </a:r>
+          </a:p>
+        </p:txBody>
+      </p:sp>
+      <p:sp>
+        <p:nvSpPr>
+          <p:cNvPr id="12" name="TextBox 11"/>
+          <p:cNvSpPr txBox="1"/>
+          <p:nvPr/>
+        </p:nvSpPr>
+        <p:spPr>
+          <a:xfrm>
+            <a:off x="1143000" y="3218688"/>
+            <a:ext cx="5943600" cy="868680"/>
+          </a:xfrm>
+          <a:prstGeom prst="rect">
+            <a:avLst/>
+          </a:prstGeom>
+          <a:noFill/>
+        </p:spPr>
+        <p:txBody>
+          <a:bodyPr wrap="square" anchor="ctr" lIns="0" rIns="0" tIns="0" bIns="0"/>
+          <a:lstStyle/>
+          <a:p>
+            <a:pPr algn="l"/>
+            <a:r>
+              <a:rPr sz="1700" b="0" i="0">
+                <a:solidFill>
+                  <a:srgbClr val="202122"/>
+                </a:solidFill>
+                <a:latin typeface="Calibri"/>
+              </a:rPr>
+              <a:t>Choose a subnet mask that gives four subnets.</a:t>
+            </a:r>
+          </a:p>
+        </p:txBody>
+      </p:sp>
+      <p:sp>
+        <p:nvSpPr>
+          <p:cNvPr id="13" name="Oval 12"/>
+          <p:cNvSpPr/>
+          <p:nvPr/>
+        </p:nvSpPr>
+        <p:spPr>
+          <a:xfrm>
+            <a:off x="548640" y="4439412"/>
+            <a:ext cx="384048" cy="384048"/>
+          </a:xfrm>
+          <a:prstGeom prst="ellipse">
+            <a:avLst/>
+          </a:prstGeom>
+          <a:solidFill>
+            <a:srgbClr val="0645AD"/>
+          </a:solidFill>
+          <a:ln>
+            <a:noFill/>
+          </a:ln>
+          <a:effectLst/>
+        </p:spPr>
+        <p:style>
+          <a:lnRef idx="1">
+            <a:schemeClr val="accent1"/>
+          </a:lnRef>
+          <a:fillRef idx="3">
+            <a:schemeClr val="accent1"/>
+          </a:fillRef>
+          <a:effectRef idx="2">
+            <a:schemeClr val="accent1"/>
+          </a:effectRef>
+          <a:fontRef idx="minor">
+            <a:schemeClr val="lt1"/>
+          </a:fontRef>
+        </p:style>
+        <p:txBody>
+          <a:bodyPr rtlCol="0" anchor="ctr" lIns="0" rIns="0" tIns="0" bIns="0"/>
+          <a:lstStyle/>
+          <a:p>
+            <a:pPr algn="ctr"/>
+            <a:r>
+              <a:rPr sz="1300" b="1">
+                <a:solidFill>
+                  <a:srgbClr val="FFFFFF"/>
+                </a:solidFill>
+                <a:latin typeface="Calibri"/>
+              </a:rPr>
+              <a:t>3</a:t>
+            </a:r>
+          </a:p>
+        </p:txBody>
+      </p:sp>
+      <p:sp>
+        <p:nvSpPr>
+          <p:cNvPr id="14" name="TextBox 13"/>
+          <p:cNvSpPr txBox="1"/>
+          <p:nvPr/>
+        </p:nvSpPr>
+        <p:spPr>
+          <a:xfrm>
+            <a:off x="1143000" y="4197096"/>
+            <a:ext cx="5943600" cy="868680"/>
+          </a:xfrm>
+          <a:prstGeom prst="rect">
+            <a:avLst/>
+          </a:prstGeom>
+          <a:noFill/>
+        </p:spPr>
+        <p:txBody>
+          <a:bodyPr wrap="square" anchor="ctr" lIns="0" rIns="0" tIns="0" bIns="0"/>
+          <a:lstStyle/>
+          <a:p>
+            <a:pPr algn="l"/>
+            <a:r>
+              <a:rPr sz="1700" b="0" i="0">
+                <a:solidFill>
+                  <a:srgbClr val="202122"/>
+                </a:solidFill>
+                <a:latin typeface="Calibri"/>
+              </a:rPr>
+              <a:t>Write the network address, first and last host and broadcast for each.</a:t>
+            </a:r>
+          </a:p>
+        </p:txBody>
+      </p:sp>
+      <p:sp>
+        <p:nvSpPr>
+          <p:cNvPr id="15" name="Oval 14"/>
+          <p:cNvSpPr/>
+          <p:nvPr/>
+        </p:nvSpPr>
+        <p:spPr>
+          <a:xfrm>
+            <a:off x="548640" y="5417820"/>
+            <a:ext cx="384048" cy="384048"/>
+          </a:xfrm>
+          <a:prstGeom prst="ellipse">
+            <a:avLst/>
+          </a:prstGeom>
+          <a:solidFill>
+            <a:srgbClr val="0645AD"/>
+          </a:solidFill>
+          <a:ln>
+            <a:noFill/>
+          </a:ln>
+          <a:effectLst/>
+        </p:spPr>
+        <p:style>
+          <a:lnRef idx="1">
+            <a:schemeClr val="accent1"/>
+          </a:lnRef>
+          <a:fillRef idx="3">
+            <a:schemeClr val="accent1"/>
+          </a:fillRef>
+          <a:effectRef idx="2">
+            <a:schemeClr val="accent1"/>
+          </a:effectRef>
+          <a:fontRef idx="minor">
+            <a:schemeClr val="lt1"/>
+          </a:fontRef>
+        </p:style>
+        <p:txBody>
+          <a:bodyPr rtlCol="0" anchor="ctr" lIns="0" rIns="0" tIns="0" bIns="0"/>
+          <a:lstStyle/>
+          <a:p>
+            <a:pPr algn="ctr"/>
+            <a:r>
+              <a:rPr sz="1300" b="1">
+                <a:solidFill>
+                  <a:srgbClr val="FFFFFF"/>
+                </a:solidFill>
+                <a:latin typeface="Calibri"/>
+              </a:rPr>
+              <a:t>4</a:t>
+            </a:r>
+          </a:p>
+        </p:txBody>
+      </p:sp>
+      <p:sp>
+        <p:nvSpPr>
+          <p:cNvPr id="16" name="TextBox 15"/>
+          <p:cNvSpPr txBox="1"/>
+          <p:nvPr/>
+        </p:nvSpPr>
+        <p:spPr>
+          <a:xfrm>
+            <a:off x="1143000" y="5175504"/>
+            <a:ext cx="5943600" cy="868680"/>
+          </a:xfrm>
+          <a:prstGeom prst="rect">
+            <a:avLst/>
+          </a:prstGeom>
+          <a:noFill/>
+        </p:spPr>
+        <p:txBody>
+          <a:bodyPr wrap="square" anchor="ctr" lIns="0" rIns="0" tIns="0" bIns="0"/>
+          <a:lstStyle/>
+          <a:p>
+            <a:pPr algn="l"/>
+            <a:r>
+              <a:rPr sz="1700" b="0" i="0">
+                <a:solidFill>
+                  <a:srgbClr val="202122"/>
+                </a:solidFill>
+                <a:latin typeface="Calibri"/>
+              </a:rPr>
+              <a:t>Suggest which resilience principle would protect the file server.</a:t>
+            </a:r>
+          </a:p>
+        </p:txBody>
+      </p:sp>
+      <p:sp>
+        <p:nvSpPr>
+          <p:cNvPr id="17" name="Rounded Rectangle 16"/>
+          <p:cNvSpPr/>
+          <p:nvPr/>
+        </p:nvSpPr>
+        <p:spPr>
+          <a:xfrm>
+            <a:off x="7772400" y="1508760"/>
+            <a:ext cx="3867912" cy="4572000"/>
+          </a:xfrm>
+          <a:prstGeom prst="roundRect">
+            <a:avLst>
+              <a:gd name="adj" fmla="val 8000"/>
+            </a:avLst>
+          </a:prstGeom>
+          <a:solidFill>
+            <a:srgbClr val="EAF3FF"/>
+          </a:solidFill>
+          <a:ln>
+            <a:noFill/>
+          </a:ln>
+          <a:effectLst/>
+        </p:spPr>
+        <p:style>
+          <a:lnRef idx="1">
+            <a:schemeClr val="accent1"/>
+          </a:lnRef>
+          <a:fillRef idx="3">
+            <a:schemeClr val="accent1"/>
+          </a:fillRef>
+          <a:effectRef idx="2">
+            <a:schemeClr val="accent1"/>
+          </a:effectRef>
+          <a:fontRef idx="minor">
+            <a:schemeClr val="lt1"/>
+          </a:fontRef>
+        </p:style>
+        <p:txBody>
+          <a:bodyPr rtlCol="0" anchor="ctr"/>
+          <a:lstStyle/>
+          <a:p/>
+        </p:txBody>
+      </p:sp>
+      <p:sp>
+        <p:nvSpPr>
+          <p:cNvPr id="18" name="TextBox 17"/>
+          <p:cNvSpPr txBox="1"/>
+          <p:nvPr/>
+        </p:nvSpPr>
+        <p:spPr>
+          <a:xfrm>
+            <a:off x="8046720" y="1737360"/>
+            <a:ext cx="3291840" cy="365760"/>
+          </a:xfrm>
+          <a:prstGeom prst="rect">
+            <a:avLst/>
+          </a:prstGeom>
+          <a:noFill/>
+        </p:spPr>
+        <p:txBody>
+          <a:bodyPr wrap="square" anchor="t" lIns="0" rIns="0" tIns="0" bIns="0"/>
+          <a:lstStyle/>
+          <a:p>
+            <a:pPr algn="l"/>
+            <a:r>
+              <a:rPr sz="1300" b="1" i="0">
+                <a:solidFill>
+                  <a:srgbClr val="0645AD"/>
+                </a:solidFill>
+                <a:latin typeface="Calibri"/>
+              </a:rPr>
+              <a:t>SUCCESS CRITERIA</a:t>
+            </a:r>
+          </a:p>
+        </p:txBody>
+      </p:sp>
+      <p:sp>
+        <p:nvSpPr>
+          <p:cNvPr id="19" name="TextBox 18"/>
+          <p:cNvSpPr txBox="1"/>
+          <p:nvPr/>
+        </p:nvSpPr>
+        <p:spPr>
+          <a:xfrm>
+            <a:off x="8046720" y="2240280"/>
+            <a:ext cx="3337560" cy="3657600"/>
+          </a:xfrm>
+          <a:prstGeom prst="rect">
+            <a:avLst/>
+          </a:prstGeom>
+          <a:noFill/>
+        </p:spPr>
+        <p:txBody>
+          <a:bodyPr wrap="square" lIns="0" rIns="0" tIns="0" bIns="0">
+            <a:spAutoFit/>
+          </a:bodyPr>
+          <a:lstStyle/>
+          <a:p>
+            <a:pPr marL="274320" indent="-274320">
+              <a:spcAft>
+                <a:spcPts val="810"/>
+              </a:spcAft>
+              <a:buClr>
+                <a:srgbClr val="0645AD"/>
+              </a:buClr>
+              <a:buFont typeface="Arial"/>
+              <a:buChar char="•"/>
+            </a:pPr>
+            <a:r>
+              <a:rPr sz="1800" b="0">
+                <a:solidFill>
+                  <a:srgbClr val="202122"/>
+                </a:solidFill>
+                <a:latin typeface="Calibri"/>
+              </a:rPr>
+              <a:t>Uses /26 correctly</a:t>
+            </a:r>
+          </a:p>
+          <a:p>
+            <a:pPr marL="274320" indent="-274320">
+              <a:spcAft>
+                <a:spcPts val="810"/>
+              </a:spcAft>
+              <a:buClr>
+                <a:srgbClr val="0645AD"/>
+              </a:buClr>
+              <a:buFont typeface="Arial"/>
+              <a:buChar char="•"/>
+            </a:pPr>
+            <a:r>
+              <a:rPr sz="1800" b="0">
+                <a:solidFill>
+                  <a:srgbClr val="202122"/>
+                </a:solidFill>
+                <a:latin typeface="Calibri"/>
+              </a:rPr>
+              <a:t>Ranges do not overlap</a:t>
+            </a:r>
+          </a:p>
+          <a:p>
+            <a:pPr marL="274320" indent="-274320">
+              <a:spcAft>
+                <a:spcPts val="810"/>
+              </a:spcAft>
+              <a:buClr>
+                <a:srgbClr val="0645AD"/>
+              </a:buClr>
+              <a:buFont typeface="Arial"/>
+              <a:buChar char="•"/>
+            </a:pPr>
+            <a:r>
+              <a:rPr sz="1800" b="0">
+                <a:solidFill>
+                  <a:srgbClr val="202122"/>
+                </a:solidFill>
+                <a:latin typeface="Calibri"/>
+              </a:rPr>
+              <a:t>Resilience choice is justified</a:t>
+            </a:r>
+          </a:p>
+        </p:txBody>
+      </p:sp>
+    </p:spTree>
+  </p:cSld>
+  <p:clrMapOvr>
+    <a:masterClrMapping/>
+  </p:clrMapOvr>
+</p:sld>
+</file>
+
+<file path=ppt/slides/slide16.xml><?xml version="1.0" encoding="utf-8"?>
+<p:sld xmlns:a="http://schemas.openxmlformats.org/drawingml/2006/main" xmlns:p="http://schemas.openxmlformats.org/presentationml/2006/main" xmlns:r="http://schemas.openxmlformats.org/officeDocument/2006/relationships">
+  <p:cSld>
+    <p:bg>
+      <p:bgPr>
+        <a:solidFill>
           <a:srgbClr val="03306E"/>
         </a:solidFill>
         <a:effectLst/>
@@ -5439,22 +9209,141 @@
       </p:sp>
       <p:sp>
         <p:nvSpPr>
-          <p:cNvPr id="6" name="Rounded Rectangle 5"/>
+          <p:cNvPr id="6" name="TextBox 5"/>
+          <p:cNvSpPr txBox="1"/>
+          <p:nvPr/>
+        </p:nvSpPr>
+        <p:spPr>
+          <a:xfrm>
+            <a:off x="548640" y="1554480"/>
+            <a:ext cx="6720840" cy="4617720"/>
+          </a:xfrm>
+          <a:prstGeom prst="rect">
+            <a:avLst/>
+          </a:prstGeom>
+          <a:noFill/>
+        </p:spPr>
+        <p:txBody>
+          <a:bodyPr wrap="square" lIns="0" rIns="0" tIns="0" bIns="0">
+            <a:spAutoFit/>
+          </a:bodyPr>
+          <a:lstStyle/>
+          <a:p>
+            <a:pPr>
+              <a:spcAft>
+                <a:spcPts val="1140"/>
+              </a:spcAft>
+            </a:pPr>
+            <a:r>
+              <a:rPr sz="1900" b="0">
+                <a:solidFill>
+                  <a:srgbClr val="202122"/>
+                </a:solidFill>
+                <a:latin typeface="Calibri"/>
+              </a:rPr>
+              <a:t>A resilient network keeps working when a part fails or demand spikes.</a:t>
+            </a:r>
+          </a:p>
+          <a:p>
+            <a:pPr>
+              <a:spcAft>
+                <a:spcPts val="1140"/>
+              </a:spcAft>
+            </a:pPr>
+            <a:r>
+              <a:rPr sz="1900" b="0">
+                <a:solidFill>
+                  <a:srgbClr val="202122"/>
+                </a:solidFill>
+                <a:latin typeface="Calibri"/>
+              </a:rPr>
+              <a:t>High availability pairs a primary system with a secondary that takes over automatically if the primary fails.</a:t>
+            </a:r>
+          </a:p>
+          <a:p>
+            <a:pPr>
+              <a:spcAft>
+                <a:spcPts val="1140"/>
+              </a:spcAft>
+            </a:pPr>
+            <a:r>
+              <a:rPr sz="1900" b="0">
+                <a:solidFill>
+                  <a:srgbClr val="202122"/>
+                </a:solidFill>
+                <a:latin typeface="Calibri"/>
+              </a:rPr>
+              <a:t>Clustering makes several servers act as one: if one fails the others carry on, and more can be added as demand grows.</a:t>
+            </a:r>
+          </a:p>
+          <a:p>
+            <a:pPr>
+              <a:spcAft>
+                <a:spcPts val="1140"/>
+              </a:spcAft>
+            </a:pPr>
+            <a:r>
+              <a:rPr sz="1900" b="0">
+                <a:solidFill>
+                  <a:srgbClr val="202122"/>
+                </a:solidFill>
+                <a:latin typeface="Calibri"/>
+              </a:rPr>
+              <a:t>Load balancing spreads incoming traffic across several servers so none is overwhelmed.</a:t>
+            </a:r>
+          </a:p>
+          <a:p>
+            <a:pPr>
+              <a:spcAft>
+                <a:spcPts val="1140"/>
+              </a:spcAft>
+            </a:pPr>
+            <a:r>
+              <a:rPr sz="1900" b="0">
+                <a:solidFill>
+                  <a:srgbClr val="202122"/>
+                </a:solidFill>
+                <a:latin typeface="Calibri"/>
+              </a:rPr>
+              <a:t>Segmentation splits the network, systems and data so a problem in one part stays there.</a:t>
+            </a:r>
+          </a:p>
+          <a:p>
+            <a:pPr>
+              <a:spcAft>
+                <a:spcPts val="1140"/>
+              </a:spcAft>
+            </a:pPr>
+            <a:r>
+              <a:rPr sz="1900" b="0">
+                <a:solidFill>
+                  <a:srgbClr val="202122"/>
+                </a:solidFill>
+                <a:latin typeface="Calibri"/>
+              </a:rPr>
+              <a:t>Quality of Service (QoS) guarantees bandwidth for important traffic, such as voice calls.</a:t>
+            </a:r>
+          </a:p>
+        </p:txBody>
+      </p:sp>
+      <p:sp>
+        <p:nvSpPr>
+          <p:cNvPr id="7" name="Rounded Rectangle 6"/>
           <p:cNvSpPr/>
           <p:nvPr/>
         </p:nvSpPr>
         <p:spPr>
           <a:xfrm>
-            <a:off x="548640" y="1600200"/>
-            <a:ext cx="5410047" cy="2148840"/>
+            <a:off x="7772400" y="1554480"/>
+            <a:ext cx="3867912" cy="4526280"/>
           </a:xfrm>
           <a:prstGeom prst="roundRect">
             <a:avLst>
-              <a:gd name="adj" fmla="val 6000"/>
+              <a:gd name="adj" fmla="val 8000"/>
             </a:avLst>
           </a:prstGeom>
           <a:solidFill>
-            <a:srgbClr val="EAF3FF"/>
+            <a:srgbClr val="03306E"/>
           </a:solidFill>
           <a:ln>
             <a:noFill/>
@@ -5483,14 +9372,14 @@
       </p:sp>
       <p:sp>
         <p:nvSpPr>
-          <p:cNvPr id="7" name="Oval 6"/>
+          <p:cNvPr id="8" name="Oval 7"/>
           <p:cNvSpPr/>
           <p:nvPr/>
         </p:nvSpPr>
         <p:spPr>
           <a:xfrm>
-            <a:off x="777240" y="1828800"/>
-            <a:ext cx="457200" cy="457200"/>
+            <a:off x="8046720" y="1828800"/>
+            <a:ext cx="548640" cy="548640"/>
           </a:xfrm>
           <a:prstGeom prst="ellipse">
             <a:avLst/>
@@ -5523,46 +9412,13 @@
           <a:p>
             <a:pPr algn="ctr"/>
             <a:r>
-              <a:rPr sz="1500" b="1">
+              <a:rPr sz="1300" b="1">
                 <a:solidFill>
                   <a:srgbClr val="202122"/>
                 </a:solidFill>
                 <a:latin typeface="Calibri"/>
               </a:rPr>
-              <a:t>1</a:t>
-            </a:r>
-          </a:p>
-        </p:txBody>
-      </p:sp>
-      <p:sp>
-        <p:nvSpPr>
-          <p:cNvPr id="8" name="TextBox 7"/>
-          <p:cNvSpPr txBox="1"/>
-          <p:nvPr/>
-        </p:nvSpPr>
-        <p:spPr>
-          <a:xfrm>
-            <a:off x="1371600" y="1801368"/>
-            <a:ext cx="4404207" cy="512064"/>
-          </a:xfrm>
-          <a:prstGeom prst="rect">
-            <a:avLst/>
-          </a:prstGeom>
-          <a:noFill/>
-        </p:spPr>
-        <p:txBody>
-          <a:bodyPr wrap="square" anchor="ctr" lIns="0" rIns="0" tIns="0" bIns="0"/>
-          <a:lstStyle/>
-          <a:p>
-            <a:pPr algn="l"/>
-            <a:r>
-              <a:rPr sz="1900" b="1" i="0">
-                <a:solidFill>
-                  <a:srgbClr val="03306E"/>
-                </a:solidFill>
-                <a:latin typeface="Calibri"/>
-              </a:rPr>
-              <a:t>High availability</a:t>
+              <a:t>e.g.</a:t>
             </a:r>
           </a:p>
         </p:txBody>
@@ -5575,8 +9431,8 @@
         </p:nvSpPr>
         <p:spPr>
           <a:xfrm>
-            <a:off x="777240" y="2468880"/>
-            <a:ext cx="4952847" cy="1143000"/>
+            <a:off x="8046720" y="2560320"/>
+            <a:ext cx="3291840" cy="365760"/>
           </a:xfrm>
           <a:prstGeom prst="rect">
             <a:avLst/>
@@ -5589,124 +9445,27 @@
           <a:p>
             <a:pPr algn="l"/>
             <a:r>
-              <a:rPr sz="2000" b="0" i="0">
-                <a:solidFill>
-                  <a:srgbClr val="202122"/>
-                </a:solidFill>
-                <a:latin typeface="Calibri"/>
-              </a:rPr>
-              <a:t>Primary and secondary systems, so one can take over.</a:t>
-            </a:r>
-          </a:p>
-        </p:txBody>
-      </p:sp>
-      <p:sp>
-        <p:nvSpPr>
-          <p:cNvPr id="10" name="Rounded Rectangle 9"/>
-          <p:cNvSpPr/>
-          <p:nvPr/>
-        </p:nvSpPr>
-        <p:spPr>
-          <a:xfrm>
-            <a:off x="6233007" y="1600200"/>
-            <a:ext cx="5410047" cy="2148840"/>
-          </a:xfrm>
-          <a:prstGeom prst="roundRect">
-            <a:avLst>
-              <a:gd name="adj" fmla="val 6000"/>
-            </a:avLst>
-          </a:prstGeom>
-          <a:solidFill>
-            <a:srgbClr val="EAF3FF"/>
-          </a:solidFill>
-          <a:ln>
-            <a:noFill/>
-          </a:ln>
-          <a:effectLst/>
-        </p:spPr>
-        <p:style>
-          <a:lnRef idx="1">
-            <a:schemeClr val="accent1"/>
-          </a:lnRef>
-          <a:fillRef idx="3">
-            <a:schemeClr val="accent1"/>
-          </a:fillRef>
-          <a:effectRef idx="2">
-            <a:schemeClr val="accent1"/>
-          </a:effectRef>
-          <a:fontRef idx="minor">
-            <a:schemeClr val="lt1"/>
-          </a:fontRef>
-        </p:style>
-        <p:txBody>
-          <a:bodyPr rtlCol="0" anchor="ctr"/>
-          <a:lstStyle/>
-          <a:p/>
-        </p:txBody>
-      </p:sp>
-      <p:sp>
-        <p:nvSpPr>
-          <p:cNvPr id="11" name="Oval 10"/>
-          <p:cNvSpPr/>
-          <p:nvPr/>
-        </p:nvSpPr>
-        <p:spPr>
-          <a:xfrm>
-            <a:off x="6461607" y="1828800"/>
-            <a:ext cx="457200" cy="457200"/>
-          </a:xfrm>
-          <a:prstGeom prst="ellipse">
-            <a:avLst/>
-          </a:prstGeom>
-          <a:solidFill>
-            <a:srgbClr val="33C17A"/>
-          </a:solidFill>
-          <a:ln>
-            <a:noFill/>
-          </a:ln>
-          <a:effectLst/>
-        </p:spPr>
-        <p:style>
-          <a:lnRef idx="1">
-            <a:schemeClr val="accent1"/>
-          </a:lnRef>
-          <a:fillRef idx="3">
-            <a:schemeClr val="accent1"/>
-          </a:fillRef>
-          <a:effectRef idx="2">
-            <a:schemeClr val="accent1"/>
-          </a:effectRef>
-          <a:fontRef idx="minor">
-            <a:schemeClr val="lt1"/>
-          </a:fontRef>
-        </p:style>
-        <p:txBody>
-          <a:bodyPr rtlCol="0" anchor="ctr" lIns="0" rIns="0" tIns="0" bIns="0"/>
-          <a:lstStyle/>
-          <a:p>
-            <a:pPr algn="ctr"/>
-            <a:r>
-              <a:rPr sz="1500" b="1">
-                <a:solidFill>
-                  <a:srgbClr val="202122"/>
-                </a:solidFill>
-                <a:latin typeface="Calibri"/>
-              </a:rPr>
-              <a:t>2</a:t>
-            </a:r>
-          </a:p>
-        </p:txBody>
-      </p:sp>
-      <p:sp>
-        <p:nvSpPr>
-          <p:cNvPr id="12" name="TextBox 11"/>
+              <a:rPr sz="1300" b="1" i="0">
+                <a:solidFill>
+                  <a:srgbClr val="A9C8F0"/>
+                </a:solidFill>
+                <a:latin typeface="Calibri"/>
+              </a:rPr>
+              <a:t>EXAMPLE</a:t>
+            </a:r>
+          </a:p>
+        </p:txBody>
+      </p:sp>
+      <p:sp>
+        <p:nvSpPr>
+          <p:cNvPr id="10" name="TextBox 9"/>
           <p:cNvSpPr txBox="1"/>
           <p:nvPr/>
         </p:nvSpPr>
         <p:spPr>
           <a:xfrm>
-            <a:off x="7055967" y="1801368"/>
-            <a:ext cx="4404207" cy="512064"/>
+            <a:off x="8046720" y="2971800"/>
+            <a:ext cx="3291840" cy="2971800"/>
           </a:xfrm>
           <a:prstGeom prst="rect">
             <a:avLst/>
@@ -5714,377 +9473,18 @@
           <a:noFill/>
         </p:spPr>
         <p:txBody>
-          <a:bodyPr wrap="square" anchor="ctr" lIns="0" rIns="0" tIns="0" bIns="0"/>
+          <a:bodyPr wrap="square" anchor="t" lIns="0" rIns="0" tIns="0" bIns="0"/>
           <a:lstStyle/>
           <a:p>
             <a:pPr algn="l"/>
             <a:r>
-              <a:rPr sz="1900" b="1" i="0">
-                <a:solidFill>
-                  <a:srgbClr val="03306E"/>
-                </a:solidFill>
-                <a:latin typeface="Calibri"/>
-              </a:rPr>
-              <a:t>Clustering</a:t>
-            </a:r>
-          </a:p>
-        </p:txBody>
-      </p:sp>
-      <p:sp>
-        <p:nvSpPr>
-          <p:cNvPr id="13" name="TextBox 12"/>
-          <p:cNvSpPr txBox="1"/>
-          <p:nvPr/>
-        </p:nvSpPr>
-        <p:spPr>
-          <a:xfrm>
-            <a:off x="6461607" y="2468880"/>
-            <a:ext cx="4952847" cy="1143000"/>
-          </a:xfrm>
-          <a:prstGeom prst="rect">
-            <a:avLst/>
-          </a:prstGeom>
-          <a:noFill/>
-        </p:spPr>
-        <p:txBody>
-          <a:bodyPr wrap="square" anchor="t" lIns="0" rIns="0" tIns="0" bIns="0"/>
-          <a:lstStyle/>
-          <a:p>
-            <a:pPr algn="l"/>
-            <a:r>
-              <a:rPr sz="2000" b="0" i="0">
-                <a:solidFill>
-                  <a:srgbClr val="202122"/>
-                </a:solidFill>
-                <a:latin typeface="Calibri"/>
-              </a:rPr>
-              <a:t>Several servers act as one: redundancy and scalability.</a:t>
-            </a:r>
-          </a:p>
-        </p:txBody>
-      </p:sp>
-      <p:sp>
-        <p:nvSpPr>
-          <p:cNvPr id="14" name="Rounded Rectangle 13"/>
-          <p:cNvSpPr/>
-          <p:nvPr/>
-        </p:nvSpPr>
-        <p:spPr>
-          <a:xfrm>
-            <a:off x="548640" y="4023360"/>
-            <a:ext cx="5410047" cy="2148840"/>
-          </a:xfrm>
-          <a:prstGeom prst="roundRect">
-            <a:avLst>
-              <a:gd name="adj" fmla="val 6000"/>
-            </a:avLst>
-          </a:prstGeom>
-          <a:solidFill>
-            <a:srgbClr val="EAF3FF"/>
-          </a:solidFill>
-          <a:ln>
-            <a:noFill/>
-          </a:ln>
-          <a:effectLst/>
-        </p:spPr>
-        <p:style>
-          <a:lnRef idx="1">
-            <a:schemeClr val="accent1"/>
-          </a:lnRef>
-          <a:fillRef idx="3">
-            <a:schemeClr val="accent1"/>
-          </a:fillRef>
-          <a:effectRef idx="2">
-            <a:schemeClr val="accent1"/>
-          </a:effectRef>
-          <a:fontRef idx="minor">
-            <a:schemeClr val="lt1"/>
-          </a:fontRef>
-        </p:style>
-        <p:txBody>
-          <a:bodyPr rtlCol="0" anchor="ctr"/>
-          <a:lstStyle/>
-          <a:p/>
-        </p:txBody>
-      </p:sp>
-      <p:sp>
-        <p:nvSpPr>
-          <p:cNvPr id="15" name="Oval 14"/>
-          <p:cNvSpPr/>
-          <p:nvPr/>
-        </p:nvSpPr>
-        <p:spPr>
-          <a:xfrm>
-            <a:off x="777240" y="4251960"/>
-            <a:ext cx="457200" cy="457200"/>
-          </a:xfrm>
-          <a:prstGeom prst="ellipse">
-            <a:avLst/>
-          </a:prstGeom>
-          <a:solidFill>
-            <a:srgbClr val="33C17A"/>
-          </a:solidFill>
-          <a:ln>
-            <a:noFill/>
-          </a:ln>
-          <a:effectLst/>
-        </p:spPr>
-        <p:style>
-          <a:lnRef idx="1">
-            <a:schemeClr val="accent1"/>
-          </a:lnRef>
-          <a:fillRef idx="3">
-            <a:schemeClr val="accent1"/>
-          </a:fillRef>
-          <a:effectRef idx="2">
-            <a:schemeClr val="accent1"/>
-          </a:effectRef>
-          <a:fontRef idx="minor">
-            <a:schemeClr val="lt1"/>
-          </a:fontRef>
-        </p:style>
-        <p:txBody>
-          <a:bodyPr rtlCol="0" anchor="ctr" lIns="0" rIns="0" tIns="0" bIns="0"/>
-          <a:lstStyle/>
-          <a:p>
-            <a:pPr algn="ctr"/>
-            <a:r>
-              <a:rPr sz="1500" b="1">
-                <a:solidFill>
-                  <a:srgbClr val="202122"/>
-                </a:solidFill>
-                <a:latin typeface="Calibri"/>
-              </a:rPr>
-              <a:t>3</a:t>
-            </a:r>
-          </a:p>
-        </p:txBody>
-      </p:sp>
-      <p:sp>
-        <p:nvSpPr>
-          <p:cNvPr id="16" name="TextBox 15"/>
-          <p:cNvSpPr txBox="1"/>
-          <p:nvPr/>
-        </p:nvSpPr>
-        <p:spPr>
-          <a:xfrm>
-            <a:off x="1371600" y="4224528"/>
-            <a:ext cx="4404207" cy="512064"/>
-          </a:xfrm>
-          <a:prstGeom prst="rect">
-            <a:avLst/>
-          </a:prstGeom>
-          <a:noFill/>
-        </p:spPr>
-        <p:txBody>
-          <a:bodyPr wrap="square" anchor="ctr" lIns="0" rIns="0" tIns="0" bIns="0"/>
-          <a:lstStyle/>
-          <a:p>
-            <a:pPr algn="l"/>
-            <a:r>
-              <a:rPr sz="1900" b="1" i="0">
-                <a:solidFill>
-                  <a:srgbClr val="03306E"/>
-                </a:solidFill>
-                <a:latin typeface="Calibri"/>
-              </a:rPr>
-              <a:t>Load balancing</a:t>
-            </a:r>
-          </a:p>
-        </p:txBody>
-      </p:sp>
-      <p:sp>
-        <p:nvSpPr>
-          <p:cNvPr id="17" name="TextBox 16"/>
-          <p:cNvSpPr txBox="1"/>
-          <p:nvPr/>
-        </p:nvSpPr>
-        <p:spPr>
-          <a:xfrm>
-            <a:off x="777240" y="4892040"/>
-            <a:ext cx="4952847" cy="1143000"/>
-          </a:xfrm>
-          <a:prstGeom prst="rect">
-            <a:avLst/>
-          </a:prstGeom>
-          <a:noFill/>
-        </p:spPr>
-        <p:txBody>
-          <a:bodyPr wrap="square" anchor="t" lIns="0" rIns="0" tIns="0" bIns="0"/>
-          <a:lstStyle/>
-          <a:p>
-            <a:pPr algn="l"/>
-            <a:r>
-              <a:rPr sz="2000" b="0" i="0">
-                <a:solidFill>
-                  <a:srgbClr val="202122"/>
-                </a:solidFill>
-                <a:latin typeface="Calibri"/>
-              </a:rPr>
-              <a:t>Spreads traffic across servers.</a:t>
-            </a:r>
-          </a:p>
-        </p:txBody>
-      </p:sp>
-      <p:sp>
-        <p:nvSpPr>
-          <p:cNvPr id="18" name="Rounded Rectangle 17"/>
-          <p:cNvSpPr/>
-          <p:nvPr/>
-        </p:nvSpPr>
-        <p:spPr>
-          <a:xfrm>
-            <a:off x="6233007" y="4023360"/>
-            <a:ext cx="5410047" cy="2148840"/>
-          </a:xfrm>
-          <a:prstGeom prst="roundRect">
-            <a:avLst>
-              <a:gd name="adj" fmla="val 6000"/>
-            </a:avLst>
-          </a:prstGeom>
-          <a:solidFill>
-            <a:srgbClr val="EAF3FF"/>
-          </a:solidFill>
-          <a:ln>
-            <a:noFill/>
-          </a:ln>
-          <a:effectLst/>
-        </p:spPr>
-        <p:style>
-          <a:lnRef idx="1">
-            <a:schemeClr val="accent1"/>
-          </a:lnRef>
-          <a:fillRef idx="3">
-            <a:schemeClr val="accent1"/>
-          </a:fillRef>
-          <a:effectRef idx="2">
-            <a:schemeClr val="accent1"/>
-          </a:effectRef>
-          <a:fontRef idx="minor">
-            <a:schemeClr val="lt1"/>
-          </a:fontRef>
-        </p:style>
-        <p:txBody>
-          <a:bodyPr rtlCol="0" anchor="ctr"/>
-          <a:lstStyle/>
-          <a:p/>
-        </p:txBody>
-      </p:sp>
-      <p:sp>
-        <p:nvSpPr>
-          <p:cNvPr id="19" name="Oval 18"/>
-          <p:cNvSpPr/>
-          <p:nvPr/>
-        </p:nvSpPr>
-        <p:spPr>
-          <a:xfrm>
-            <a:off x="6461607" y="4251960"/>
-            <a:ext cx="457200" cy="457200"/>
-          </a:xfrm>
-          <a:prstGeom prst="ellipse">
-            <a:avLst/>
-          </a:prstGeom>
-          <a:solidFill>
-            <a:srgbClr val="33C17A"/>
-          </a:solidFill>
-          <a:ln>
-            <a:noFill/>
-          </a:ln>
-          <a:effectLst/>
-        </p:spPr>
-        <p:style>
-          <a:lnRef idx="1">
-            <a:schemeClr val="accent1"/>
-          </a:lnRef>
-          <a:fillRef idx="3">
-            <a:schemeClr val="accent1"/>
-          </a:fillRef>
-          <a:effectRef idx="2">
-            <a:schemeClr val="accent1"/>
-          </a:effectRef>
-          <a:fontRef idx="minor">
-            <a:schemeClr val="lt1"/>
-          </a:fontRef>
-        </p:style>
-        <p:txBody>
-          <a:bodyPr rtlCol="0" anchor="ctr" lIns="0" rIns="0" tIns="0" bIns="0"/>
-          <a:lstStyle/>
-          <a:p>
-            <a:pPr algn="ctr"/>
-            <a:r>
-              <a:rPr sz="1500" b="1">
-                <a:solidFill>
-                  <a:srgbClr val="202122"/>
-                </a:solidFill>
-                <a:latin typeface="Calibri"/>
-              </a:rPr>
-              <a:t>4</a:t>
-            </a:r>
-          </a:p>
-        </p:txBody>
-      </p:sp>
-      <p:sp>
-        <p:nvSpPr>
-          <p:cNvPr id="20" name="TextBox 19"/>
-          <p:cNvSpPr txBox="1"/>
-          <p:nvPr/>
-        </p:nvSpPr>
-        <p:spPr>
-          <a:xfrm>
-            <a:off x="7055967" y="4224528"/>
-            <a:ext cx="4404207" cy="512064"/>
-          </a:xfrm>
-          <a:prstGeom prst="rect">
-            <a:avLst/>
-          </a:prstGeom>
-          <a:noFill/>
-        </p:spPr>
-        <p:txBody>
-          <a:bodyPr wrap="square" anchor="ctr" lIns="0" rIns="0" tIns="0" bIns="0"/>
-          <a:lstStyle/>
-          <a:p>
-            <a:pPr algn="l"/>
-            <a:r>
-              <a:rPr sz="1900" b="1" i="0">
-                <a:solidFill>
-                  <a:srgbClr val="03306E"/>
-                </a:solidFill>
-                <a:latin typeface="Calibri"/>
-              </a:rPr>
-              <a:t>Segmentation</a:t>
-            </a:r>
-          </a:p>
-        </p:txBody>
-      </p:sp>
-      <p:sp>
-        <p:nvSpPr>
-          <p:cNvPr id="21" name="TextBox 20"/>
-          <p:cNvSpPr txBox="1"/>
-          <p:nvPr/>
-        </p:nvSpPr>
-        <p:spPr>
-          <a:xfrm>
-            <a:off x="6461607" y="4892040"/>
-            <a:ext cx="4952847" cy="1143000"/>
-          </a:xfrm>
-          <a:prstGeom prst="rect">
-            <a:avLst/>
-          </a:prstGeom>
-          <a:noFill/>
-        </p:spPr>
-        <p:txBody>
-          <a:bodyPr wrap="square" anchor="t" lIns="0" rIns="0" tIns="0" bIns="0"/>
-          <a:lstStyle/>
-          <a:p>
-            <a:pPr algn="l"/>
-            <a:r>
-              <a:rPr sz="2000" b="0" i="0">
-                <a:solidFill>
-                  <a:srgbClr val="202122"/>
-                </a:solidFill>
-                <a:latin typeface="Calibri"/>
-              </a:rPr>
-              <a:t>Splits networks, systems and data to limit the impact of a problem.</a:t>
+              <a:rPr sz="1900" b="0" i="0">
+                <a:solidFill>
+                  <a:srgbClr val="FFFFFF"/>
+                </a:solidFill>
+                <a:latin typeface="Cambria"/>
+              </a:rPr>
+              <a:t>An online shop runs three web servers behind a load balancer. On Black Friday traffic is shared out, and when one server crashes customers don't notice.</a:t>
             </a:r>
           </a:p>
         </p:txBody>
@@ -6176,7 +9576,7 @@
                 </a:solidFill>
                 <a:latin typeface="Cambria"/>
               </a:rPr>
-              <a:t>Number systems for addressing</a:t>
+              <a:t>Designing for resilience</a:t>
             </a:r>
           </a:p>
         </p:txBody>
@@ -6243,6 +9643,1265 @@
                 <a:latin typeface="Calibri"/>
               </a:rPr>
               <a:t>4</a:t>
+            </a:r>
+          </a:p>
+        </p:txBody>
+      </p:sp>
+      <p:sp>
+        <p:nvSpPr>
+          <p:cNvPr id="6" name="Rounded Rectangle 5"/>
+          <p:cNvSpPr/>
+          <p:nvPr/>
+        </p:nvSpPr>
+        <p:spPr>
+          <a:xfrm>
+            <a:off x="548640" y="1600200"/>
+            <a:ext cx="5410047" cy="2148840"/>
+          </a:xfrm>
+          <a:prstGeom prst="roundRect">
+            <a:avLst>
+              <a:gd name="adj" fmla="val 6000"/>
+            </a:avLst>
+          </a:prstGeom>
+          <a:solidFill>
+            <a:srgbClr val="EAF3FF"/>
+          </a:solidFill>
+          <a:ln>
+            <a:noFill/>
+          </a:ln>
+          <a:effectLst/>
+        </p:spPr>
+        <p:style>
+          <a:lnRef idx="1">
+            <a:schemeClr val="accent1"/>
+          </a:lnRef>
+          <a:fillRef idx="3">
+            <a:schemeClr val="accent1"/>
+          </a:fillRef>
+          <a:effectRef idx="2">
+            <a:schemeClr val="accent1"/>
+          </a:effectRef>
+          <a:fontRef idx="minor">
+            <a:schemeClr val="lt1"/>
+          </a:fontRef>
+        </p:style>
+        <p:txBody>
+          <a:bodyPr rtlCol="0" anchor="ctr"/>
+          <a:lstStyle/>
+          <a:p/>
+        </p:txBody>
+      </p:sp>
+      <p:sp>
+        <p:nvSpPr>
+          <p:cNvPr id="7" name="Oval 6"/>
+          <p:cNvSpPr/>
+          <p:nvPr/>
+        </p:nvSpPr>
+        <p:spPr>
+          <a:xfrm>
+            <a:off x="777240" y="1828800"/>
+            <a:ext cx="457200" cy="457200"/>
+          </a:xfrm>
+          <a:prstGeom prst="ellipse">
+            <a:avLst/>
+          </a:prstGeom>
+          <a:solidFill>
+            <a:srgbClr val="33C17A"/>
+          </a:solidFill>
+          <a:ln>
+            <a:noFill/>
+          </a:ln>
+          <a:effectLst/>
+        </p:spPr>
+        <p:style>
+          <a:lnRef idx="1">
+            <a:schemeClr val="accent1"/>
+          </a:lnRef>
+          <a:fillRef idx="3">
+            <a:schemeClr val="accent1"/>
+          </a:fillRef>
+          <a:effectRef idx="2">
+            <a:schemeClr val="accent1"/>
+          </a:effectRef>
+          <a:fontRef idx="minor">
+            <a:schemeClr val="lt1"/>
+          </a:fontRef>
+        </p:style>
+        <p:txBody>
+          <a:bodyPr rtlCol="0" anchor="ctr" lIns="0" rIns="0" tIns="0" bIns="0"/>
+          <a:lstStyle/>
+          <a:p>
+            <a:pPr algn="ctr"/>
+            <a:r>
+              <a:rPr sz="1500" b="1">
+                <a:solidFill>
+                  <a:srgbClr val="202122"/>
+                </a:solidFill>
+                <a:latin typeface="Calibri"/>
+              </a:rPr>
+              <a:t>1</a:t>
+            </a:r>
+          </a:p>
+        </p:txBody>
+      </p:sp>
+      <p:sp>
+        <p:nvSpPr>
+          <p:cNvPr id="8" name="TextBox 7"/>
+          <p:cNvSpPr txBox="1"/>
+          <p:nvPr/>
+        </p:nvSpPr>
+        <p:spPr>
+          <a:xfrm>
+            <a:off x="1371600" y="1801368"/>
+            <a:ext cx="4404207" cy="512064"/>
+          </a:xfrm>
+          <a:prstGeom prst="rect">
+            <a:avLst/>
+          </a:prstGeom>
+          <a:noFill/>
+        </p:spPr>
+        <p:txBody>
+          <a:bodyPr wrap="square" anchor="ctr" lIns="0" rIns="0" tIns="0" bIns="0"/>
+          <a:lstStyle/>
+          <a:p>
+            <a:pPr algn="l"/>
+            <a:r>
+              <a:rPr sz="1900" b="1" i="0">
+                <a:solidFill>
+                  <a:srgbClr val="03306E"/>
+                </a:solidFill>
+                <a:latin typeface="Calibri"/>
+              </a:rPr>
+              <a:t>High availability</a:t>
+            </a:r>
+          </a:p>
+        </p:txBody>
+      </p:sp>
+      <p:sp>
+        <p:nvSpPr>
+          <p:cNvPr id="9" name="TextBox 8"/>
+          <p:cNvSpPr txBox="1"/>
+          <p:nvPr/>
+        </p:nvSpPr>
+        <p:spPr>
+          <a:xfrm>
+            <a:off x="777240" y="2468880"/>
+            <a:ext cx="4952847" cy="1143000"/>
+          </a:xfrm>
+          <a:prstGeom prst="rect">
+            <a:avLst/>
+          </a:prstGeom>
+          <a:noFill/>
+        </p:spPr>
+        <p:txBody>
+          <a:bodyPr wrap="square" anchor="t" lIns="0" rIns="0" tIns="0" bIns="0"/>
+          <a:lstStyle/>
+          <a:p>
+            <a:pPr algn="l"/>
+            <a:r>
+              <a:rPr sz="2000" b="0" i="0">
+                <a:solidFill>
+                  <a:srgbClr val="202122"/>
+                </a:solidFill>
+                <a:latin typeface="Calibri"/>
+              </a:rPr>
+              <a:t>Primary and secondary systems, so one can take over.</a:t>
+            </a:r>
+          </a:p>
+        </p:txBody>
+      </p:sp>
+      <p:sp>
+        <p:nvSpPr>
+          <p:cNvPr id="10" name="Rounded Rectangle 9"/>
+          <p:cNvSpPr/>
+          <p:nvPr/>
+        </p:nvSpPr>
+        <p:spPr>
+          <a:xfrm>
+            <a:off x="6233007" y="1600200"/>
+            <a:ext cx="5410047" cy="2148840"/>
+          </a:xfrm>
+          <a:prstGeom prst="roundRect">
+            <a:avLst>
+              <a:gd name="adj" fmla="val 6000"/>
+            </a:avLst>
+          </a:prstGeom>
+          <a:solidFill>
+            <a:srgbClr val="EAF3FF"/>
+          </a:solidFill>
+          <a:ln>
+            <a:noFill/>
+          </a:ln>
+          <a:effectLst/>
+        </p:spPr>
+        <p:style>
+          <a:lnRef idx="1">
+            <a:schemeClr val="accent1"/>
+          </a:lnRef>
+          <a:fillRef idx="3">
+            <a:schemeClr val="accent1"/>
+          </a:fillRef>
+          <a:effectRef idx="2">
+            <a:schemeClr val="accent1"/>
+          </a:effectRef>
+          <a:fontRef idx="minor">
+            <a:schemeClr val="lt1"/>
+          </a:fontRef>
+        </p:style>
+        <p:txBody>
+          <a:bodyPr rtlCol="0" anchor="ctr"/>
+          <a:lstStyle/>
+          <a:p/>
+        </p:txBody>
+      </p:sp>
+      <p:sp>
+        <p:nvSpPr>
+          <p:cNvPr id="11" name="Oval 10"/>
+          <p:cNvSpPr/>
+          <p:nvPr/>
+        </p:nvSpPr>
+        <p:spPr>
+          <a:xfrm>
+            <a:off x="6461607" y="1828800"/>
+            <a:ext cx="457200" cy="457200"/>
+          </a:xfrm>
+          <a:prstGeom prst="ellipse">
+            <a:avLst/>
+          </a:prstGeom>
+          <a:solidFill>
+            <a:srgbClr val="33C17A"/>
+          </a:solidFill>
+          <a:ln>
+            <a:noFill/>
+          </a:ln>
+          <a:effectLst/>
+        </p:spPr>
+        <p:style>
+          <a:lnRef idx="1">
+            <a:schemeClr val="accent1"/>
+          </a:lnRef>
+          <a:fillRef idx="3">
+            <a:schemeClr val="accent1"/>
+          </a:fillRef>
+          <a:effectRef idx="2">
+            <a:schemeClr val="accent1"/>
+          </a:effectRef>
+          <a:fontRef idx="minor">
+            <a:schemeClr val="lt1"/>
+          </a:fontRef>
+        </p:style>
+        <p:txBody>
+          <a:bodyPr rtlCol="0" anchor="ctr" lIns="0" rIns="0" tIns="0" bIns="0"/>
+          <a:lstStyle/>
+          <a:p>
+            <a:pPr algn="ctr"/>
+            <a:r>
+              <a:rPr sz="1500" b="1">
+                <a:solidFill>
+                  <a:srgbClr val="202122"/>
+                </a:solidFill>
+                <a:latin typeface="Calibri"/>
+              </a:rPr>
+              <a:t>2</a:t>
+            </a:r>
+          </a:p>
+        </p:txBody>
+      </p:sp>
+      <p:sp>
+        <p:nvSpPr>
+          <p:cNvPr id="12" name="TextBox 11"/>
+          <p:cNvSpPr txBox="1"/>
+          <p:nvPr/>
+        </p:nvSpPr>
+        <p:spPr>
+          <a:xfrm>
+            <a:off x="7055967" y="1801368"/>
+            <a:ext cx="4404207" cy="512064"/>
+          </a:xfrm>
+          <a:prstGeom prst="rect">
+            <a:avLst/>
+          </a:prstGeom>
+          <a:noFill/>
+        </p:spPr>
+        <p:txBody>
+          <a:bodyPr wrap="square" anchor="ctr" lIns="0" rIns="0" tIns="0" bIns="0"/>
+          <a:lstStyle/>
+          <a:p>
+            <a:pPr algn="l"/>
+            <a:r>
+              <a:rPr sz="1900" b="1" i="0">
+                <a:solidFill>
+                  <a:srgbClr val="03306E"/>
+                </a:solidFill>
+                <a:latin typeface="Calibri"/>
+              </a:rPr>
+              <a:t>Clustering</a:t>
+            </a:r>
+          </a:p>
+        </p:txBody>
+      </p:sp>
+      <p:sp>
+        <p:nvSpPr>
+          <p:cNvPr id="13" name="TextBox 12"/>
+          <p:cNvSpPr txBox="1"/>
+          <p:nvPr/>
+        </p:nvSpPr>
+        <p:spPr>
+          <a:xfrm>
+            <a:off x="6461607" y="2468880"/>
+            <a:ext cx="4952847" cy="1143000"/>
+          </a:xfrm>
+          <a:prstGeom prst="rect">
+            <a:avLst/>
+          </a:prstGeom>
+          <a:noFill/>
+        </p:spPr>
+        <p:txBody>
+          <a:bodyPr wrap="square" anchor="t" lIns="0" rIns="0" tIns="0" bIns="0"/>
+          <a:lstStyle/>
+          <a:p>
+            <a:pPr algn="l"/>
+            <a:r>
+              <a:rPr sz="2000" b="0" i="0">
+                <a:solidFill>
+                  <a:srgbClr val="202122"/>
+                </a:solidFill>
+                <a:latin typeface="Calibri"/>
+              </a:rPr>
+              <a:t>Several servers act as one: redundancy and scalability.</a:t>
+            </a:r>
+          </a:p>
+        </p:txBody>
+      </p:sp>
+      <p:sp>
+        <p:nvSpPr>
+          <p:cNvPr id="14" name="Rounded Rectangle 13"/>
+          <p:cNvSpPr/>
+          <p:nvPr/>
+        </p:nvSpPr>
+        <p:spPr>
+          <a:xfrm>
+            <a:off x="548640" y="4023360"/>
+            <a:ext cx="5410047" cy="2148840"/>
+          </a:xfrm>
+          <a:prstGeom prst="roundRect">
+            <a:avLst>
+              <a:gd name="adj" fmla="val 6000"/>
+            </a:avLst>
+          </a:prstGeom>
+          <a:solidFill>
+            <a:srgbClr val="EAF3FF"/>
+          </a:solidFill>
+          <a:ln>
+            <a:noFill/>
+          </a:ln>
+          <a:effectLst/>
+        </p:spPr>
+        <p:style>
+          <a:lnRef idx="1">
+            <a:schemeClr val="accent1"/>
+          </a:lnRef>
+          <a:fillRef idx="3">
+            <a:schemeClr val="accent1"/>
+          </a:fillRef>
+          <a:effectRef idx="2">
+            <a:schemeClr val="accent1"/>
+          </a:effectRef>
+          <a:fontRef idx="minor">
+            <a:schemeClr val="lt1"/>
+          </a:fontRef>
+        </p:style>
+        <p:txBody>
+          <a:bodyPr rtlCol="0" anchor="ctr"/>
+          <a:lstStyle/>
+          <a:p/>
+        </p:txBody>
+      </p:sp>
+      <p:sp>
+        <p:nvSpPr>
+          <p:cNvPr id="15" name="Oval 14"/>
+          <p:cNvSpPr/>
+          <p:nvPr/>
+        </p:nvSpPr>
+        <p:spPr>
+          <a:xfrm>
+            <a:off x="777240" y="4251960"/>
+            <a:ext cx="457200" cy="457200"/>
+          </a:xfrm>
+          <a:prstGeom prst="ellipse">
+            <a:avLst/>
+          </a:prstGeom>
+          <a:solidFill>
+            <a:srgbClr val="33C17A"/>
+          </a:solidFill>
+          <a:ln>
+            <a:noFill/>
+          </a:ln>
+          <a:effectLst/>
+        </p:spPr>
+        <p:style>
+          <a:lnRef idx="1">
+            <a:schemeClr val="accent1"/>
+          </a:lnRef>
+          <a:fillRef idx="3">
+            <a:schemeClr val="accent1"/>
+          </a:fillRef>
+          <a:effectRef idx="2">
+            <a:schemeClr val="accent1"/>
+          </a:effectRef>
+          <a:fontRef idx="minor">
+            <a:schemeClr val="lt1"/>
+          </a:fontRef>
+        </p:style>
+        <p:txBody>
+          <a:bodyPr rtlCol="0" anchor="ctr" lIns="0" rIns="0" tIns="0" bIns="0"/>
+          <a:lstStyle/>
+          <a:p>
+            <a:pPr algn="ctr"/>
+            <a:r>
+              <a:rPr sz="1500" b="1">
+                <a:solidFill>
+                  <a:srgbClr val="202122"/>
+                </a:solidFill>
+                <a:latin typeface="Calibri"/>
+              </a:rPr>
+              <a:t>3</a:t>
+            </a:r>
+          </a:p>
+        </p:txBody>
+      </p:sp>
+      <p:sp>
+        <p:nvSpPr>
+          <p:cNvPr id="16" name="TextBox 15"/>
+          <p:cNvSpPr txBox="1"/>
+          <p:nvPr/>
+        </p:nvSpPr>
+        <p:spPr>
+          <a:xfrm>
+            <a:off x="1371600" y="4224528"/>
+            <a:ext cx="4404207" cy="512064"/>
+          </a:xfrm>
+          <a:prstGeom prst="rect">
+            <a:avLst/>
+          </a:prstGeom>
+          <a:noFill/>
+        </p:spPr>
+        <p:txBody>
+          <a:bodyPr wrap="square" anchor="ctr" lIns="0" rIns="0" tIns="0" bIns="0"/>
+          <a:lstStyle/>
+          <a:p>
+            <a:pPr algn="l"/>
+            <a:r>
+              <a:rPr sz="1900" b="1" i="0">
+                <a:solidFill>
+                  <a:srgbClr val="03306E"/>
+                </a:solidFill>
+                <a:latin typeface="Calibri"/>
+              </a:rPr>
+              <a:t>Load balancing</a:t>
+            </a:r>
+          </a:p>
+        </p:txBody>
+      </p:sp>
+      <p:sp>
+        <p:nvSpPr>
+          <p:cNvPr id="17" name="TextBox 16"/>
+          <p:cNvSpPr txBox="1"/>
+          <p:nvPr/>
+        </p:nvSpPr>
+        <p:spPr>
+          <a:xfrm>
+            <a:off x="777240" y="4892040"/>
+            <a:ext cx="4952847" cy="1143000"/>
+          </a:xfrm>
+          <a:prstGeom prst="rect">
+            <a:avLst/>
+          </a:prstGeom>
+          <a:noFill/>
+        </p:spPr>
+        <p:txBody>
+          <a:bodyPr wrap="square" anchor="t" lIns="0" rIns="0" tIns="0" bIns="0"/>
+          <a:lstStyle/>
+          <a:p>
+            <a:pPr algn="l"/>
+            <a:r>
+              <a:rPr sz="2000" b="0" i="0">
+                <a:solidFill>
+                  <a:srgbClr val="202122"/>
+                </a:solidFill>
+                <a:latin typeface="Calibri"/>
+              </a:rPr>
+              <a:t>Spreads traffic across servers.</a:t>
+            </a:r>
+          </a:p>
+        </p:txBody>
+      </p:sp>
+      <p:sp>
+        <p:nvSpPr>
+          <p:cNvPr id="18" name="Rounded Rectangle 17"/>
+          <p:cNvSpPr/>
+          <p:nvPr/>
+        </p:nvSpPr>
+        <p:spPr>
+          <a:xfrm>
+            <a:off x="6233007" y="4023360"/>
+            <a:ext cx="5410047" cy="2148840"/>
+          </a:xfrm>
+          <a:prstGeom prst="roundRect">
+            <a:avLst>
+              <a:gd name="adj" fmla="val 6000"/>
+            </a:avLst>
+          </a:prstGeom>
+          <a:solidFill>
+            <a:srgbClr val="EAF3FF"/>
+          </a:solidFill>
+          <a:ln>
+            <a:noFill/>
+          </a:ln>
+          <a:effectLst/>
+        </p:spPr>
+        <p:style>
+          <a:lnRef idx="1">
+            <a:schemeClr val="accent1"/>
+          </a:lnRef>
+          <a:fillRef idx="3">
+            <a:schemeClr val="accent1"/>
+          </a:fillRef>
+          <a:effectRef idx="2">
+            <a:schemeClr val="accent1"/>
+          </a:effectRef>
+          <a:fontRef idx="minor">
+            <a:schemeClr val="lt1"/>
+          </a:fontRef>
+        </p:style>
+        <p:txBody>
+          <a:bodyPr rtlCol="0" anchor="ctr"/>
+          <a:lstStyle/>
+          <a:p/>
+        </p:txBody>
+      </p:sp>
+      <p:sp>
+        <p:nvSpPr>
+          <p:cNvPr id="19" name="Oval 18"/>
+          <p:cNvSpPr/>
+          <p:nvPr/>
+        </p:nvSpPr>
+        <p:spPr>
+          <a:xfrm>
+            <a:off x="6461607" y="4251960"/>
+            <a:ext cx="457200" cy="457200"/>
+          </a:xfrm>
+          <a:prstGeom prst="ellipse">
+            <a:avLst/>
+          </a:prstGeom>
+          <a:solidFill>
+            <a:srgbClr val="33C17A"/>
+          </a:solidFill>
+          <a:ln>
+            <a:noFill/>
+          </a:ln>
+          <a:effectLst/>
+        </p:spPr>
+        <p:style>
+          <a:lnRef idx="1">
+            <a:schemeClr val="accent1"/>
+          </a:lnRef>
+          <a:fillRef idx="3">
+            <a:schemeClr val="accent1"/>
+          </a:fillRef>
+          <a:effectRef idx="2">
+            <a:schemeClr val="accent1"/>
+          </a:effectRef>
+          <a:fontRef idx="minor">
+            <a:schemeClr val="lt1"/>
+          </a:fontRef>
+        </p:style>
+        <p:txBody>
+          <a:bodyPr rtlCol="0" anchor="ctr" lIns="0" rIns="0" tIns="0" bIns="0"/>
+          <a:lstStyle/>
+          <a:p>
+            <a:pPr algn="ctr"/>
+            <a:r>
+              <a:rPr sz="1500" b="1">
+                <a:solidFill>
+                  <a:srgbClr val="202122"/>
+                </a:solidFill>
+                <a:latin typeface="Calibri"/>
+              </a:rPr>
+              <a:t>4</a:t>
+            </a:r>
+          </a:p>
+        </p:txBody>
+      </p:sp>
+      <p:sp>
+        <p:nvSpPr>
+          <p:cNvPr id="20" name="TextBox 19"/>
+          <p:cNvSpPr txBox="1"/>
+          <p:nvPr/>
+        </p:nvSpPr>
+        <p:spPr>
+          <a:xfrm>
+            <a:off x="7055967" y="4224528"/>
+            <a:ext cx="4404207" cy="512064"/>
+          </a:xfrm>
+          <a:prstGeom prst="rect">
+            <a:avLst/>
+          </a:prstGeom>
+          <a:noFill/>
+        </p:spPr>
+        <p:txBody>
+          <a:bodyPr wrap="square" anchor="ctr" lIns="0" rIns="0" tIns="0" bIns="0"/>
+          <a:lstStyle/>
+          <a:p>
+            <a:pPr algn="l"/>
+            <a:r>
+              <a:rPr sz="1900" b="1" i="0">
+                <a:solidFill>
+                  <a:srgbClr val="03306E"/>
+                </a:solidFill>
+                <a:latin typeface="Calibri"/>
+              </a:rPr>
+              <a:t>Segmentation</a:t>
+            </a:r>
+          </a:p>
+        </p:txBody>
+      </p:sp>
+      <p:sp>
+        <p:nvSpPr>
+          <p:cNvPr id="21" name="TextBox 20"/>
+          <p:cNvSpPr txBox="1"/>
+          <p:nvPr/>
+        </p:nvSpPr>
+        <p:spPr>
+          <a:xfrm>
+            <a:off x="6461607" y="4892040"/>
+            <a:ext cx="4952847" cy="1143000"/>
+          </a:xfrm>
+          <a:prstGeom prst="rect">
+            <a:avLst/>
+          </a:prstGeom>
+          <a:noFill/>
+        </p:spPr>
+        <p:txBody>
+          <a:bodyPr wrap="square" anchor="t" lIns="0" rIns="0" tIns="0" bIns="0"/>
+          <a:lstStyle/>
+          <a:p>
+            <a:pPr algn="l"/>
+            <a:r>
+              <a:rPr sz="2000" b="0" i="0">
+                <a:solidFill>
+                  <a:srgbClr val="202122"/>
+                </a:solidFill>
+                <a:latin typeface="Calibri"/>
+              </a:rPr>
+              <a:t>Splits networks, systems and data to limit the impact of a problem.</a:t>
+            </a:r>
+          </a:p>
+        </p:txBody>
+      </p:sp>
+    </p:spTree>
+  </p:cSld>
+  <p:clrMapOvr>
+    <a:masterClrMapping/>
+  </p:clrMapOvr>
+</p:sld>
+</file>
+
+<file path=ppt/slides/slide5.xml><?xml version="1.0" encoding="utf-8"?>
+<p:sld xmlns:a="http://schemas.openxmlformats.org/drawingml/2006/main" xmlns:p="http://schemas.openxmlformats.org/presentationml/2006/main" xmlns:r="http://schemas.openxmlformats.org/officeDocument/2006/relationships">
+  <p:cSld>
+    <p:bg>
+      <p:bgPr>
+        <a:solidFill>
+          <a:srgbClr val="FFFFFF"/>
+        </a:solidFill>
+        <a:effectLst/>
+      </p:bgPr>
+    </p:bg>
+    <p:spTree>
+      <p:nvGrpSpPr>
+        <p:cNvPr id="1" name=""/>
+        <p:cNvGrpSpPr/>
+        <p:nvPr/>
+      </p:nvGrpSpPr>
+      <p:grpSpPr/>
+      <p:sp>
+        <p:nvSpPr>
+          <p:cNvPr id="2" name="TextBox 1"/>
+          <p:cNvSpPr txBox="1"/>
+          <p:nvPr/>
+        </p:nvSpPr>
+        <p:spPr>
+          <a:xfrm>
+            <a:off x="548640" y="320040"/>
+            <a:ext cx="11094415" cy="274320"/>
+          </a:xfrm>
+          <a:prstGeom prst="rect">
+            <a:avLst/>
+          </a:prstGeom>
+          <a:noFill/>
+        </p:spPr>
+        <p:txBody>
+          <a:bodyPr wrap="square" anchor="t" lIns="0" rIns="0" tIns="0" bIns="0"/>
+          <a:lstStyle/>
+          <a:p>
+            <a:pPr algn="l"/>
+            <a:r>
+              <a:rPr sz="1100" b="1" i="0">
+                <a:solidFill>
+                  <a:srgbClr val="54595D"/>
+                </a:solidFill>
+                <a:latin typeface="Calibri"/>
+              </a:rPr>
+              <a:t>DIGITAL INFRASTRUCTURE  ·  Digital Infrastructure Content Area 2</a:t>
+            </a:r>
+          </a:p>
+        </p:txBody>
+      </p:sp>
+      <p:sp>
+        <p:nvSpPr>
+          <p:cNvPr id="3" name="TextBox 2"/>
+          <p:cNvSpPr txBox="1"/>
+          <p:nvPr/>
+        </p:nvSpPr>
+        <p:spPr>
+          <a:xfrm>
+            <a:off x="548640" y="566928"/>
+            <a:ext cx="11094415" cy="822960"/>
+          </a:xfrm>
+          <a:prstGeom prst="rect">
+            <a:avLst/>
+          </a:prstGeom>
+          <a:noFill/>
+        </p:spPr>
+        <p:txBody>
+          <a:bodyPr wrap="square" anchor="ctr" lIns="0" rIns="0" tIns="0" bIns="0"/>
+          <a:lstStyle/>
+          <a:p>
+            <a:pPr algn="l"/>
+            <a:r>
+              <a:rPr sz="3200" b="1" i="0">
+                <a:solidFill>
+                  <a:srgbClr val="03306E"/>
+                </a:solidFill>
+                <a:latin typeface="Cambria"/>
+              </a:rPr>
+              <a:t>Quick check: Designing for resilience</a:t>
+            </a:r>
+          </a:p>
+        </p:txBody>
+      </p:sp>
+      <p:sp>
+        <p:nvSpPr>
+          <p:cNvPr id="4" name="TextBox 3"/>
+          <p:cNvSpPr txBox="1"/>
+          <p:nvPr/>
+        </p:nvSpPr>
+        <p:spPr>
+          <a:xfrm>
+            <a:off x="548640" y="6446520"/>
+            <a:ext cx="8229600" cy="274320"/>
+          </a:xfrm>
+          <a:prstGeom prst="rect">
+            <a:avLst/>
+          </a:prstGeom>
+          <a:noFill/>
+        </p:spPr>
+        <p:txBody>
+          <a:bodyPr wrap="square" anchor="t" lIns="0" rIns="0" tIns="0" bIns="0"/>
+          <a:lstStyle/>
+          <a:p>
+            <a:pPr algn="l"/>
+            <a:r>
+              <a:rPr sz="1000" b="0" i="0">
+                <a:solidFill>
+                  <a:srgbClr val="54595D"/>
+                </a:solidFill>
+                <a:latin typeface="Calibri"/>
+              </a:rPr>
+              <a:t>Digital Support and Security T Level  ·  Network Design, Addressing and Transmission</a:t>
+            </a:r>
+          </a:p>
+        </p:txBody>
+      </p:sp>
+      <p:sp>
+        <p:nvSpPr>
+          <p:cNvPr id="5" name="TextBox 4"/>
+          <p:cNvSpPr txBox="1"/>
+          <p:nvPr/>
+        </p:nvSpPr>
+        <p:spPr>
+          <a:xfrm>
+            <a:off x="10728655" y="6446520"/>
+            <a:ext cx="914400" cy="274320"/>
+          </a:xfrm>
+          <a:prstGeom prst="rect">
+            <a:avLst/>
+          </a:prstGeom>
+          <a:noFill/>
+        </p:spPr>
+        <p:txBody>
+          <a:bodyPr wrap="square" anchor="t" lIns="0" rIns="0" tIns="0" bIns="0"/>
+          <a:lstStyle/>
+          <a:p>
+            <a:pPr algn="r"/>
+            <a:r>
+              <a:rPr sz="1000" b="0" i="0">
+                <a:solidFill>
+                  <a:srgbClr val="54595D"/>
+                </a:solidFill>
+                <a:latin typeface="Calibri"/>
+              </a:rPr>
+              <a:t>5</a:t>
+            </a:r>
+          </a:p>
+        </p:txBody>
+      </p:sp>
+      <p:sp>
+        <p:nvSpPr>
+          <p:cNvPr id="6" name="Oval 5"/>
+          <p:cNvSpPr/>
+          <p:nvPr/>
+        </p:nvSpPr>
+        <p:spPr>
+          <a:xfrm>
+            <a:off x="548640" y="1691640"/>
+            <a:ext cx="502920" cy="502920"/>
+          </a:xfrm>
+          <a:prstGeom prst="ellipse">
+            <a:avLst/>
+          </a:prstGeom>
+          <a:solidFill>
+            <a:srgbClr val="33C17A"/>
+          </a:solidFill>
+          <a:ln>
+            <a:noFill/>
+          </a:ln>
+          <a:effectLst/>
+        </p:spPr>
+        <p:style>
+          <a:lnRef idx="1">
+            <a:schemeClr val="accent1"/>
+          </a:lnRef>
+          <a:fillRef idx="3">
+            <a:schemeClr val="accent1"/>
+          </a:fillRef>
+          <a:effectRef idx="2">
+            <a:schemeClr val="accent1"/>
+          </a:effectRef>
+          <a:fontRef idx="minor">
+            <a:schemeClr val="lt1"/>
+          </a:fontRef>
+        </p:style>
+        <p:txBody>
+          <a:bodyPr rtlCol="0" anchor="ctr" lIns="0" rIns="0" tIns="0" bIns="0"/>
+          <a:lstStyle/>
+          <a:p>
+            <a:pPr algn="ctr"/>
+            <a:r>
+              <a:rPr sz="1600" b="1">
+                <a:solidFill>
+                  <a:srgbClr val="202122"/>
+                </a:solidFill>
+                <a:latin typeface="Calibri"/>
+              </a:rPr>
+              <a:t>1</a:t>
+            </a:r>
+          </a:p>
+        </p:txBody>
+      </p:sp>
+      <p:sp>
+        <p:nvSpPr>
+          <p:cNvPr id="7" name="TextBox 6"/>
+          <p:cNvSpPr txBox="1"/>
+          <p:nvPr/>
+        </p:nvSpPr>
+        <p:spPr>
+          <a:xfrm>
+            <a:off x="1371600" y="1645920"/>
+            <a:ext cx="10271455" cy="1188720"/>
+          </a:xfrm>
+          <a:prstGeom prst="rect">
+            <a:avLst/>
+          </a:prstGeom>
+          <a:noFill/>
+        </p:spPr>
+        <p:txBody>
+          <a:bodyPr wrap="square" anchor="t" lIns="0" rIns="0" tIns="0" bIns="0"/>
+          <a:lstStyle/>
+          <a:p>
+            <a:pPr algn="l"/>
+            <a:r>
+              <a:rPr sz="2400" b="0" i="0">
+                <a:solidFill>
+                  <a:srgbClr val="202122"/>
+                </a:solidFill>
+                <a:latin typeface="Calibri"/>
+              </a:rPr>
+              <a:t>What does a load balancer do?</a:t>
+            </a:r>
+          </a:p>
+        </p:txBody>
+      </p:sp>
+      <p:sp>
+        <p:nvSpPr>
+          <p:cNvPr id="8" name="Oval 7"/>
+          <p:cNvSpPr/>
+          <p:nvPr/>
+        </p:nvSpPr>
+        <p:spPr>
+          <a:xfrm>
+            <a:off x="548640" y="3108960"/>
+            <a:ext cx="502920" cy="502920"/>
+          </a:xfrm>
+          <a:prstGeom prst="ellipse">
+            <a:avLst/>
+          </a:prstGeom>
+          <a:solidFill>
+            <a:srgbClr val="33C17A"/>
+          </a:solidFill>
+          <a:ln>
+            <a:noFill/>
+          </a:ln>
+          <a:effectLst/>
+        </p:spPr>
+        <p:style>
+          <a:lnRef idx="1">
+            <a:schemeClr val="accent1"/>
+          </a:lnRef>
+          <a:fillRef idx="3">
+            <a:schemeClr val="accent1"/>
+          </a:fillRef>
+          <a:effectRef idx="2">
+            <a:schemeClr val="accent1"/>
+          </a:effectRef>
+          <a:fontRef idx="minor">
+            <a:schemeClr val="lt1"/>
+          </a:fontRef>
+        </p:style>
+        <p:txBody>
+          <a:bodyPr rtlCol="0" anchor="ctr" lIns="0" rIns="0" tIns="0" bIns="0"/>
+          <a:lstStyle/>
+          <a:p>
+            <a:pPr algn="ctr"/>
+            <a:r>
+              <a:rPr sz="1600" b="1">
+                <a:solidFill>
+                  <a:srgbClr val="202122"/>
+                </a:solidFill>
+                <a:latin typeface="Calibri"/>
+              </a:rPr>
+              <a:t>2</a:t>
+            </a:r>
+          </a:p>
+        </p:txBody>
+      </p:sp>
+      <p:sp>
+        <p:nvSpPr>
+          <p:cNvPr id="9" name="TextBox 8"/>
+          <p:cNvSpPr txBox="1"/>
+          <p:nvPr/>
+        </p:nvSpPr>
+        <p:spPr>
+          <a:xfrm>
+            <a:off x="1371600" y="3063240"/>
+            <a:ext cx="10271455" cy="1188720"/>
+          </a:xfrm>
+          <a:prstGeom prst="rect">
+            <a:avLst/>
+          </a:prstGeom>
+          <a:noFill/>
+        </p:spPr>
+        <p:txBody>
+          <a:bodyPr wrap="square" anchor="t" lIns="0" rIns="0" tIns="0" bIns="0"/>
+          <a:lstStyle/>
+          <a:p>
+            <a:pPr algn="l"/>
+            <a:r>
+              <a:rPr sz="2400" b="0" i="0">
+                <a:solidFill>
+                  <a:srgbClr val="202122"/>
+                </a:solidFill>
+                <a:latin typeface="Calibri"/>
+              </a:rPr>
+              <a:t>What is high availability?</a:t>
+            </a:r>
+          </a:p>
+        </p:txBody>
+      </p:sp>
+      <p:sp>
+        <p:nvSpPr>
+          <p:cNvPr id="10" name="Oval 9"/>
+          <p:cNvSpPr/>
+          <p:nvPr/>
+        </p:nvSpPr>
+        <p:spPr>
+          <a:xfrm>
+            <a:off x="548640" y="4526280"/>
+            <a:ext cx="502920" cy="502920"/>
+          </a:xfrm>
+          <a:prstGeom prst="ellipse">
+            <a:avLst/>
+          </a:prstGeom>
+          <a:solidFill>
+            <a:srgbClr val="33C17A"/>
+          </a:solidFill>
+          <a:ln>
+            <a:noFill/>
+          </a:ln>
+          <a:effectLst/>
+        </p:spPr>
+        <p:style>
+          <a:lnRef idx="1">
+            <a:schemeClr val="accent1"/>
+          </a:lnRef>
+          <a:fillRef idx="3">
+            <a:schemeClr val="accent1"/>
+          </a:fillRef>
+          <a:effectRef idx="2">
+            <a:schemeClr val="accent1"/>
+          </a:effectRef>
+          <a:fontRef idx="minor">
+            <a:schemeClr val="lt1"/>
+          </a:fontRef>
+        </p:style>
+        <p:txBody>
+          <a:bodyPr rtlCol="0" anchor="ctr" lIns="0" rIns="0" tIns="0" bIns="0"/>
+          <a:lstStyle/>
+          <a:p>
+            <a:pPr algn="ctr"/>
+            <a:r>
+              <a:rPr sz="1600" b="1">
+                <a:solidFill>
+                  <a:srgbClr val="202122"/>
+                </a:solidFill>
+                <a:latin typeface="Calibri"/>
+              </a:rPr>
+              <a:t>3</a:t>
+            </a:r>
+          </a:p>
+        </p:txBody>
+      </p:sp>
+      <p:sp>
+        <p:nvSpPr>
+          <p:cNvPr id="11" name="TextBox 10"/>
+          <p:cNvSpPr txBox="1"/>
+          <p:nvPr/>
+        </p:nvSpPr>
+        <p:spPr>
+          <a:xfrm>
+            <a:off x="1371600" y="4480560"/>
+            <a:ext cx="10271455" cy="1188720"/>
+          </a:xfrm>
+          <a:prstGeom prst="rect">
+            <a:avLst/>
+          </a:prstGeom>
+          <a:noFill/>
+        </p:spPr>
+        <p:txBody>
+          <a:bodyPr wrap="square" anchor="t" lIns="0" rIns="0" tIns="0" bIns="0"/>
+          <a:lstStyle/>
+          <a:p>
+            <a:pPr algn="l"/>
+            <a:r>
+              <a:rPr sz="2400" b="0" i="0">
+                <a:solidFill>
+                  <a:srgbClr val="202122"/>
+                </a:solidFill>
+                <a:latin typeface="Calibri"/>
+              </a:rPr>
+              <a:t>Why use QoS?</a:t>
+            </a:r>
+          </a:p>
+        </p:txBody>
+      </p:sp>
+      <p:sp>
+        <p:nvSpPr>
+          <p:cNvPr id="12" name="TextBox 11"/>
+          <p:cNvSpPr txBox="1"/>
+          <p:nvPr/>
+        </p:nvSpPr>
+        <p:spPr>
+          <a:xfrm>
+            <a:off x="548640" y="5852160"/>
+            <a:ext cx="11094415" cy="365760"/>
+          </a:xfrm>
+          <a:prstGeom prst="rect">
+            <a:avLst/>
+          </a:prstGeom>
+          <a:noFill/>
+        </p:spPr>
+        <p:txBody>
+          <a:bodyPr wrap="square" anchor="t" lIns="0" rIns="0" tIns="0" bIns="0"/>
+          <a:lstStyle/>
+          <a:p>
+            <a:pPr algn="l"/>
+            <a:r>
+              <a:rPr sz="1300" b="0" i="1">
+                <a:solidFill>
+                  <a:srgbClr val="54595D"/>
+                </a:solidFill>
+                <a:latin typeface="Calibri"/>
+              </a:rPr>
+              <a:t>Answer on mini whiteboards or in your book. Answers are in the speaker notes.</a:t>
+            </a:r>
+          </a:p>
+        </p:txBody>
+      </p:sp>
+    </p:spTree>
+  </p:cSld>
+  <p:clrMapOvr>
+    <a:masterClrMapping/>
+  </p:clrMapOvr>
+</p:sld>
+</file>
+
+<file path=ppt/slides/slide6.xml><?xml version="1.0" encoding="utf-8"?>
+<p:sld xmlns:a="http://schemas.openxmlformats.org/drawingml/2006/main" xmlns:p="http://schemas.openxmlformats.org/presentationml/2006/main" xmlns:r="http://schemas.openxmlformats.org/officeDocument/2006/relationships">
+  <p:cSld>
+    <p:bg>
+      <p:bgPr>
+        <a:solidFill>
+          <a:srgbClr val="FFFFFF"/>
+        </a:solidFill>
+        <a:effectLst/>
+      </p:bgPr>
+    </p:bg>
+    <p:spTree>
+      <p:nvGrpSpPr>
+        <p:cNvPr id="1" name=""/>
+        <p:cNvGrpSpPr/>
+        <p:nvPr/>
+      </p:nvGrpSpPr>
+      <p:grpSpPr/>
+      <p:sp>
+        <p:nvSpPr>
+          <p:cNvPr id="2" name="TextBox 1"/>
+          <p:cNvSpPr txBox="1"/>
+          <p:nvPr/>
+        </p:nvSpPr>
+        <p:spPr>
+          <a:xfrm>
+            <a:off x="548640" y="320040"/>
+            <a:ext cx="11094415" cy="274320"/>
+          </a:xfrm>
+          <a:prstGeom prst="rect">
+            <a:avLst/>
+          </a:prstGeom>
+          <a:noFill/>
+        </p:spPr>
+        <p:txBody>
+          <a:bodyPr wrap="square" anchor="t" lIns="0" rIns="0" tIns="0" bIns="0"/>
+          <a:lstStyle/>
+          <a:p>
+            <a:pPr algn="l"/>
+            <a:r>
+              <a:rPr sz="1100" b="1" i="0">
+                <a:solidFill>
+                  <a:srgbClr val="54595D"/>
+                </a:solidFill>
+                <a:latin typeface="Calibri"/>
+              </a:rPr>
+              <a:t>DIGITAL INFRASTRUCTURE  ·  Digital Infrastructure Content Area 2</a:t>
+            </a:r>
+          </a:p>
+        </p:txBody>
+      </p:sp>
+      <p:sp>
+        <p:nvSpPr>
+          <p:cNvPr id="3" name="TextBox 2"/>
+          <p:cNvSpPr txBox="1"/>
+          <p:nvPr/>
+        </p:nvSpPr>
+        <p:spPr>
+          <a:xfrm>
+            <a:off x="548640" y="566928"/>
+            <a:ext cx="11094415" cy="822960"/>
+          </a:xfrm>
+          <a:prstGeom prst="rect">
+            <a:avLst/>
+          </a:prstGeom>
+          <a:noFill/>
+        </p:spPr>
+        <p:txBody>
+          <a:bodyPr wrap="square" anchor="ctr" lIns="0" rIns="0" tIns="0" bIns="0"/>
+          <a:lstStyle/>
+          <a:p>
+            <a:pPr algn="l"/>
+            <a:r>
+              <a:rPr sz="3200" b="1" i="0">
+                <a:solidFill>
+                  <a:srgbClr val="03306E"/>
+                </a:solidFill>
+                <a:latin typeface="Cambria"/>
+              </a:rPr>
+              <a:t>Number systems for addressing</a:t>
+            </a:r>
+          </a:p>
+        </p:txBody>
+      </p:sp>
+      <p:sp>
+        <p:nvSpPr>
+          <p:cNvPr id="4" name="TextBox 3"/>
+          <p:cNvSpPr txBox="1"/>
+          <p:nvPr/>
+        </p:nvSpPr>
+        <p:spPr>
+          <a:xfrm>
+            <a:off x="548640" y="6446520"/>
+            <a:ext cx="8229600" cy="274320"/>
+          </a:xfrm>
+          <a:prstGeom prst="rect">
+            <a:avLst/>
+          </a:prstGeom>
+          <a:noFill/>
+        </p:spPr>
+        <p:txBody>
+          <a:bodyPr wrap="square" anchor="t" lIns="0" rIns="0" tIns="0" bIns="0"/>
+          <a:lstStyle/>
+          <a:p>
+            <a:pPr algn="l"/>
+            <a:r>
+              <a:rPr sz="1000" b="0" i="0">
+                <a:solidFill>
+                  <a:srgbClr val="54595D"/>
+                </a:solidFill>
+                <a:latin typeface="Calibri"/>
+              </a:rPr>
+              <a:t>Digital Support and Security T Level  ·  Network Design, Addressing and Transmission</a:t>
+            </a:r>
+          </a:p>
+        </p:txBody>
+      </p:sp>
+      <p:sp>
+        <p:nvSpPr>
+          <p:cNvPr id="5" name="TextBox 4"/>
+          <p:cNvSpPr txBox="1"/>
+          <p:nvPr/>
+        </p:nvSpPr>
+        <p:spPr>
+          <a:xfrm>
+            <a:off x="10728655" y="6446520"/>
+            <a:ext cx="914400" cy="274320"/>
+          </a:xfrm>
+          <a:prstGeom prst="rect">
+            <a:avLst/>
+          </a:prstGeom>
+          <a:noFill/>
+        </p:spPr>
+        <p:txBody>
+          <a:bodyPr wrap="square" anchor="t" lIns="0" rIns="0" tIns="0" bIns="0"/>
+          <a:lstStyle/>
+          <a:p>
+            <a:pPr algn="r"/>
+            <a:r>
+              <a:rPr sz="1000" b="0" i="0">
+                <a:solidFill>
+                  <a:srgbClr val="54595D"/>
+                </a:solidFill>
+                <a:latin typeface="Calibri"/>
+              </a:rPr>
+              <a:t>6</a:t>
             </a:r>
           </a:p>
         </p:txBody>
@@ -6733,1333 +11392,6 @@
 </p:sld>
 </file>
 
-<file path=ppt/slides/slide5.xml><?xml version="1.0" encoding="utf-8"?>
-<p:sld xmlns:a="http://schemas.openxmlformats.org/drawingml/2006/main" xmlns:p="http://schemas.openxmlformats.org/presentationml/2006/main" xmlns:r="http://schemas.openxmlformats.org/officeDocument/2006/relationships">
-  <p:cSld>
-    <p:bg>
-      <p:bgPr>
-        <a:solidFill>
-          <a:srgbClr val="FFFFFF"/>
-        </a:solidFill>
-        <a:effectLst/>
-      </p:bgPr>
-    </p:bg>
-    <p:spTree>
-      <p:nvGrpSpPr>
-        <p:cNvPr id="1" name=""/>
-        <p:cNvGrpSpPr/>
-        <p:nvPr/>
-      </p:nvGrpSpPr>
-      <p:grpSpPr/>
-      <p:sp>
-        <p:nvSpPr>
-          <p:cNvPr id="2" name="TextBox 1"/>
-          <p:cNvSpPr txBox="1"/>
-          <p:nvPr/>
-        </p:nvSpPr>
-        <p:spPr>
-          <a:xfrm>
-            <a:off x="548640" y="320040"/>
-            <a:ext cx="11094415" cy="274320"/>
-          </a:xfrm>
-          <a:prstGeom prst="rect">
-            <a:avLst/>
-          </a:prstGeom>
-          <a:noFill/>
-        </p:spPr>
-        <p:txBody>
-          <a:bodyPr wrap="square" anchor="t" lIns="0" rIns="0" tIns="0" bIns="0"/>
-          <a:lstStyle/>
-          <a:p>
-            <a:pPr algn="l"/>
-            <a:r>
-              <a:rPr sz="1100" b="1" i="0">
-                <a:solidFill>
-                  <a:srgbClr val="54595D"/>
-                </a:solidFill>
-                <a:latin typeface="Calibri"/>
-              </a:rPr>
-              <a:t>DIGITAL INFRASTRUCTURE  ·  Digital Infrastructure Content Area 2</a:t>
-            </a:r>
-          </a:p>
-        </p:txBody>
-      </p:sp>
-      <p:sp>
-        <p:nvSpPr>
-          <p:cNvPr id="3" name="TextBox 2"/>
-          <p:cNvSpPr txBox="1"/>
-          <p:nvPr/>
-        </p:nvSpPr>
-        <p:spPr>
-          <a:xfrm>
-            <a:off x="548640" y="566928"/>
-            <a:ext cx="11094415" cy="822960"/>
-          </a:xfrm>
-          <a:prstGeom prst="rect">
-            <a:avLst/>
-          </a:prstGeom>
-          <a:noFill/>
-        </p:spPr>
-        <p:txBody>
-          <a:bodyPr wrap="square" anchor="ctr" lIns="0" rIns="0" tIns="0" bIns="0"/>
-          <a:lstStyle/>
-          <a:p>
-            <a:pPr algn="l"/>
-            <a:r>
-              <a:rPr sz="3200" b="1" i="0">
-                <a:solidFill>
-                  <a:srgbClr val="03306E"/>
-                </a:solidFill>
-                <a:latin typeface="Cambria"/>
-              </a:rPr>
-              <a:t>Transmission media</a:t>
-            </a:r>
-          </a:p>
-        </p:txBody>
-      </p:sp>
-      <p:sp>
-        <p:nvSpPr>
-          <p:cNvPr id="4" name="TextBox 3"/>
-          <p:cNvSpPr txBox="1"/>
-          <p:nvPr/>
-        </p:nvSpPr>
-        <p:spPr>
-          <a:xfrm>
-            <a:off x="548640" y="6446520"/>
-            <a:ext cx="8229600" cy="274320"/>
-          </a:xfrm>
-          <a:prstGeom prst="rect">
-            <a:avLst/>
-          </a:prstGeom>
-          <a:noFill/>
-        </p:spPr>
-        <p:txBody>
-          <a:bodyPr wrap="square" anchor="t" lIns="0" rIns="0" tIns="0" bIns="0"/>
-          <a:lstStyle/>
-          <a:p>
-            <a:pPr algn="l"/>
-            <a:r>
-              <a:rPr sz="1000" b="0" i="0">
-                <a:solidFill>
-                  <a:srgbClr val="54595D"/>
-                </a:solidFill>
-                <a:latin typeface="Calibri"/>
-              </a:rPr>
-              <a:t>Digital Support and Security T Level  ·  Network Design, Addressing and Transmission</a:t>
-            </a:r>
-          </a:p>
-        </p:txBody>
-      </p:sp>
-      <p:sp>
-        <p:nvSpPr>
-          <p:cNvPr id="5" name="TextBox 4"/>
-          <p:cNvSpPr txBox="1"/>
-          <p:nvPr/>
-        </p:nvSpPr>
-        <p:spPr>
-          <a:xfrm>
-            <a:off x="10728655" y="6446520"/>
-            <a:ext cx="914400" cy="274320"/>
-          </a:xfrm>
-          <a:prstGeom prst="rect">
-            <a:avLst/>
-          </a:prstGeom>
-          <a:noFill/>
-        </p:spPr>
-        <p:txBody>
-          <a:bodyPr wrap="square" anchor="t" lIns="0" rIns="0" tIns="0" bIns="0"/>
-          <a:lstStyle/>
-          <a:p>
-            <a:pPr algn="r"/>
-            <a:r>
-              <a:rPr sz="1000" b="0" i="0">
-                <a:solidFill>
-                  <a:srgbClr val="54595D"/>
-                </a:solidFill>
-                <a:latin typeface="Calibri"/>
-              </a:rPr>
-              <a:t>5</a:t>
-            </a:r>
-          </a:p>
-        </p:txBody>
-      </p:sp>
-      <p:sp>
-        <p:nvSpPr>
-          <p:cNvPr id="6" name="Rounded Rectangle 5"/>
-          <p:cNvSpPr/>
-          <p:nvPr/>
-        </p:nvSpPr>
-        <p:spPr>
-          <a:xfrm>
-            <a:off x="548640" y="1600200"/>
-            <a:ext cx="5364327" cy="640080"/>
-          </a:xfrm>
-          <a:prstGeom prst="roundRect">
-            <a:avLst>
-              <a:gd name="adj" fmla="val 15000"/>
-            </a:avLst>
-          </a:prstGeom>
-          <a:solidFill>
-            <a:srgbClr val="03306E"/>
-          </a:solidFill>
-          <a:ln>
-            <a:noFill/>
-          </a:ln>
-          <a:effectLst/>
-        </p:spPr>
-        <p:style>
-          <a:lnRef idx="1">
-            <a:schemeClr val="accent1"/>
-          </a:lnRef>
-          <a:fillRef idx="3">
-            <a:schemeClr val="accent1"/>
-          </a:fillRef>
-          <a:effectRef idx="2">
-            <a:schemeClr val="accent1"/>
-          </a:effectRef>
-          <a:fontRef idx="minor">
-            <a:schemeClr val="lt1"/>
-          </a:fontRef>
-        </p:style>
-        <p:txBody>
-          <a:bodyPr rtlCol="0" anchor="ctr"/>
-          <a:lstStyle/>
-          <a:p/>
-        </p:txBody>
-      </p:sp>
-      <p:sp>
-        <p:nvSpPr>
-          <p:cNvPr id="7" name="TextBox 6"/>
-          <p:cNvSpPr txBox="1"/>
-          <p:nvPr/>
-        </p:nvSpPr>
-        <p:spPr>
-          <a:xfrm>
-            <a:off x="777240" y="1600200"/>
-            <a:ext cx="4907127" cy="640080"/>
-          </a:xfrm>
-          <a:prstGeom prst="rect">
-            <a:avLst/>
-          </a:prstGeom>
-          <a:noFill/>
-        </p:spPr>
-        <p:txBody>
-          <a:bodyPr wrap="square" anchor="ctr" lIns="0" rIns="0" tIns="0" bIns="0"/>
-          <a:lstStyle/>
-          <a:p>
-            <a:pPr algn="l"/>
-            <a:r>
-              <a:rPr sz="2000" b="1" i="0">
-                <a:solidFill>
-                  <a:srgbClr val="FFFFFF"/>
-                </a:solidFill>
-                <a:latin typeface="Calibri"/>
-              </a:rPr>
-              <a:t>Copper and fibre</a:t>
-            </a:r>
-          </a:p>
-        </p:txBody>
-      </p:sp>
-      <p:sp>
-        <p:nvSpPr>
-          <p:cNvPr id="8" name="Rounded Rectangle 7"/>
-          <p:cNvSpPr/>
-          <p:nvPr/>
-        </p:nvSpPr>
-        <p:spPr>
-          <a:xfrm>
-            <a:off x="548640" y="2377440"/>
-            <a:ext cx="5364327" cy="3794760"/>
-          </a:xfrm>
-          <a:prstGeom prst="roundRect">
-            <a:avLst>
-              <a:gd name="adj" fmla="val 4000"/>
-            </a:avLst>
-          </a:prstGeom>
-          <a:solidFill>
-            <a:srgbClr val="EAF3FF"/>
-          </a:solidFill>
-          <a:ln>
-            <a:noFill/>
-          </a:ln>
-          <a:effectLst/>
-        </p:spPr>
-        <p:style>
-          <a:lnRef idx="1">
-            <a:schemeClr val="accent1"/>
-          </a:lnRef>
-          <a:fillRef idx="3">
-            <a:schemeClr val="accent1"/>
-          </a:fillRef>
-          <a:effectRef idx="2">
-            <a:schemeClr val="accent1"/>
-          </a:effectRef>
-          <a:fontRef idx="minor">
-            <a:schemeClr val="lt1"/>
-          </a:fontRef>
-        </p:style>
-        <p:txBody>
-          <a:bodyPr rtlCol="0" anchor="ctr"/>
-          <a:lstStyle/>
-          <a:p/>
-        </p:txBody>
-      </p:sp>
-      <p:sp>
-        <p:nvSpPr>
-          <p:cNvPr id="9" name="TextBox 8"/>
-          <p:cNvSpPr txBox="1"/>
-          <p:nvPr/>
-        </p:nvSpPr>
-        <p:spPr>
-          <a:xfrm>
-            <a:off x="822959" y="2606040"/>
-            <a:ext cx="4815687" cy="3337560"/>
-          </a:xfrm>
-          <a:prstGeom prst="rect">
-            <a:avLst/>
-          </a:prstGeom>
-          <a:noFill/>
-        </p:spPr>
-        <p:txBody>
-          <a:bodyPr wrap="square" lIns="0" rIns="0" tIns="0" bIns="0">
-            <a:spAutoFit/>
-          </a:bodyPr>
-          <a:lstStyle/>
-          <a:p>
-            <a:pPr marL="274320" indent="-274320">
-              <a:spcAft>
-                <a:spcPts val="900"/>
-              </a:spcAft>
-              <a:buClr>
-                <a:srgbClr val="0645AD"/>
-              </a:buClr>
-              <a:buFont typeface="Arial"/>
-              <a:buChar char="•"/>
-            </a:pPr>
-            <a:r>
-              <a:rPr sz="2000" b="0">
-                <a:solidFill>
-                  <a:srgbClr val="202122"/>
-                </a:solidFill>
-                <a:latin typeface="Calibri"/>
-              </a:rPr>
-              <a:t>Copper carries electrical signals</a:t>
-            </a:r>
-          </a:p>
-          <a:p>
-            <a:pPr marL="274320" indent="-274320">
-              <a:spcAft>
-                <a:spcPts val="900"/>
-              </a:spcAft>
-              <a:buClr>
-                <a:srgbClr val="0645AD"/>
-              </a:buClr>
-              <a:buFont typeface="Arial"/>
-              <a:buChar char="•"/>
-            </a:pPr>
-            <a:r>
-              <a:rPr sz="2000" b="0">
-                <a:solidFill>
-                  <a:srgbClr val="202122"/>
-                </a:solidFill>
-                <a:latin typeface="Calibri"/>
-              </a:rPr>
-              <a:t>Fibre carries light</a:t>
-            </a:r>
-          </a:p>
-          <a:p>
-            <a:pPr marL="274320" indent="-274320">
-              <a:spcAft>
-                <a:spcPts val="900"/>
-              </a:spcAft>
-              <a:buClr>
-                <a:srgbClr val="0645AD"/>
-              </a:buClr>
-              <a:buFont typeface="Arial"/>
-              <a:buChar char="•"/>
-            </a:pPr>
-            <a:r>
-              <a:rPr sz="2000" b="1">
-                <a:solidFill>
-                  <a:srgbClr val="202122"/>
-                </a:solidFill>
-                <a:latin typeface="Calibri"/>
-              </a:rPr>
-              <a:t>Risks:</a:t>
-            </a:r>
-            <a:r>
-              <a:rPr sz="2000" b="0">
-                <a:solidFill>
-                  <a:srgbClr val="202122"/>
-                </a:solidFill>
-                <a:latin typeface="Calibri"/>
-              </a:rPr>
-              <a:t> tampering and signal loss</a:t>
-            </a:r>
-          </a:p>
-          <a:p>
-            <a:pPr marL="274320" indent="-274320">
-              <a:spcAft>
-                <a:spcPts val="900"/>
-              </a:spcAft>
-              <a:buClr>
-                <a:srgbClr val="0645AD"/>
-              </a:buClr>
-              <a:buFont typeface="Arial"/>
-              <a:buChar char="•"/>
-            </a:pPr>
-            <a:r>
-              <a:rPr sz="2000" b="0">
-                <a:solidFill>
-                  <a:srgbClr val="202122"/>
-                </a:solidFill>
-                <a:latin typeface="Calibri"/>
-              </a:rPr>
-              <a:t>Separate copper from power cables to avoid EMI, static and crosstalk</a:t>
-            </a:r>
-          </a:p>
-          <a:p>
-            <a:pPr marL="274320" indent="-274320">
-              <a:spcAft>
-                <a:spcPts val="900"/>
-              </a:spcAft>
-              <a:buClr>
-                <a:srgbClr val="0645AD"/>
-              </a:buClr>
-              <a:buFont typeface="Arial"/>
-              <a:buChar char="•"/>
-            </a:pPr>
-            <a:r>
-              <a:rPr sz="2000" b="0">
-                <a:solidFill>
-                  <a:srgbClr val="202122"/>
-                </a:solidFill>
-                <a:latin typeface="Calibri"/>
-              </a:rPr>
-              <a:t>Use shielding or planned parallel runs (BS EN 50174)</a:t>
-            </a:r>
-          </a:p>
-        </p:txBody>
-      </p:sp>
-      <p:sp>
-        <p:nvSpPr>
-          <p:cNvPr id="10" name="Rounded Rectangle 9"/>
-          <p:cNvSpPr/>
-          <p:nvPr/>
-        </p:nvSpPr>
-        <p:spPr>
-          <a:xfrm>
-            <a:off x="6278727" y="1600200"/>
-            <a:ext cx="5364327" cy="640080"/>
-          </a:xfrm>
-          <a:prstGeom prst="roundRect">
-            <a:avLst>
-              <a:gd name="adj" fmla="val 15000"/>
-            </a:avLst>
-          </a:prstGeom>
-          <a:solidFill>
-            <a:srgbClr val="0645AD"/>
-          </a:solidFill>
-          <a:ln>
-            <a:noFill/>
-          </a:ln>
-          <a:effectLst/>
-        </p:spPr>
-        <p:style>
-          <a:lnRef idx="1">
-            <a:schemeClr val="accent1"/>
-          </a:lnRef>
-          <a:fillRef idx="3">
-            <a:schemeClr val="accent1"/>
-          </a:fillRef>
-          <a:effectRef idx="2">
-            <a:schemeClr val="accent1"/>
-          </a:effectRef>
-          <a:fontRef idx="minor">
-            <a:schemeClr val="lt1"/>
-          </a:fontRef>
-        </p:style>
-        <p:txBody>
-          <a:bodyPr rtlCol="0" anchor="ctr"/>
-          <a:lstStyle/>
-          <a:p/>
-        </p:txBody>
-      </p:sp>
-      <p:sp>
-        <p:nvSpPr>
-          <p:cNvPr id="11" name="TextBox 10"/>
-          <p:cNvSpPr txBox="1"/>
-          <p:nvPr/>
-        </p:nvSpPr>
-        <p:spPr>
-          <a:xfrm>
-            <a:off x="6507327" y="1600200"/>
-            <a:ext cx="4907127" cy="640080"/>
-          </a:xfrm>
-          <a:prstGeom prst="rect">
-            <a:avLst/>
-          </a:prstGeom>
-          <a:noFill/>
-        </p:spPr>
-        <p:txBody>
-          <a:bodyPr wrap="square" anchor="ctr" lIns="0" rIns="0" tIns="0" bIns="0"/>
-          <a:lstStyle/>
-          <a:p>
-            <a:pPr algn="l"/>
-            <a:r>
-              <a:rPr sz="2000" b="1" i="0">
-                <a:solidFill>
-                  <a:srgbClr val="FFFFFF"/>
-                </a:solidFill>
-                <a:latin typeface="Calibri"/>
-              </a:rPr>
-              <a:t>Wireless</a:t>
-            </a:r>
-          </a:p>
-        </p:txBody>
-      </p:sp>
-      <p:sp>
-        <p:nvSpPr>
-          <p:cNvPr id="12" name="Rounded Rectangle 11"/>
-          <p:cNvSpPr/>
-          <p:nvPr/>
-        </p:nvSpPr>
-        <p:spPr>
-          <a:xfrm>
-            <a:off x="6278727" y="2377440"/>
-            <a:ext cx="5364327" cy="3794760"/>
-          </a:xfrm>
-          <a:prstGeom prst="roundRect">
-            <a:avLst>
-              <a:gd name="adj" fmla="val 4000"/>
-            </a:avLst>
-          </a:prstGeom>
-          <a:solidFill>
-            <a:srgbClr val="EAF3FF"/>
-          </a:solidFill>
-          <a:ln>
-            <a:noFill/>
-          </a:ln>
-          <a:effectLst/>
-        </p:spPr>
-        <p:style>
-          <a:lnRef idx="1">
-            <a:schemeClr val="accent1"/>
-          </a:lnRef>
-          <a:fillRef idx="3">
-            <a:schemeClr val="accent1"/>
-          </a:fillRef>
-          <a:effectRef idx="2">
-            <a:schemeClr val="accent1"/>
-          </a:effectRef>
-          <a:fontRef idx="minor">
-            <a:schemeClr val="lt1"/>
-          </a:fontRef>
-        </p:style>
-        <p:txBody>
-          <a:bodyPr rtlCol="0" anchor="ctr"/>
-          <a:lstStyle/>
-          <a:p/>
-        </p:txBody>
-      </p:sp>
-      <p:sp>
-        <p:nvSpPr>
-          <p:cNvPr id="13" name="TextBox 12"/>
-          <p:cNvSpPr txBox="1"/>
-          <p:nvPr/>
-        </p:nvSpPr>
-        <p:spPr>
-          <a:xfrm>
-            <a:off x="6553047" y="2606040"/>
-            <a:ext cx="4815687" cy="3337560"/>
-          </a:xfrm>
-          <a:prstGeom prst="rect">
-            <a:avLst/>
-          </a:prstGeom>
-          <a:noFill/>
-        </p:spPr>
-        <p:txBody>
-          <a:bodyPr wrap="square" lIns="0" rIns="0" tIns="0" bIns="0">
-            <a:spAutoFit/>
-          </a:bodyPr>
-          <a:lstStyle/>
-          <a:p>
-            <a:pPr marL="274320" indent="-274320">
-              <a:spcAft>
-                <a:spcPts val="990"/>
-              </a:spcAft>
-              <a:buClr>
-                <a:srgbClr val="0645AD"/>
-              </a:buClr>
-              <a:buFont typeface="Arial"/>
-              <a:buChar char="•"/>
-            </a:pPr>
-            <a:r>
-              <a:rPr sz="2200" b="0">
-                <a:solidFill>
-                  <a:srgbClr val="202122"/>
-                </a:solidFill>
-                <a:latin typeface="Calibri"/>
-              </a:rPr>
-              <a:t>802.11b, g and n</a:t>
-            </a:r>
-          </a:p>
-          <a:p>
-            <a:pPr marL="274320" indent="-274320">
-              <a:spcAft>
-                <a:spcPts val="990"/>
-              </a:spcAft>
-              <a:buClr>
-                <a:srgbClr val="0645AD"/>
-              </a:buClr>
-              <a:buFont typeface="Arial"/>
-              <a:buChar char="•"/>
-            </a:pPr>
-            <a:r>
-              <a:rPr sz="2200" b="0">
-                <a:solidFill>
-                  <a:srgbClr val="202122"/>
-                </a:solidFill>
-                <a:latin typeface="Calibri"/>
-              </a:rPr>
-              <a:t>Wi-Fi 5 (802.11ac)</a:t>
-            </a:r>
-          </a:p>
-          <a:p>
-            <a:pPr marL="274320" indent="-274320">
-              <a:spcAft>
-                <a:spcPts val="990"/>
-              </a:spcAft>
-              <a:buClr>
-                <a:srgbClr val="0645AD"/>
-              </a:buClr>
-              <a:buFont typeface="Arial"/>
-              <a:buChar char="•"/>
-            </a:pPr>
-            <a:r>
-              <a:rPr sz="2200" b="0">
-                <a:solidFill>
-                  <a:srgbClr val="202122"/>
-                </a:solidFill>
-                <a:latin typeface="Calibri"/>
-              </a:rPr>
-              <a:t>Wi-Fi 6 and 6E (802.11ax)</a:t>
-            </a:r>
-          </a:p>
-          <a:p>
-            <a:pPr marL="274320" indent="-274320">
-              <a:spcAft>
-                <a:spcPts val="990"/>
-              </a:spcAft>
-              <a:buClr>
-                <a:srgbClr val="0645AD"/>
-              </a:buClr>
-              <a:buFont typeface="Arial"/>
-              <a:buChar char="•"/>
-            </a:pPr>
-            <a:r>
-              <a:rPr sz="2200" b="0">
-                <a:solidFill>
-                  <a:srgbClr val="202122"/>
-                </a:solidFill>
-                <a:latin typeface="Calibri"/>
-              </a:rPr>
-              <a:t>Wi-Fi 7 (802.11be)</a:t>
-            </a:r>
-          </a:p>
-          <a:p>
-            <a:pPr marL="274320" indent="-274320">
-              <a:spcAft>
-                <a:spcPts val="990"/>
-              </a:spcAft>
-              <a:buClr>
-                <a:srgbClr val="0645AD"/>
-              </a:buClr>
-              <a:buFont typeface="Arial"/>
-              <a:buChar char="•"/>
-            </a:pPr>
-            <a:r>
-              <a:rPr sz="2200" b="0">
-                <a:solidFill>
-                  <a:srgbClr val="202122"/>
-                </a:solidFill>
-                <a:latin typeface="Calibri"/>
-              </a:rPr>
-              <a:t>Each generation raises speed and capacity</a:t>
-            </a:r>
-          </a:p>
-        </p:txBody>
-      </p:sp>
-    </p:spTree>
-  </p:cSld>
-  <p:clrMapOvr>
-    <a:masterClrMapping/>
-  </p:clrMapOvr>
-</p:sld>
-</file>
-
-<file path=ppt/slides/slide6.xml><?xml version="1.0" encoding="utf-8"?>
-<p:sld xmlns:a="http://schemas.openxmlformats.org/drawingml/2006/main" xmlns:p="http://schemas.openxmlformats.org/presentationml/2006/main" xmlns:r="http://schemas.openxmlformats.org/officeDocument/2006/relationships">
-  <p:cSld>
-    <p:bg>
-      <p:bgPr>
-        <a:solidFill>
-          <a:srgbClr val="FFFFFF"/>
-        </a:solidFill>
-        <a:effectLst/>
-      </p:bgPr>
-    </p:bg>
-    <p:spTree>
-      <p:nvGrpSpPr>
-        <p:cNvPr id="1" name=""/>
-        <p:cNvGrpSpPr/>
-        <p:nvPr/>
-      </p:nvGrpSpPr>
-      <p:grpSpPr/>
-      <p:sp>
-        <p:nvSpPr>
-          <p:cNvPr id="2" name="TextBox 1"/>
-          <p:cNvSpPr txBox="1"/>
-          <p:nvPr/>
-        </p:nvSpPr>
-        <p:spPr>
-          <a:xfrm>
-            <a:off x="548640" y="320040"/>
-            <a:ext cx="11094415" cy="274320"/>
-          </a:xfrm>
-          <a:prstGeom prst="rect">
-            <a:avLst/>
-          </a:prstGeom>
-          <a:noFill/>
-        </p:spPr>
-        <p:txBody>
-          <a:bodyPr wrap="square" anchor="t" lIns="0" rIns="0" tIns="0" bIns="0"/>
-          <a:lstStyle/>
-          <a:p>
-            <a:pPr algn="l"/>
-            <a:r>
-              <a:rPr sz="1100" b="1" i="0">
-                <a:solidFill>
-                  <a:srgbClr val="54595D"/>
-                </a:solidFill>
-                <a:latin typeface="Calibri"/>
-              </a:rPr>
-              <a:t>DIGITAL INFRASTRUCTURE  ·  Digital Infrastructure Content Area 2</a:t>
-            </a:r>
-          </a:p>
-        </p:txBody>
-      </p:sp>
-      <p:sp>
-        <p:nvSpPr>
-          <p:cNvPr id="3" name="TextBox 2"/>
-          <p:cNvSpPr txBox="1"/>
-          <p:nvPr/>
-        </p:nvSpPr>
-        <p:spPr>
-          <a:xfrm>
-            <a:off x="548640" y="566928"/>
-            <a:ext cx="11094415" cy="822960"/>
-          </a:xfrm>
-          <a:prstGeom prst="rect">
-            <a:avLst/>
-          </a:prstGeom>
-          <a:noFill/>
-        </p:spPr>
-        <p:txBody>
-          <a:bodyPr wrap="square" anchor="ctr" lIns="0" rIns="0" tIns="0" bIns="0"/>
-          <a:lstStyle/>
-          <a:p>
-            <a:pPr algn="l"/>
-            <a:r>
-              <a:rPr sz="3200" b="1" i="0">
-                <a:solidFill>
-                  <a:srgbClr val="03306E"/>
-                </a:solidFill>
-                <a:latin typeface="Cambria"/>
-              </a:rPr>
-              <a:t>IPv4 and IPv6</a:t>
-            </a:r>
-          </a:p>
-        </p:txBody>
-      </p:sp>
-      <p:sp>
-        <p:nvSpPr>
-          <p:cNvPr id="4" name="TextBox 3"/>
-          <p:cNvSpPr txBox="1"/>
-          <p:nvPr/>
-        </p:nvSpPr>
-        <p:spPr>
-          <a:xfrm>
-            <a:off x="548640" y="6446520"/>
-            <a:ext cx="8229600" cy="274320"/>
-          </a:xfrm>
-          <a:prstGeom prst="rect">
-            <a:avLst/>
-          </a:prstGeom>
-          <a:noFill/>
-        </p:spPr>
-        <p:txBody>
-          <a:bodyPr wrap="square" anchor="t" lIns="0" rIns="0" tIns="0" bIns="0"/>
-          <a:lstStyle/>
-          <a:p>
-            <a:pPr algn="l"/>
-            <a:r>
-              <a:rPr sz="1000" b="0" i="0">
-                <a:solidFill>
-                  <a:srgbClr val="54595D"/>
-                </a:solidFill>
-                <a:latin typeface="Calibri"/>
-              </a:rPr>
-              <a:t>Digital Support and Security T Level  ·  Network Design, Addressing and Transmission</a:t>
-            </a:r>
-          </a:p>
-        </p:txBody>
-      </p:sp>
-      <p:sp>
-        <p:nvSpPr>
-          <p:cNvPr id="5" name="TextBox 4"/>
-          <p:cNvSpPr txBox="1"/>
-          <p:nvPr/>
-        </p:nvSpPr>
-        <p:spPr>
-          <a:xfrm>
-            <a:off x="10728655" y="6446520"/>
-            <a:ext cx="914400" cy="274320"/>
-          </a:xfrm>
-          <a:prstGeom prst="rect">
-            <a:avLst/>
-          </a:prstGeom>
-          <a:noFill/>
-        </p:spPr>
-        <p:txBody>
-          <a:bodyPr wrap="square" anchor="t" lIns="0" rIns="0" tIns="0" bIns="0"/>
-          <a:lstStyle/>
-          <a:p>
-            <a:pPr algn="r"/>
-            <a:r>
-              <a:rPr sz="1000" b="0" i="0">
-                <a:solidFill>
-                  <a:srgbClr val="54595D"/>
-                </a:solidFill>
-                <a:latin typeface="Calibri"/>
-              </a:rPr>
-              <a:t>6</a:t>
-            </a:r>
-          </a:p>
-        </p:txBody>
-      </p:sp>
-      <p:sp>
-        <p:nvSpPr>
-          <p:cNvPr id="6" name="Rounded Rectangle 5"/>
-          <p:cNvSpPr/>
-          <p:nvPr/>
-        </p:nvSpPr>
-        <p:spPr>
-          <a:xfrm>
-            <a:off x="548640" y="1600200"/>
-            <a:ext cx="5364327" cy="640080"/>
-          </a:xfrm>
-          <a:prstGeom prst="roundRect">
-            <a:avLst>
-              <a:gd name="adj" fmla="val 15000"/>
-            </a:avLst>
-          </a:prstGeom>
-          <a:solidFill>
-            <a:srgbClr val="03306E"/>
-          </a:solidFill>
-          <a:ln>
-            <a:noFill/>
-          </a:ln>
-          <a:effectLst/>
-        </p:spPr>
-        <p:style>
-          <a:lnRef idx="1">
-            <a:schemeClr val="accent1"/>
-          </a:lnRef>
-          <a:fillRef idx="3">
-            <a:schemeClr val="accent1"/>
-          </a:fillRef>
-          <a:effectRef idx="2">
-            <a:schemeClr val="accent1"/>
-          </a:effectRef>
-          <a:fontRef idx="minor">
-            <a:schemeClr val="lt1"/>
-          </a:fontRef>
-        </p:style>
-        <p:txBody>
-          <a:bodyPr rtlCol="0" anchor="ctr"/>
-          <a:lstStyle/>
-          <a:p/>
-        </p:txBody>
-      </p:sp>
-      <p:sp>
-        <p:nvSpPr>
-          <p:cNvPr id="7" name="TextBox 6"/>
-          <p:cNvSpPr txBox="1"/>
-          <p:nvPr/>
-        </p:nvSpPr>
-        <p:spPr>
-          <a:xfrm>
-            <a:off x="777240" y="1600200"/>
-            <a:ext cx="4907127" cy="640080"/>
-          </a:xfrm>
-          <a:prstGeom prst="rect">
-            <a:avLst/>
-          </a:prstGeom>
-          <a:noFill/>
-        </p:spPr>
-        <p:txBody>
-          <a:bodyPr wrap="square" anchor="ctr" lIns="0" rIns="0" tIns="0" bIns="0"/>
-          <a:lstStyle/>
-          <a:p>
-            <a:pPr algn="l"/>
-            <a:r>
-              <a:rPr sz="2000" b="1" i="0">
-                <a:solidFill>
-                  <a:srgbClr val="FFFFFF"/>
-                </a:solidFill>
-                <a:latin typeface="Calibri"/>
-              </a:rPr>
-              <a:t>IPv4</a:t>
-            </a:r>
-          </a:p>
-        </p:txBody>
-      </p:sp>
-      <p:sp>
-        <p:nvSpPr>
-          <p:cNvPr id="8" name="Rounded Rectangle 7"/>
-          <p:cNvSpPr/>
-          <p:nvPr/>
-        </p:nvSpPr>
-        <p:spPr>
-          <a:xfrm>
-            <a:off x="548640" y="2377440"/>
-            <a:ext cx="5364327" cy="3794760"/>
-          </a:xfrm>
-          <a:prstGeom prst="roundRect">
-            <a:avLst>
-              <a:gd name="adj" fmla="val 4000"/>
-            </a:avLst>
-          </a:prstGeom>
-          <a:solidFill>
-            <a:srgbClr val="EAF3FF"/>
-          </a:solidFill>
-          <a:ln>
-            <a:noFill/>
-          </a:ln>
-          <a:effectLst/>
-        </p:spPr>
-        <p:style>
-          <a:lnRef idx="1">
-            <a:schemeClr val="accent1"/>
-          </a:lnRef>
-          <a:fillRef idx="3">
-            <a:schemeClr val="accent1"/>
-          </a:fillRef>
-          <a:effectRef idx="2">
-            <a:schemeClr val="accent1"/>
-          </a:effectRef>
-          <a:fontRef idx="minor">
-            <a:schemeClr val="lt1"/>
-          </a:fontRef>
-        </p:style>
-        <p:txBody>
-          <a:bodyPr rtlCol="0" anchor="ctr"/>
-          <a:lstStyle/>
-          <a:p/>
-        </p:txBody>
-      </p:sp>
-      <p:sp>
-        <p:nvSpPr>
-          <p:cNvPr id="9" name="TextBox 8"/>
-          <p:cNvSpPr txBox="1"/>
-          <p:nvPr/>
-        </p:nvSpPr>
-        <p:spPr>
-          <a:xfrm>
-            <a:off x="822959" y="2606040"/>
-            <a:ext cx="4815687" cy="3337560"/>
-          </a:xfrm>
-          <a:prstGeom prst="rect">
-            <a:avLst/>
-          </a:prstGeom>
-          <a:noFill/>
-        </p:spPr>
-        <p:txBody>
-          <a:bodyPr wrap="square" lIns="0" rIns="0" tIns="0" bIns="0">
-            <a:spAutoFit/>
-          </a:bodyPr>
-          <a:lstStyle/>
-          <a:p>
-            <a:pPr marL="274320" indent="-274320">
-              <a:spcAft>
-                <a:spcPts val="990"/>
-              </a:spcAft>
-              <a:buClr>
-                <a:srgbClr val="0645AD"/>
-              </a:buClr>
-              <a:buFont typeface="Arial"/>
-              <a:buChar char="•"/>
-            </a:pPr>
-            <a:r>
-              <a:rPr sz="2200" b="0">
-                <a:solidFill>
-                  <a:srgbClr val="202122"/>
-                </a:solidFill>
-                <a:latin typeface="Calibri"/>
-              </a:rPr>
-              <a:t>32-bit address, e.g. 192.168.1.10</a:t>
-            </a:r>
-          </a:p>
-          <a:p>
-            <a:pPr marL="274320" indent="-274320">
-              <a:spcAft>
-                <a:spcPts val="990"/>
-              </a:spcAft>
-              <a:buClr>
-                <a:srgbClr val="0645AD"/>
-              </a:buClr>
-              <a:buFont typeface="Arial"/>
-              <a:buChar char="•"/>
-            </a:pPr>
-            <a:r>
-              <a:rPr sz="2200" b="0">
-                <a:solidFill>
-                  <a:srgbClr val="202122"/>
-                </a:solidFill>
-                <a:latin typeface="Calibri"/>
-              </a:rPr>
-              <a:t>Subnet mask splits network and host, e.g. /24</a:t>
-            </a:r>
-          </a:p>
-          <a:p>
-            <a:pPr marL="274320" indent="-274320">
-              <a:spcAft>
-                <a:spcPts val="990"/>
-              </a:spcAft>
-              <a:buClr>
-                <a:srgbClr val="0645AD"/>
-              </a:buClr>
-              <a:buFont typeface="Arial"/>
-              <a:buChar char="•"/>
-            </a:pPr>
-            <a:r>
-              <a:rPr sz="2200" b="0">
-                <a:solidFill>
-                  <a:srgbClr val="202122"/>
-                </a:solidFill>
-                <a:latin typeface="Calibri"/>
-              </a:rPr>
-              <a:t>Subnetting divides a network into smaller ones</a:t>
-            </a:r>
-          </a:p>
-          <a:p>
-            <a:pPr marL="274320" indent="-274320">
-              <a:spcAft>
-                <a:spcPts val="990"/>
-              </a:spcAft>
-              <a:buClr>
-                <a:srgbClr val="0645AD"/>
-              </a:buClr>
-              <a:buFont typeface="Arial"/>
-              <a:buChar char="•"/>
-            </a:pPr>
-            <a:r>
-              <a:rPr sz="2200" b="0">
-                <a:solidFill>
-                  <a:srgbClr val="202122"/>
-                </a:solidFill>
-                <a:latin typeface="Calibri"/>
-              </a:rPr>
-              <a:t>Private ranges, e.g. 10.0.0.0/8</a:t>
-            </a:r>
-          </a:p>
-        </p:txBody>
-      </p:sp>
-      <p:sp>
-        <p:nvSpPr>
-          <p:cNvPr id="10" name="Rounded Rectangle 9"/>
-          <p:cNvSpPr/>
-          <p:nvPr/>
-        </p:nvSpPr>
-        <p:spPr>
-          <a:xfrm>
-            <a:off x="6278727" y="1600200"/>
-            <a:ext cx="5364327" cy="640080"/>
-          </a:xfrm>
-          <a:prstGeom prst="roundRect">
-            <a:avLst>
-              <a:gd name="adj" fmla="val 15000"/>
-            </a:avLst>
-          </a:prstGeom>
-          <a:solidFill>
-            <a:srgbClr val="0645AD"/>
-          </a:solidFill>
-          <a:ln>
-            <a:noFill/>
-          </a:ln>
-          <a:effectLst/>
-        </p:spPr>
-        <p:style>
-          <a:lnRef idx="1">
-            <a:schemeClr val="accent1"/>
-          </a:lnRef>
-          <a:fillRef idx="3">
-            <a:schemeClr val="accent1"/>
-          </a:fillRef>
-          <a:effectRef idx="2">
-            <a:schemeClr val="accent1"/>
-          </a:effectRef>
-          <a:fontRef idx="minor">
-            <a:schemeClr val="lt1"/>
-          </a:fontRef>
-        </p:style>
-        <p:txBody>
-          <a:bodyPr rtlCol="0" anchor="ctr"/>
-          <a:lstStyle/>
-          <a:p/>
-        </p:txBody>
-      </p:sp>
-      <p:sp>
-        <p:nvSpPr>
-          <p:cNvPr id="11" name="TextBox 10"/>
-          <p:cNvSpPr txBox="1"/>
-          <p:nvPr/>
-        </p:nvSpPr>
-        <p:spPr>
-          <a:xfrm>
-            <a:off x="6507327" y="1600200"/>
-            <a:ext cx="4907127" cy="640080"/>
-          </a:xfrm>
-          <a:prstGeom prst="rect">
-            <a:avLst/>
-          </a:prstGeom>
-          <a:noFill/>
-        </p:spPr>
-        <p:txBody>
-          <a:bodyPr wrap="square" anchor="ctr" lIns="0" rIns="0" tIns="0" bIns="0"/>
-          <a:lstStyle/>
-          <a:p>
-            <a:pPr algn="l"/>
-            <a:r>
-              <a:rPr sz="2000" b="1" i="0">
-                <a:solidFill>
-                  <a:srgbClr val="FFFFFF"/>
-                </a:solidFill>
-                <a:latin typeface="Calibri"/>
-              </a:rPr>
-              <a:t>IPv6</a:t>
-            </a:r>
-          </a:p>
-        </p:txBody>
-      </p:sp>
-      <p:sp>
-        <p:nvSpPr>
-          <p:cNvPr id="12" name="Rounded Rectangle 11"/>
-          <p:cNvSpPr/>
-          <p:nvPr/>
-        </p:nvSpPr>
-        <p:spPr>
-          <a:xfrm>
-            <a:off x="6278727" y="2377440"/>
-            <a:ext cx="5364327" cy="3794760"/>
-          </a:xfrm>
-          <a:prstGeom prst="roundRect">
-            <a:avLst>
-              <a:gd name="adj" fmla="val 4000"/>
-            </a:avLst>
-          </a:prstGeom>
-          <a:solidFill>
-            <a:srgbClr val="EAF3FF"/>
-          </a:solidFill>
-          <a:ln>
-            <a:noFill/>
-          </a:ln>
-          <a:effectLst/>
-        </p:spPr>
-        <p:style>
-          <a:lnRef idx="1">
-            <a:schemeClr val="accent1"/>
-          </a:lnRef>
-          <a:fillRef idx="3">
-            <a:schemeClr val="accent1"/>
-          </a:fillRef>
-          <a:effectRef idx="2">
-            <a:schemeClr val="accent1"/>
-          </a:effectRef>
-          <a:fontRef idx="minor">
-            <a:schemeClr val="lt1"/>
-          </a:fontRef>
-        </p:style>
-        <p:txBody>
-          <a:bodyPr rtlCol="0" anchor="ctr"/>
-          <a:lstStyle/>
-          <a:p/>
-        </p:txBody>
-      </p:sp>
-      <p:sp>
-        <p:nvSpPr>
-          <p:cNvPr id="13" name="TextBox 12"/>
-          <p:cNvSpPr txBox="1"/>
-          <p:nvPr/>
-        </p:nvSpPr>
-        <p:spPr>
-          <a:xfrm>
-            <a:off x="6553047" y="2606040"/>
-            <a:ext cx="4815687" cy="3337560"/>
-          </a:xfrm>
-          <a:prstGeom prst="rect">
-            <a:avLst/>
-          </a:prstGeom>
-          <a:noFill/>
-        </p:spPr>
-        <p:txBody>
-          <a:bodyPr wrap="square" lIns="0" rIns="0" tIns="0" bIns="0">
-            <a:spAutoFit/>
-          </a:bodyPr>
-          <a:lstStyle/>
-          <a:p>
-            <a:pPr marL="274320" indent="-274320">
-              <a:spcAft>
-                <a:spcPts val="990"/>
-              </a:spcAft>
-              <a:buClr>
-                <a:srgbClr val="0645AD"/>
-              </a:buClr>
-              <a:buFont typeface="Arial"/>
-              <a:buChar char="•"/>
-            </a:pPr>
-            <a:r>
-              <a:rPr sz="2200" b="0">
-                <a:solidFill>
-                  <a:srgbClr val="202122"/>
-                </a:solidFill>
-                <a:latin typeface="Calibri"/>
-              </a:rPr>
-              <a:t>128-bit address in hexadecimal</a:t>
-            </a:r>
-          </a:p>
-          <a:p>
-            <a:pPr marL="274320" indent="-274320">
-              <a:spcAft>
-                <a:spcPts val="990"/>
-              </a:spcAft>
-              <a:buClr>
-                <a:srgbClr val="0645AD"/>
-              </a:buClr>
-              <a:buFont typeface="Arial"/>
-              <a:buChar char="•"/>
-            </a:pPr>
-            <a:r>
-              <a:rPr sz="2200" b="1">
-                <a:solidFill>
-                  <a:srgbClr val="202122"/>
-                </a:solidFill>
-                <a:latin typeface="Calibri"/>
-              </a:rPr>
-              <a:t>Unicast:</a:t>
-            </a:r>
-            <a:r>
-              <a:rPr sz="2200" b="0">
-                <a:solidFill>
-                  <a:srgbClr val="202122"/>
-                </a:solidFill>
-                <a:latin typeface="Calibri"/>
-              </a:rPr>
-              <a:t> one interface</a:t>
-            </a:r>
-          </a:p>
-          <a:p>
-            <a:pPr marL="274320" indent="-274320">
-              <a:spcAft>
-                <a:spcPts val="990"/>
-              </a:spcAft>
-              <a:buClr>
-                <a:srgbClr val="0645AD"/>
-              </a:buClr>
-              <a:buFont typeface="Arial"/>
-              <a:buChar char="•"/>
-            </a:pPr>
-            <a:r>
-              <a:rPr sz="2200" b="1">
-                <a:solidFill>
-                  <a:srgbClr val="202122"/>
-                </a:solidFill>
-                <a:latin typeface="Calibri"/>
-              </a:rPr>
-              <a:t>Multicast:</a:t>
-            </a:r>
-            <a:r>
-              <a:rPr sz="2200" b="0">
-                <a:solidFill>
-                  <a:srgbClr val="202122"/>
-                </a:solidFill>
-                <a:latin typeface="Calibri"/>
-              </a:rPr>
-              <a:t> a group</a:t>
-            </a:r>
-          </a:p>
-          <a:p>
-            <a:pPr marL="274320" indent="-274320">
-              <a:spcAft>
-                <a:spcPts val="990"/>
-              </a:spcAft>
-              <a:buClr>
-                <a:srgbClr val="0645AD"/>
-              </a:buClr>
-              <a:buFont typeface="Arial"/>
-              <a:buChar char="•"/>
-            </a:pPr>
-            <a:r>
-              <a:rPr sz="2200" b="1">
-                <a:solidFill>
-                  <a:srgbClr val="202122"/>
-                </a:solidFill>
-                <a:latin typeface="Calibri"/>
-              </a:rPr>
-              <a:t>Anycast:</a:t>
-            </a:r>
-            <a:r>
-              <a:rPr sz="2200" b="0">
-                <a:solidFill>
-                  <a:srgbClr val="202122"/>
-                </a:solidFill>
-                <a:latin typeface="Calibri"/>
-              </a:rPr>
-              <a:t> the nearest of a group</a:t>
-            </a:r>
-          </a:p>
-          <a:p>
-            <a:pPr marL="274320" indent="-274320">
-              <a:spcAft>
-                <a:spcPts val="990"/>
-              </a:spcAft>
-              <a:buClr>
-                <a:srgbClr val="0645AD"/>
-              </a:buClr>
-              <a:buFont typeface="Arial"/>
-              <a:buChar char="•"/>
-            </a:pPr>
-            <a:r>
-              <a:rPr sz="2200" b="0">
-                <a:solidFill>
-                  <a:srgbClr val="202122"/>
-                </a:solidFill>
-                <a:latin typeface="Calibri"/>
-              </a:rPr>
-              <a:t>Link-local and global addresses</a:t>
-            </a:r>
-          </a:p>
-        </p:txBody>
-      </p:sp>
-    </p:spTree>
-  </p:cSld>
-  <p:clrMapOvr>
-    <a:masterClrMapping/>
-  </p:clrMapOvr>
-</p:sld>
-</file>
-
 <file path=ppt/slides/slide7.xml><?xml version="1.0" encoding="utf-8"?>
 <p:sld xmlns:a="http://schemas.openxmlformats.org/drawingml/2006/main" xmlns:p="http://schemas.openxmlformats.org/presentationml/2006/main" xmlns:r="http://schemas.openxmlformats.org/officeDocument/2006/relationships">
   <p:cSld>
@@ -8139,7 +11471,7 @@
                 </a:solidFill>
                 <a:latin typeface="Cambria"/>
               </a:rPr>
-              <a:t>Check your understanding</a:t>
+              <a:t>Transmission media</a:t>
             </a:r>
           </a:p>
         </p:txBody>
@@ -8212,14 +11544,163 @@
       </p:sp>
       <p:sp>
         <p:nvSpPr>
-          <p:cNvPr id="6" name="Oval 5"/>
+          <p:cNvPr id="6" name="TextBox 5"/>
+          <p:cNvSpPr txBox="1"/>
+          <p:nvPr/>
+        </p:nvSpPr>
+        <p:spPr>
+          <a:xfrm>
+            <a:off x="548640" y="1554480"/>
+            <a:ext cx="6720840" cy="4617720"/>
+          </a:xfrm>
+          <a:prstGeom prst="rect">
+            <a:avLst/>
+          </a:prstGeom>
+          <a:noFill/>
+        </p:spPr>
+        <p:txBody>
+          <a:bodyPr wrap="square" lIns="0" rIns="0" tIns="0" bIns="0">
+            <a:spAutoFit/>
+          </a:bodyPr>
+          <a:lstStyle/>
+          <a:p>
+            <a:pPr>
+              <a:spcAft>
+                <a:spcPts val="1200"/>
+              </a:spcAft>
+            </a:pPr>
+            <a:r>
+              <a:rPr sz="2000" b="0">
+                <a:solidFill>
+                  <a:srgbClr val="202122"/>
+                </a:solidFill>
+                <a:latin typeface="Calibri"/>
+              </a:rPr>
+              <a:t>Data travels as electrical signals on copper, light pulses in fibre, or radio waves over wireless.</a:t>
+            </a:r>
+          </a:p>
+          <a:p>
+            <a:pPr>
+              <a:spcAft>
+                <a:spcPts val="1200"/>
+              </a:spcAft>
+            </a:pPr>
+            <a:r>
+              <a:rPr sz="2000" b="1">
+                <a:solidFill>
+                  <a:srgbClr val="202122"/>
+                </a:solidFill>
+                <a:latin typeface="Calibri"/>
+              </a:rPr>
+              <a:t>Copper can pick up interference:</a:t>
+            </a:r>
+            <a:r>
+              <a:rPr sz="2000" b="0">
+                <a:solidFill>
+                  <a:srgbClr val="202122"/>
+                </a:solidFill>
+                <a:latin typeface="Calibri"/>
+              </a:rPr>
+              <a:t> electromagnetic interference from power cables and motors, static, and crosstalk between neighbouring pairs. BS EN 50174 sets how far data cabling must be kept from power cabling, or requires shielding.</a:t>
+            </a:r>
+          </a:p>
+          <a:p>
+            <a:pPr>
+              <a:spcAft>
+                <a:spcPts val="1200"/>
+              </a:spcAft>
+            </a:pPr>
+            <a:r>
+              <a:rPr sz="2000" b="1">
+                <a:solidFill>
+                  <a:srgbClr val="202122"/>
+                </a:solidFill>
+                <a:latin typeface="Calibri"/>
+              </a:rPr>
+              <a:t>All media carry security risks:</a:t>
+            </a:r>
+            <a:r>
+              <a:rPr sz="2000" b="0">
+                <a:solidFill>
+                  <a:srgbClr val="202122"/>
+                </a:solidFill>
+                <a:latin typeface="Calibri"/>
+              </a:rPr>
+              <a:t> cables can be tapped and signals lost.</a:t>
+            </a:r>
+          </a:p>
+          <a:p>
+            <a:pPr>
+              <a:spcAft>
+                <a:spcPts val="1200"/>
+              </a:spcAft>
+            </a:pPr>
+            <a:r>
+              <a:rPr sz="2000" b="0">
+                <a:solidFill>
+                  <a:srgbClr val="202122"/>
+                </a:solidFill>
+                <a:latin typeface="Calibri"/>
+              </a:rPr>
+              <a:t>Wireless has evolved through 802.11b, g and n, then Wi-Fi 5 (ac), Wi-Fi 6 and 6E (ax) and Wi-Fi 7 (be). Each generation adds speed and handles more devices at once.</a:t>
+            </a:r>
+          </a:p>
+        </p:txBody>
+      </p:sp>
+      <p:sp>
+        <p:nvSpPr>
+          <p:cNvPr id="7" name="Rounded Rectangle 6"/>
           <p:cNvSpPr/>
           <p:nvPr/>
         </p:nvSpPr>
         <p:spPr>
           <a:xfrm>
-            <a:off x="548640" y="1618488"/>
-            <a:ext cx="411480" cy="411480"/>
+            <a:off x="7772400" y="1554480"/>
+            <a:ext cx="3867912" cy="4526280"/>
+          </a:xfrm>
+          <a:prstGeom prst="roundRect">
+            <a:avLst>
+              <a:gd name="adj" fmla="val 8000"/>
+            </a:avLst>
+          </a:prstGeom>
+          <a:solidFill>
+            <a:srgbClr val="03306E"/>
+          </a:solidFill>
+          <a:ln>
+            <a:noFill/>
+          </a:ln>
+          <a:effectLst/>
+        </p:spPr>
+        <p:style>
+          <a:lnRef idx="1">
+            <a:schemeClr val="accent1"/>
+          </a:lnRef>
+          <a:fillRef idx="3">
+            <a:schemeClr val="accent1"/>
+          </a:fillRef>
+          <a:effectRef idx="2">
+            <a:schemeClr val="accent1"/>
+          </a:effectRef>
+          <a:fontRef idx="minor">
+            <a:schemeClr val="lt1"/>
+          </a:fontRef>
+        </p:style>
+        <p:txBody>
+          <a:bodyPr rtlCol="0" anchor="ctr"/>
+          <a:lstStyle/>
+          <a:p/>
+        </p:txBody>
+      </p:sp>
+      <p:sp>
+        <p:nvSpPr>
+          <p:cNvPr id="8" name="Oval 7"/>
+          <p:cNvSpPr/>
+          <p:nvPr/>
+        </p:nvSpPr>
+        <p:spPr>
+          <a:xfrm>
+            <a:off x="8046720" y="1828800"/>
+            <a:ext cx="548640" cy="548640"/>
           </a:xfrm>
           <a:prstGeom prst="ellipse">
             <a:avLst/>
@@ -8252,99 +11733,13 @@
           <a:p>
             <a:pPr algn="ctr"/>
             <a:r>
-              <a:rPr sz="1400" b="1">
+              <a:rPr sz="1300" b="1">
                 <a:solidFill>
                   <a:srgbClr val="202122"/>
                 </a:solidFill>
                 <a:latin typeface="Calibri"/>
               </a:rPr>
-              <a:t>1</a:t>
-            </a:r>
-          </a:p>
-        </p:txBody>
-      </p:sp>
-      <p:sp>
-        <p:nvSpPr>
-          <p:cNvPr id="7" name="TextBox 6"/>
-          <p:cNvSpPr txBox="1"/>
-          <p:nvPr/>
-        </p:nvSpPr>
-        <p:spPr>
-          <a:xfrm>
-            <a:off x="1234440" y="1600200"/>
-            <a:ext cx="10408615" cy="791870"/>
-          </a:xfrm>
-          <a:prstGeom prst="rect">
-            <a:avLst/>
-          </a:prstGeom>
-          <a:noFill/>
-        </p:spPr>
-        <p:txBody>
-          <a:bodyPr wrap="square" anchor="t" lIns="0" rIns="0" tIns="0" bIns="0"/>
-          <a:lstStyle/>
-          <a:p>
-            <a:pPr algn="l"/>
-            <a:r>
-              <a:rPr sz="2200" b="0" i="0">
-                <a:solidFill>
-                  <a:srgbClr val="202122"/>
-                </a:solidFill>
-                <a:latin typeface="Calibri"/>
-              </a:rPr>
-              <a:t>What does load balancing do?</a:t>
-            </a:r>
-          </a:p>
-        </p:txBody>
-      </p:sp>
-      <p:sp>
-        <p:nvSpPr>
-          <p:cNvPr id="8" name="Oval 7"/>
-          <p:cNvSpPr/>
-          <p:nvPr/>
-        </p:nvSpPr>
-        <p:spPr>
-          <a:xfrm>
-            <a:off x="548640" y="2574950"/>
-            <a:ext cx="411480" cy="411480"/>
-          </a:xfrm>
-          <a:prstGeom prst="ellipse">
-            <a:avLst/>
-          </a:prstGeom>
-          <a:solidFill>
-            <a:srgbClr val="33C17A"/>
-          </a:solidFill>
-          <a:ln>
-            <a:noFill/>
-          </a:ln>
-          <a:effectLst/>
-        </p:spPr>
-        <p:style>
-          <a:lnRef idx="1">
-            <a:schemeClr val="accent1"/>
-          </a:lnRef>
-          <a:fillRef idx="3">
-            <a:schemeClr val="accent1"/>
-          </a:fillRef>
-          <a:effectRef idx="2">
-            <a:schemeClr val="accent1"/>
-          </a:effectRef>
-          <a:fontRef idx="minor">
-            <a:schemeClr val="lt1"/>
-          </a:fontRef>
-        </p:style>
-        <p:txBody>
-          <a:bodyPr rtlCol="0" anchor="ctr" lIns="0" rIns="0" tIns="0" bIns="0"/>
-          <a:lstStyle/>
-          <a:p>
-            <a:pPr algn="ctr"/>
-            <a:r>
-              <a:rPr sz="1400" b="1">
-                <a:solidFill>
-                  <a:srgbClr val="202122"/>
-                </a:solidFill>
-                <a:latin typeface="Calibri"/>
-              </a:rPr>
-              <a:t>2</a:t>
+              <a:t>e.g.</a:t>
             </a:r>
           </a:p>
         </p:txBody>
@@ -8357,8 +11752,8 @@
         </p:nvSpPr>
         <p:spPr>
           <a:xfrm>
-            <a:off x="1234440" y="2556662"/>
-            <a:ext cx="10408615" cy="791870"/>
+            <a:off x="8046720" y="2560320"/>
+            <a:ext cx="3291840" cy="365760"/>
           </a:xfrm>
           <a:prstGeom prst="rect">
             <a:avLst/>
@@ -8371,80 +11766,27 @@
           <a:p>
             <a:pPr algn="l"/>
             <a:r>
-              <a:rPr sz="2200" b="0" i="0">
-                <a:solidFill>
-                  <a:srgbClr val="202122"/>
-                </a:solidFill>
-                <a:latin typeface="Calibri"/>
-              </a:rPr>
-              <a:t>Convert decimal 255 to binary.</a:t>
-            </a:r>
-          </a:p>
-        </p:txBody>
-      </p:sp>
-      <p:sp>
-        <p:nvSpPr>
-          <p:cNvPr id="10" name="Oval 9"/>
-          <p:cNvSpPr/>
-          <p:nvPr/>
-        </p:nvSpPr>
-        <p:spPr>
-          <a:xfrm>
-            <a:off x="548640" y="3531412"/>
-            <a:ext cx="411480" cy="411480"/>
-          </a:xfrm>
-          <a:prstGeom prst="ellipse">
-            <a:avLst/>
-          </a:prstGeom>
-          <a:solidFill>
-            <a:srgbClr val="33C17A"/>
-          </a:solidFill>
-          <a:ln>
-            <a:noFill/>
-          </a:ln>
-          <a:effectLst/>
-        </p:spPr>
-        <p:style>
-          <a:lnRef idx="1">
-            <a:schemeClr val="accent1"/>
-          </a:lnRef>
-          <a:fillRef idx="3">
-            <a:schemeClr val="accent1"/>
-          </a:fillRef>
-          <a:effectRef idx="2">
-            <a:schemeClr val="accent1"/>
-          </a:effectRef>
-          <a:fontRef idx="minor">
-            <a:schemeClr val="lt1"/>
-          </a:fontRef>
-        </p:style>
-        <p:txBody>
-          <a:bodyPr rtlCol="0" anchor="ctr" lIns="0" rIns="0" tIns="0" bIns="0"/>
-          <a:lstStyle/>
-          <a:p>
-            <a:pPr algn="ctr"/>
-            <a:r>
-              <a:rPr sz="1400" b="1">
-                <a:solidFill>
-                  <a:srgbClr val="202122"/>
-                </a:solidFill>
-                <a:latin typeface="Calibri"/>
-              </a:rPr>
-              <a:t>3</a:t>
-            </a:r>
-          </a:p>
-        </p:txBody>
-      </p:sp>
-      <p:sp>
-        <p:nvSpPr>
-          <p:cNvPr id="11" name="TextBox 10"/>
+              <a:rPr sz="1300" b="1" i="0">
+                <a:solidFill>
+                  <a:srgbClr val="A9C8F0"/>
+                </a:solidFill>
+                <a:latin typeface="Calibri"/>
+              </a:rPr>
+              <a:t>EXAMPLE</a:t>
+            </a:r>
+          </a:p>
+        </p:txBody>
+      </p:sp>
+      <p:sp>
+        <p:nvSpPr>
+          <p:cNvPr id="10" name="TextBox 9"/>
           <p:cNvSpPr txBox="1"/>
           <p:nvPr/>
         </p:nvSpPr>
         <p:spPr>
           <a:xfrm>
-            <a:off x="1234440" y="3513124"/>
-            <a:ext cx="10408615" cy="791870"/>
+            <a:off x="8046720" y="2971800"/>
+            <a:ext cx="3291840" cy="2971800"/>
           </a:xfrm>
           <a:prstGeom prst="rect">
             <a:avLst/>
@@ -8457,185 +11799,13 @@
           <a:p>
             <a:pPr algn="l"/>
             <a:r>
-              <a:rPr sz="2200" b="0" i="0">
-                <a:solidFill>
-                  <a:srgbClr val="202122"/>
-                </a:solidFill>
-                <a:latin typeface="Calibri"/>
-              </a:rPr>
-              <a:t>Why keep data cables away from power cables?</a:t>
-            </a:r>
-          </a:p>
-        </p:txBody>
-      </p:sp>
-      <p:sp>
-        <p:nvSpPr>
-          <p:cNvPr id="12" name="Oval 11"/>
-          <p:cNvSpPr/>
-          <p:nvPr/>
-        </p:nvSpPr>
-        <p:spPr>
-          <a:xfrm>
-            <a:off x="548640" y="4487875"/>
-            <a:ext cx="411480" cy="411480"/>
-          </a:xfrm>
-          <a:prstGeom prst="ellipse">
-            <a:avLst/>
-          </a:prstGeom>
-          <a:solidFill>
-            <a:srgbClr val="33C17A"/>
-          </a:solidFill>
-          <a:ln>
-            <a:noFill/>
-          </a:ln>
-          <a:effectLst/>
-        </p:spPr>
-        <p:style>
-          <a:lnRef idx="1">
-            <a:schemeClr val="accent1"/>
-          </a:lnRef>
-          <a:fillRef idx="3">
-            <a:schemeClr val="accent1"/>
-          </a:fillRef>
-          <a:effectRef idx="2">
-            <a:schemeClr val="accent1"/>
-          </a:effectRef>
-          <a:fontRef idx="minor">
-            <a:schemeClr val="lt1"/>
-          </a:fontRef>
-        </p:style>
-        <p:txBody>
-          <a:bodyPr rtlCol="0" anchor="ctr" lIns="0" rIns="0" tIns="0" bIns="0"/>
-          <a:lstStyle/>
-          <a:p>
-            <a:pPr algn="ctr"/>
-            <a:r>
-              <a:rPr sz="1400" b="1">
-                <a:solidFill>
-                  <a:srgbClr val="202122"/>
-                </a:solidFill>
-                <a:latin typeface="Calibri"/>
-              </a:rPr>
-              <a:t>4</a:t>
-            </a:r>
-          </a:p>
-        </p:txBody>
-      </p:sp>
-      <p:sp>
-        <p:nvSpPr>
-          <p:cNvPr id="13" name="TextBox 12"/>
-          <p:cNvSpPr txBox="1"/>
-          <p:nvPr/>
-        </p:nvSpPr>
-        <p:spPr>
-          <a:xfrm>
-            <a:off x="1234440" y="4469587"/>
-            <a:ext cx="10408615" cy="791870"/>
-          </a:xfrm>
-          <a:prstGeom prst="rect">
-            <a:avLst/>
-          </a:prstGeom>
-          <a:noFill/>
-        </p:spPr>
-        <p:txBody>
-          <a:bodyPr wrap="square" anchor="t" lIns="0" rIns="0" tIns="0" bIns="0"/>
-          <a:lstStyle/>
-          <a:p>
-            <a:pPr algn="l"/>
-            <a:r>
-              <a:rPr sz="2200" b="0" i="0">
-                <a:solidFill>
-                  <a:srgbClr val="202122"/>
-                </a:solidFill>
-                <a:latin typeface="Calibri"/>
-              </a:rPr>
-              <a:t>How many bits in an IPv6 address?</a:t>
-            </a:r>
-          </a:p>
-        </p:txBody>
-      </p:sp>
-      <p:sp>
-        <p:nvSpPr>
-          <p:cNvPr id="14" name="Oval 13"/>
-          <p:cNvSpPr/>
-          <p:nvPr/>
-        </p:nvSpPr>
-        <p:spPr>
-          <a:xfrm>
-            <a:off x="548640" y="5444337"/>
-            <a:ext cx="411480" cy="411480"/>
-          </a:xfrm>
-          <a:prstGeom prst="ellipse">
-            <a:avLst/>
-          </a:prstGeom>
-          <a:solidFill>
-            <a:srgbClr val="33C17A"/>
-          </a:solidFill>
-          <a:ln>
-            <a:noFill/>
-          </a:ln>
-          <a:effectLst/>
-        </p:spPr>
-        <p:style>
-          <a:lnRef idx="1">
-            <a:schemeClr val="accent1"/>
-          </a:lnRef>
-          <a:fillRef idx="3">
-            <a:schemeClr val="accent1"/>
-          </a:fillRef>
-          <a:effectRef idx="2">
-            <a:schemeClr val="accent1"/>
-          </a:effectRef>
-          <a:fontRef idx="minor">
-            <a:schemeClr val="lt1"/>
-          </a:fontRef>
-        </p:style>
-        <p:txBody>
-          <a:bodyPr rtlCol="0" anchor="ctr" lIns="0" rIns="0" tIns="0" bIns="0"/>
-          <a:lstStyle/>
-          <a:p>
-            <a:pPr algn="ctr"/>
-            <a:r>
-              <a:rPr sz="1400" b="1">
-                <a:solidFill>
-                  <a:srgbClr val="202122"/>
-                </a:solidFill>
-                <a:latin typeface="Calibri"/>
-              </a:rPr>
-              <a:t>5</a:t>
-            </a:r>
-          </a:p>
-        </p:txBody>
-      </p:sp>
-      <p:sp>
-        <p:nvSpPr>
-          <p:cNvPr id="15" name="TextBox 14"/>
-          <p:cNvSpPr txBox="1"/>
-          <p:nvPr/>
-        </p:nvSpPr>
-        <p:spPr>
-          <a:xfrm>
-            <a:off x="1234440" y="5426049"/>
-            <a:ext cx="10408615" cy="791870"/>
-          </a:xfrm>
-          <a:prstGeom prst="rect">
-            <a:avLst/>
-          </a:prstGeom>
-          <a:noFill/>
-        </p:spPr>
-        <p:txBody>
-          <a:bodyPr wrap="square" anchor="t" lIns="0" rIns="0" tIns="0" bIns="0"/>
-          <a:lstStyle/>
-          <a:p>
-            <a:pPr algn="l"/>
-            <a:r>
-              <a:rPr sz="2200" b="0" i="0">
-                <a:solidFill>
-                  <a:srgbClr val="202122"/>
-                </a:solidFill>
-                <a:latin typeface="Calibri"/>
-              </a:rPr>
-              <a:t>How many usable hosts in a /24 subnet?</a:t>
+              <a:rPr sz="1900" b="0" i="0">
+                <a:solidFill>
+                  <a:srgbClr val="FFFFFF"/>
+                </a:solidFill>
+                <a:latin typeface="Cambria"/>
+              </a:rPr>
+              <a:t>Running a data cable alongside a power cable in the same trunking causes intermittent errors; separating them or using shielded cable fixes it.</a:t>
             </a:r>
           </a:p>
         </p:txBody>
@@ -8727,7 +11897,7 @@
                 </a:solidFill>
                 <a:latin typeface="Cambria"/>
               </a:rPr>
-              <a:t>Answers</a:t>
+              <a:t>Transmission media</a:t>
             </a:r>
           </a:p>
         </p:txBody>
@@ -8800,20 +11970,22 @@
       </p:sp>
       <p:sp>
         <p:nvSpPr>
-          <p:cNvPr id="6" name="Oval 5"/>
+          <p:cNvPr id="6" name="Rounded Rectangle 5"/>
           <p:cNvSpPr/>
           <p:nvPr/>
         </p:nvSpPr>
         <p:spPr>
           <a:xfrm>
-            <a:off x="548640" y="1618488"/>
-            <a:ext cx="411480" cy="411480"/>
-          </a:xfrm>
-          <a:prstGeom prst="ellipse">
-            <a:avLst/>
+            <a:off x="548640" y="1600200"/>
+            <a:ext cx="5364327" cy="640080"/>
+          </a:xfrm>
+          <a:prstGeom prst="roundRect">
+            <a:avLst>
+              <a:gd name="adj" fmla="val 15000"/>
+            </a:avLst>
           </a:prstGeom>
           <a:solidFill>
-            <a:srgbClr val="33C17A"/>
+            <a:srgbClr val="03306E"/>
           </a:solidFill>
           <a:ln>
             <a:noFill/>
@@ -8835,20 +12007,9 @@
           </a:fontRef>
         </p:style>
         <p:txBody>
-          <a:bodyPr rtlCol="0" anchor="ctr" lIns="0" rIns="0" tIns="0" bIns="0"/>
-          <a:lstStyle/>
-          <a:p>
-            <a:pPr algn="ctr"/>
-            <a:r>
-              <a:rPr sz="1400" b="1">
-                <a:solidFill>
-                  <a:srgbClr val="202122"/>
-                </a:solidFill>
-                <a:latin typeface="Calibri"/>
-              </a:rPr>
-              <a:t>1</a:t>
-            </a:r>
-          </a:p>
+          <a:bodyPr rtlCol="0" anchor="ctr"/>
+          <a:lstStyle/>
+          <a:p/>
         </p:txBody>
       </p:sp>
       <p:sp>
@@ -8859,8 +12020,8 @@
         </p:nvSpPr>
         <p:spPr>
           <a:xfrm>
-            <a:off x="1234440" y="1600200"/>
-            <a:ext cx="10408615" cy="791870"/>
+            <a:off x="777240" y="1600200"/>
+            <a:ext cx="4907127" cy="640080"/>
           </a:xfrm>
           <a:prstGeom prst="rect">
             <a:avLst/>
@@ -8868,49 +12029,40 @@
           <a:noFill/>
         </p:spPr>
         <p:txBody>
-          <a:bodyPr wrap="square" anchor="t" lIns="0" rIns="0" tIns="0" bIns="0"/>
+          <a:bodyPr wrap="square" anchor="ctr" lIns="0" rIns="0" tIns="0" bIns="0"/>
           <a:lstStyle/>
           <a:p>
             <a:pPr algn="l"/>
             <a:r>
-              <a:rPr sz="1800" b="0" i="0">
-                <a:solidFill>
-                  <a:srgbClr val="54595D"/>
-                </a:solidFill>
-                <a:latin typeface="Calibri"/>
-              </a:rPr>
-              <a:t>What does load balancing do?</a:t>
-            </a:r>
-          </a:p>
-          <a:p>
-            <a:r>
-              <a:rPr sz="1800" b="1">
-                <a:solidFill>
-                  <a:srgbClr val="03306E"/>
-                </a:solidFill>
-                <a:latin typeface="Calibri"/>
-              </a:rPr>
-              <a:t>Spreads traffic across several servers.</a:t>
-            </a:r>
-          </a:p>
-        </p:txBody>
-      </p:sp>
-      <p:sp>
-        <p:nvSpPr>
-          <p:cNvPr id="8" name="Oval 7"/>
+              <a:rPr sz="2000" b="1" i="0">
+                <a:solidFill>
+                  <a:srgbClr val="FFFFFF"/>
+                </a:solidFill>
+                <a:latin typeface="Calibri"/>
+              </a:rPr>
+              <a:t>Copper and fibre</a:t>
+            </a:r>
+          </a:p>
+        </p:txBody>
+      </p:sp>
+      <p:sp>
+        <p:nvSpPr>
+          <p:cNvPr id="8" name="Rounded Rectangle 7"/>
           <p:cNvSpPr/>
           <p:nvPr/>
         </p:nvSpPr>
         <p:spPr>
           <a:xfrm>
-            <a:off x="548640" y="2574950"/>
-            <a:ext cx="411480" cy="411480"/>
-          </a:xfrm>
-          <a:prstGeom prst="ellipse">
-            <a:avLst/>
+            <a:off x="548640" y="2377440"/>
+            <a:ext cx="5364327" cy="3794760"/>
+          </a:xfrm>
+          <a:prstGeom prst="roundRect">
+            <a:avLst>
+              <a:gd name="adj" fmla="val 4000"/>
+            </a:avLst>
           </a:prstGeom>
           <a:solidFill>
-            <a:srgbClr val="33C17A"/>
+            <a:srgbClr val="EAF3FF"/>
           </a:solidFill>
           <a:ln>
             <a:noFill/>
@@ -8932,20 +12084,9 @@
           </a:fontRef>
         </p:style>
         <p:txBody>
-          <a:bodyPr rtlCol="0" anchor="ctr" lIns="0" rIns="0" tIns="0" bIns="0"/>
-          <a:lstStyle/>
-          <a:p>
-            <a:pPr algn="ctr"/>
-            <a:r>
-              <a:rPr sz="1400" b="1">
-                <a:solidFill>
-                  <a:srgbClr val="202122"/>
-                </a:solidFill>
-                <a:latin typeface="Calibri"/>
-              </a:rPr>
-              <a:t>2</a:t>
-            </a:r>
-          </a:p>
+          <a:bodyPr rtlCol="0" anchor="ctr"/>
+          <a:lstStyle/>
+          <a:p/>
         </p:txBody>
       </p:sp>
       <p:sp>
@@ -8956,8 +12097,8 @@
         </p:nvSpPr>
         <p:spPr>
           <a:xfrm>
-            <a:off x="1234440" y="2556662"/>
-            <a:ext cx="10408615" cy="791870"/>
+            <a:off x="822959" y="2606040"/>
+            <a:ext cx="4815687" cy="3337560"/>
           </a:xfrm>
           <a:prstGeom prst="rect">
             <a:avLst/>
@@ -8965,49 +12106,144 @@
           <a:noFill/>
         </p:spPr>
         <p:txBody>
-          <a:bodyPr wrap="square" anchor="t" lIns="0" rIns="0" tIns="0" bIns="0"/>
-          <a:lstStyle/>
-          <a:p>
-            <a:pPr algn="l"/>
-            <a:r>
-              <a:rPr sz="1800" b="0" i="0">
-                <a:solidFill>
-                  <a:srgbClr val="54595D"/>
-                </a:solidFill>
-                <a:latin typeface="Calibri"/>
-              </a:rPr>
-              <a:t>Convert decimal 255 to binary.</a:t>
-            </a:r>
-          </a:p>
-          <a:p>
-            <a:r>
-              <a:rPr sz="1800" b="1">
-                <a:solidFill>
-                  <a:srgbClr val="03306E"/>
-                </a:solidFill>
-                <a:latin typeface="Calibri"/>
-              </a:rPr>
-              <a:t>11111111.</a:t>
-            </a:r>
-          </a:p>
-        </p:txBody>
-      </p:sp>
-      <p:sp>
-        <p:nvSpPr>
-          <p:cNvPr id="10" name="Oval 9"/>
+          <a:bodyPr wrap="square" lIns="0" rIns="0" tIns="0" bIns="0">
+            <a:spAutoFit/>
+          </a:bodyPr>
+          <a:lstStyle/>
+          <a:p>
+            <a:pPr marL="274320" indent="-274320">
+              <a:spcAft>
+                <a:spcPts val="900"/>
+              </a:spcAft>
+              <a:buClr>
+                <a:srgbClr val="0645AD"/>
+              </a:buClr>
+              <a:buFont typeface="Arial"/>
+              <a:buChar char="•"/>
+            </a:pPr>
+            <a:r>
+              <a:rPr sz="2000" b="0">
+                <a:solidFill>
+                  <a:srgbClr val="202122"/>
+                </a:solidFill>
+                <a:latin typeface="Calibri"/>
+              </a:rPr>
+              <a:t>Copper carries electrical signals</a:t>
+            </a:r>
+          </a:p>
+          <a:p>
+            <a:pPr marL="274320" indent="-274320">
+              <a:spcAft>
+                <a:spcPts val="900"/>
+              </a:spcAft>
+              <a:buClr>
+                <a:srgbClr val="0645AD"/>
+              </a:buClr>
+              <a:buFont typeface="Arial"/>
+              <a:buChar char="•"/>
+            </a:pPr>
+            <a:r>
+              <a:rPr sz="2000" b="0">
+                <a:solidFill>
+                  <a:srgbClr val="202122"/>
+                </a:solidFill>
+                <a:latin typeface="Calibri"/>
+              </a:rPr>
+              <a:t>Fibre carries light</a:t>
+            </a:r>
+          </a:p>
+          <a:p>
+            <a:pPr marL="274320" indent="-274320">
+              <a:spcAft>
+                <a:spcPts val="900"/>
+              </a:spcAft>
+              <a:buClr>
+                <a:srgbClr val="0645AD"/>
+              </a:buClr>
+              <a:buFont typeface="Arial"/>
+              <a:buChar char="•"/>
+            </a:pPr>
+            <a:r>
+              <a:rPr sz="2000" b="1">
+                <a:solidFill>
+                  <a:srgbClr val="202122"/>
+                </a:solidFill>
+                <a:latin typeface="Calibri"/>
+              </a:rPr>
+              <a:t>Risks:</a:t>
+            </a:r>
+            <a:r>
+              <a:rPr sz="2000" b="0">
+                <a:solidFill>
+                  <a:srgbClr val="202122"/>
+                </a:solidFill>
+                <a:latin typeface="Calibri"/>
+              </a:rPr>
+              <a:t> tampering and signal loss</a:t>
+            </a:r>
+          </a:p>
+          <a:p>
+            <a:pPr marL="274320" indent="-274320">
+              <a:spcAft>
+                <a:spcPts val="900"/>
+              </a:spcAft>
+              <a:buClr>
+                <a:srgbClr val="0645AD"/>
+              </a:buClr>
+              <a:buFont typeface="Arial"/>
+              <a:buChar char="•"/>
+            </a:pPr>
+            <a:r>
+              <a:rPr sz="2000" b="0">
+                <a:solidFill>
+                  <a:srgbClr val="202122"/>
+                </a:solidFill>
+                <a:latin typeface="Calibri"/>
+              </a:rPr>
+              <a:t>Separate copper from power cables to avoid EMI, static and crosstalk</a:t>
+            </a:r>
+          </a:p>
+          <a:p>
+            <a:pPr marL="274320" indent="-274320">
+              <a:spcAft>
+                <a:spcPts val="900"/>
+              </a:spcAft>
+              <a:buClr>
+                <a:srgbClr val="0645AD"/>
+              </a:buClr>
+              <a:buFont typeface="Arial"/>
+              <a:buChar char="•"/>
+            </a:pPr>
+            <a:r>
+              <a:rPr sz="2000" b="0">
+                <a:solidFill>
+                  <a:srgbClr val="202122"/>
+                </a:solidFill>
+                <a:latin typeface="Calibri"/>
+              </a:rPr>
+              <a:t>Use shielding or planned parallel runs (BS EN 50174)</a:t>
+            </a:r>
+          </a:p>
+        </p:txBody>
+      </p:sp>
+      <p:sp>
+        <p:nvSpPr>
+          <p:cNvPr id="10" name="Rounded Rectangle 9"/>
           <p:cNvSpPr/>
           <p:nvPr/>
         </p:nvSpPr>
         <p:spPr>
           <a:xfrm>
-            <a:off x="548640" y="3531412"/>
-            <a:ext cx="411480" cy="411480"/>
-          </a:xfrm>
-          <a:prstGeom prst="ellipse">
-            <a:avLst/>
+            <a:off x="6278727" y="1600200"/>
+            <a:ext cx="5364327" cy="640080"/>
+          </a:xfrm>
+          <a:prstGeom prst="roundRect">
+            <a:avLst>
+              <a:gd name="adj" fmla="val 15000"/>
+            </a:avLst>
           </a:prstGeom>
           <a:solidFill>
-            <a:srgbClr val="33C17A"/>
+            <a:srgbClr val="0645AD"/>
           </a:solidFill>
           <a:ln>
             <a:noFill/>
@@ -9029,20 +12265,9 @@
           </a:fontRef>
         </p:style>
         <p:txBody>
-          <a:bodyPr rtlCol="0" anchor="ctr" lIns="0" rIns="0" tIns="0" bIns="0"/>
-          <a:lstStyle/>
-          <a:p>
-            <a:pPr algn="ctr"/>
-            <a:r>
-              <a:rPr sz="1400" b="1">
-                <a:solidFill>
-                  <a:srgbClr val="202122"/>
-                </a:solidFill>
-                <a:latin typeface="Calibri"/>
-              </a:rPr>
-              <a:t>3</a:t>
-            </a:r>
-          </a:p>
+          <a:bodyPr rtlCol="0" anchor="ctr"/>
+          <a:lstStyle/>
+          <a:p/>
         </p:txBody>
       </p:sp>
       <p:sp>
@@ -9053,8 +12278,8 @@
         </p:nvSpPr>
         <p:spPr>
           <a:xfrm>
-            <a:off x="1234440" y="3513124"/>
-            <a:ext cx="10408615" cy="791870"/>
+            <a:off x="6507327" y="1600200"/>
+            <a:ext cx="4907127" cy="640080"/>
           </a:xfrm>
           <a:prstGeom prst="rect">
             <a:avLst/>
@@ -9062,49 +12287,40 @@
           <a:noFill/>
         </p:spPr>
         <p:txBody>
-          <a:bodyPr wrap="square" anchor="t" lIns="0" rIns="0" tIns="0" bIns="0"/>
+          <a:bodyPr wrap="square" anchor="ctr" lIns="0" rIns="0" tIns="0" bIns="0"/>
           <a:lstStyle/>
           <a:p>
             <a:pPr algn="l"/>
             <a:r>
-              <a:rPr sz="1800" b="0" i="0">
-                <a:solidFill>
-                  <a:srgbClr val="54595D"/>
-                </a:solidFill>
-                <a:latin typeface="Calibri"/>
-              </a:rPr>
-              <a:t>Why keep data cables away from power cables?</a:t>
-            </a:r>
-          </a:p>
-          <a:p>
-            <a:r>
-              <a:rPr sz="1800" b="1">
-                <a:solidFill>
-                  <a:srgbClr val="03306E"/>
-                </a:solidFill>
-                <a:latin typeface="Calibri"/>
-              </a:rPr>
-              <a:t>To avoid electromagnetic interference.</a:t>
-            </a:r>
-          </a:p>
-        </p:txBody>
-      </p:sp>
-      <p:sp>
-        <p:nvSpPr>
-          <p:cNvPr id="12" name="Oval 11"/>
+              <a:rPr sz="2000" b="1" i="0">
+                <a:solidFill>
+                  <a:srgbClr val="FFFFFF"/>
+                </a:solidFill>
+                <a:latin typeface="Calibri"/>
+              </a:rPr>
+              <a:t>Wireless</a:t>
+            </a:r>
+          </a:p>
+        </p:txBody>
+      </p:sp>
+      <p:sp>
+        <p:nvSpPr>
+          <p:cNvPr id="12" name="Rounded Rectangle 11"/>
           <p:cNvSpPr/>
           <p:nvPr/>
         </p:nvSpPr>
         <p:spPr>
           <a:xfrm>
-            <a:off x="548640" y="4487875"/>
-            <a:ext cx="411480" cy="411480"/>
-          </a:xfrm>
-          <a:prstGeom prst="ellipse">
-            <a:avLst/>
+            <a:off x="6278727" y="2377440"/>
+            <a:ext cx="5364327" cy="3794760"/>
+          </a:xfrm>
+          <a:prstGeom prst="roundRect">
+            <a:avLst>
+              <a:gd name="adj" fmla="val 4000"/>
+            </a:avLst>
           </a:prstGeom>
           <a:solidFill>
-            <a:srgbClr val="33C17A"/>
+            <a:srgbClr val="EAF3FF"/>
           </a:solidFill>
           <a:ln>
             <a:noFill/>
@@ -9126,20 +12342,9 @@
           </a:fontRef>
         </p:style>
         <p:txBody>
-          <a:bodyPr rtlCol="0" anchor="ctr" lIns="0" rIns="0" tIns="0" bIns="0"/>
-          <a:lstStyle/>
-          <a:p>
-            <a:pPr algn="ctr"/>
-            <a:r>
-              <a:rPr sz="1400" b="1">
-                <a:solidFill>
-                  <a:srgbClr val="202122"/>
-                </a:solidFill>
-                <a:latin typeface="Calibri"/>
-              </a:rPr>
-              <a:t>4</a:t>
-            </a:r>
-          </a:p>
+          <a:bodyPr rtlCol="0" anchor="ctr"/>
+          <a:lstStyle/>
+          <a:p/>
         </p:txBody>
       </p:sp>
       <p:sp>
@@ -9150,8 +12355,8 @@
         </p:nvSpPr>
         <p:spPr>
           <a:xfrm>
-            <a:off x="1234440" y="4469587"/>
-            <a:ext cx="10408615" cy="791870"/>
+            <a:off x="6553047" y="2606040"/>
+            <a:ext cx="4815687" cy="3337560"/>
           </a:xfrm>
           <a:prstGeom prst="rect">
             <a:avLst/>
@@ -9159,126 +12364,113 @@
           <a:noFill/>
         </p:spPr>
         <p:txBody>
-          <a:bodyPr wrap="square" anchor="t" lIns="0" rIns="0" tIns="0" bIns="0"/>
-          <a:lstStyle/>
-          <a:p>
-            <a:pPr algn="l"/>
-            <a:r>
-              <a:rPr sz="1800" b="0" i="0">
-                <a:solidFill>
-                  <a:srgbClr val="54595D"/>
-                </a:solidFill>
-                <a:latin typeface="Calibri"/>
-              </a:rPr>
-              <a:t>How many bits in an IPv6 address?</a:t>
-            </a:r>
-          </a:p>
-          <a:p>
-            <a:r>
-              <a:rPr sz="1800" b="1">
-                <a:solidFill>
-                  <a:srgbClr val="03306E"/>
-                </a:solidFill>
-                <a:latin typeface="Calibri"/>
-              </a:rPr>
-              <a:t>128.</a:t>
-            </a:r>
-          </a:p>
-        </p:txBody>
-      </p:sp>
-      <p:sp>
-        <p:nvSpPr>
-          <p:cNvPr id="14" name="Oval 13"/>
-          <p:cNvSpPr/>
-          <p:nvPr/>
-        </p:nvSpPr>
-        <p:spPr>
-          <a:xfrm>
-            <a:off x="548640" y="5444337"/>
-            <a:ext cx="411480" cy="411480"/>
-          </a:xfrm>
-          <a:prstGeom prst="ellipse">
-            <a:avLst/>
-          </a:prstGeom>
-          <a:solidFill>
-            <a:srgbClr val="33C17A"/>
-          </a:solidFill>
-          <a:ln>
-            <a:noFill/>
-          </a:ln>
-          <a:effectLst/>
-        </p:spPr>
-        <p:style>
-          <a:lnRef idx="1">
-            <a:schemeClr val="accent1"/>
-          </a:lnRef>
-          <a:fillRef idx="3">
-            <a:schemeClr val="accent1"/>
-          </a:fillRef>
-          <a:effectRef idx="2">
-            <a:schemeClr val="accent1"/>
-          </a:effectRef>
-          <a:fontRef idx="minor">
-            <a:schemeClr val="lt1"/>
-          </a:fontRef>
-        </p:style>
-        <p:txBody>
-          <a:bodyPr rtlCol="0" anchor="ctr" lIns="0" rIns="0" tIns="0" bIns="0"/>
-          <a:lstStyle/>
-          <a:p>
-            <a:pPr algn="ctr"/>
-            <a:r>
-              <a:rPr sz="1400" b="1">
+          <a:bodyPr wrap="square" lIns="0" rIns="0" tIns="0" bIns="0">
+            <a:spAutoFit/>
+          </a:bodyPr>
+          <a:lstStyle/>
+          <a:p>
+            <a:pPr marL="274320" indent="-274320">
+              <a:spcAft>
+                <a:spcPts val="990"/>
+              </a:spcAft>
+              <a:buClr>
+                <a:srgbClr val="0645AD"/>
+              </a:buClr>
+              <a:buFont typeface="Arial"/>
+              <a:buChar char="•"/>
+            </a:pPr>
+            <a:r>
+              <a:rPr sz="2200" b="0">
                 <a:solidFill>
                   <a:srgbClr val="202122"/>
                 </a:solidFill>
                 <a:latin typeface="Calibri"/>
               </a:rPr>
-              <a:t>5</a:t>
-            </a:r>
-          </a:p>
-        </p:txBody>
-      </p:sp>
-      <p:sp>
-        <p:nvSpPr>
-          <p:cNvPr id="15" name="TextBox 14"/>
-          <p:cNvSpPr txBox="1"/>
-          <p:nvPr/>
-        </p:nvSpPr>
-        <p:spPr>
-          <a:xfrm>
-            <a:off x="1234440" y="5426049"/>
-            <a:ext cx="10408615" cy="791870"/>
-          </a:xfrm>
-          <a:prstGeom prst="rect">
-            <a:avLst/>
-          </a:prstGeom>
-          <a:noFill/>
-        </p:spPr>
-        <p:txBody>
-          <a:bodyPr wrap="square" anchor="t" lIns="0" rIns="0" tIns="0" bIns="0"/>
-          <a:lstStyle/>
-          <a:p>
-            <a:pPr algn="l"/>
-            <a:r>
-              <a:rPr sz="1800" b="0" i="0">
-                <a:solidFill>
-                  <a:srgbClr val="54595D"/>
-                </a:solidFill>
-                <a:latin typeface="Calibri"/>
-              </a:rPr>
-              <a:t>How many usable hosts in a /24 subnet?</a:t>
-            </a:r>
-          </a:p>
-          <a:p>
-            <a:r>
-              <a:rPr sz="1800" b="1">
-                <a:solidFill>
-                  <a:srgbClr val="03306E"/>
-                </a:solidFill>
-                <a:latin typeface="Calibri"/>
-              </a:rPr>
-              <a:t>254.</a:t>
+              <a:t>802.11b, g and n</a:t>
+            </a:r>
+          </a:p>
+          <a:p>
+            <a:pPr marL="274320" indent="-274320">
+              <a:spcAft>
+                <a:spcPts val="990"/>
+              </a:spcAft>
+              <a:buClr>
+                <a:srgbClr val="0645AD"/>
+              </a:buClr>
+              <a:buFont typeface="Arial"/>
+              <a:buChar char="•"/>
+            </a:pPr>
+            <a:r>
+              <a:rPr sz="2200" b="0">
+                <a:solidFill>
+                  <a:srgbClr val="202122"/>
+                </a:solidFill>
+                <a:latin typeface="Calibri"/>
+              </a:rPr>
+              <a:t>Wi-Fi 5 (802.11ac)</a:t>
+            </a:r>
+          </a:p>
+          <a:p>
+            <a:pPr marL="274320" indent="-274320">
+              <a:spcAft>
+                <a:spcPts val="990"/>
+              </a:spcAft>
+              <a:buClr>
+                <a:srgbClr val="0645AD"/>
+              </a:buClr>
+              <a:buFont typeface="Arial"/>
+              <a:buChar char="•"/>
+            </a:pPr>
+            <a:r>
+              <a:rPr sz="2200" b="0">
+                <a:solidFill>
+                  <a:srgbClr val="202122"/>
+                </a:solidFill>
+                <a:latin typeface="Calibri"/>
+              </a:rPr>
+              <a:t>Wi-Fi 6 and 6E (802.11ax)</a:t>
+            </a:r>
+          </a:p>
+          <a:p>
+            <a:pPr marL="274320" indent="-274320">
+              <a:spcAft>
+                <a:spcPts val="990"/>
+              </a:spcAft>
+              <a:buClr>
+                <a:srgbClr val="0645AD"/>
+              </a:buClr>
+              <a:buFont typeface="Arial"/>
+              <a:buChar char="•"/>
+            </a:pPr>
+            <a:r>
+              <a:rPr sz="2200" b="0">
+                <a:solidFill>
+                  <a:srgbClr val="202122"/>
+                </a:solidFill>
+                <a:latin typeface="Calibri"/>
+              </a:rPr>
+              <a:t>Wi-Fi 7 (802.11be)</a:t>
+            </a:r>
+          </a:p>
+          <a:p>
+            <a:pPr marL="274320" indent="-274320">
+              <a:spcAft>
+                <a:spcPts val="990"/>
+              </a:spcAft>
+              <a:buClr>
+                <a:srgbClr val="0645AD"/>
+              </a:buClr>
+              <a:buFont typeface="Arial"/>
+              <a:buChar char="•"/>
+            </a:pPr>
+            <a:r>
+              <a:rPr sz="2200" b="0">
+                <a:solidFill>
+                  <a:srgbClr val="202122"/>
+                </a:solidFill>
+                <a:latin typeface="Calibri"/>
+              </a:rPr>
+              <a:t>Each generation raises speed and capacity</a:t>
             </a:r>
           </a:p>
         </p:txBody>
@@ -9370,7 +12562,7 @@
                 </a:solidFill>
                 <a:latin typeface="Cambria"/>
               </a:rPr>
-              <a:t>Activity: Subnet the office</a:t>
+              <a:t>Quick check: Transmission media</a:t>
             </a:r>
           </a:p>
         </p:txBody>
@@ -9443,19 +12635,17 @@
       </p:sp>
       <p:sp>
         <p:nvSpPr>
-          <p:cNvPr id="6" name="Rounded Rectangle 5"/>
+          <p:cNvPr id="6" name="Oval 5"/>
           <p:cNvSpPr/>
           <p:nvPr/>
         </p:nvSpPr>
         <p:spPr>
           <a:xfrm>
-            <a:off x="548640" y="1508760"/>
-            <a:ext cx="2011680" cy="457200"/>
-          </a:xfrm>
-          <a:prstGeom prst="roundRect">
-            <a:avLst>
-              <a:gd name="adj" fmla="val 50000"/>
-            </a:avLst>
+            <a:off x="548640" y="1691640"/>
+            <a:ext cx="502920" cy="502920"/>
+          </a:xfrm>
+          <a:prstGeom prst="ellipse">
+            <a:avLst/>
           </a:prstGeom>
           <a:solidFill>
             <a:srgbClr val="33C17A"/>
@@ -9480,9 +12670,20 @@
           </a:fontRef>
         </p:style>
         <p:txBody>
-          <a:bodyPr rtlCol="0" anchor="ctr"/>
-          <a:lstStyle/>
-          <a:p/>
+          <a:bodyPr rtlCol="0" anchor="ctr" lIns="0" rIns="0" tIns="0" bIns="0"/>
+          <a:lstStyle/>
+          <a:p>
+            <a:pPr algn="ctr"/>
+            <a:r>
+              <a:rPr sz="1600" b="1">
+                <a:solidFill>
+                  <a:srgbClr val="202122"/>
+                </a:solidFill>
+                <a:latin typeface="Calibri"/>
+              </a:rPr>
+              <a:t>1</a:t>
+            </a:r>
+          </a:p>
         </p:txBody>
       </p:sp>
       <p:sp>
@@ -9493,8 +12694,8 @@
         </p:nvSpPr>
         <p:spPr>
           <a:xfrm>
-            <a:off x="548640" y="1508760"/>
-            <a:ext cx="2011680" cy="457200"/>
+            <a:off x="1371600" y="1645920"/>
+            <a:ext cx="10271455" cy="1188720"/>
           </a:xfrm>
           <a:prstGeom prst="rect">
             <a:avLst/>
@@ -9502,71 +12703,38 @@
           <a:noFill/>
         </p:spPr>
         <p:txBody>
-          <a:bodyPr wrap="square" anchor="ctr" lIns="0" rIns="0" tIns="0" bIns="0"/>
-          <a:lstStyle/>
-          <a:p>
-            <a:pPr algn="ctr"/>
-            <a:r>
-              <a:rPr sz="1400" b="1" i="0">
+          <a:bodyPr wrap="square" anchor="t" lIns="0" rIns="0" tIns="0" bIns="0"/>
+          <a:lstStyle/>
+          <a:p>
+            <a:pPr algn="l"/>
+            <a:r>
+              <a:rPr sz="2400" b="0" i="0">
                 <a:solidFill>
                   <a:srgbClr val="202122"/>
                 </a:solidFill>
                 <a:latin typeface="Calibri"/>
               </a:rPr>
-              <a:t>25 minutes</a:t>
-            </a:r>
-          </a:p>
-        </p:txBody>
-      </p:sp>
-      <p:sp>
-        <p:nvSpPr>
-          <p:cNvPr id="8" name="TextBox 7"/>
-          <p:cNvSpPr txBox="1"/>
-          <p:nvPr/>
-        </p:nvSpPr>
-        <p:spPr>
-          <a:xfrm>
-            <a:off x="2743200" y="1508760"/>
-            <a:ext cx="4754880" cy="457200"/>
-          </a:xfrm>
-          <a:prstGeom prst="rect">
-            <a:avLst/>
-          </a:prstGeom>
-          <a:noFill/>
-        </p:spPr>
-        <p:txBody>
-          <a:bodyPr wrap="square" anchor="ctr" lIns="0" rIns="0" tIns="0" bIns="0"/>
-          <a:lstStyle/>
-          <a:p>
-            <a:pPr algn="l"/>
-            <a:r>
-              <a:rPr sz="1400" b="0" i="1">
-                <a:solidFill>
-                  <a:srgbClr val="54595D"/>
-                </a:solidFill>
-                <a:latin typeface="Calibri"/>
-              </a:rPr>
-              <a:t>Individual</a:t>
-            </a:r>
-          </a:p>
-        </p:txBody>
-      </p:sp>
-      <p:sp>
-        <p:nvSpPr>
-          <p:cNvPr id="9" name="Oval 8"/>
+              <a:t>Name two sources of interference on copper.</a:t>
+            </a:r>
+          </a:p>
+        </p:txBody>
+      </p:sp>
+      <p:sp>
+        <p:nvSpPr>
+          <p:cNvPr id="8" name="Oval 7"/>
           <p:cNvSpPr/>
           <p:nvPr/>
         </p:nvSpPr>
         <p:spPr>
           <a:xfrm>
-            <a:off x="548640" y="2482596"/>
-            <a:ext cx="384048" cy="384048"/>
+            <a:off x="548640" y="3108960"/>
+            <a:ext cx="502920" cy="502920"/>
           </a:xfrm>
           <a:prstGeom prst="ellipse">
             <a:avLst/>
           </a:prstGeom>
           <a:solidFill>
-            <a:srgbClr val="0645AD"/>
+            <a:srgbClr val="33C17A"/>
           </a:solidFill>
           <a:ln>
             <a:noFill/>
@@ -9593,27 +12761,27 @@
           <a:p>
             <a:pPr algn="ctr"/>
             <a:r>
-              <a:rPr sz="1300" b="1">
-                <a:solidFill>
-                  <a:srgbClr val="FFFFFF"/>
-                </a:solidFill>
-                <a:latin typeface="Calibri"/>
-              </a:rPr>
-              <a:t>1</a:t>
-            </a:r>
-          </a:p>
-        </p:txBody>
-      </p:sp>
-      <p:sp>
-        <p:nvSpPr>
-          <p:cNvPr id="10" name="TextBox 9"/>
+              <a:rPr sz="1600" b="1">
+                <a:solidFill>
+                  <a:srgbClr val="202122"/>
+                </a:solidFill>
+                <a:latin typeface="Calibri"/>
+              </a:rPr>
+              <a:t>2</a:t>
+            </a:r>
+          </a:p>
+        </p:txBody>
+      </p:sp>
+      <p:sp>
+        <p:nvSpPr>
+          <p:cNvPr id="9" name="TextBox 8"/>
           <p:cNvSpPr txBox="1"/>
           <p:nvPr/>
         </p:nvSpPr>
         <p:spPr>
           <a:xfrm>
-            <a:off x="1143000" y="2240280"/>
-            <a:ext cx="5943600" cy="868680"/>
+            <a:off x="1371600" y="3063240"/>
+            <a:ext cx="10271455" cy="1188720"/>
           </a:xfrm>
           <a:prstGeom prst="rect">
             <a:avLst/>
@@ -9621,38 +12789,38 @@
           <a:noFill/>
         </p:spPr>
         <p:txBody>
-          <a:bodyPr wrap="square" anchor="ctr" lIns="0" rIns="0" tIns="0" bIns="0"/>
+          <a:bodyPr wrap="square" anchor="t" lIns="0" rIns="0" tIns="0" bIns="0"/>
           <a:lstStyle/>
           <a:p>
             <a:pPr algn="l"/>
             <a:r>
-              <a:rPr sz="1700" b="0" i="0">
+              <a:rPr sz="2400" b="0" i="0">
                 <a:solidFill>
                   <a:srgbClr val="202122"/>
                 </a:solidFill>
                 <a:latin typeface="Calibri"/>
               </a:rPr>
-              <a:t>You have 192.168.10.0/24 for an office with four departments of up to 50 devices each.</a:t>
-            </a:r>
-          </a:p>
-        </p:txBody>
-      </p:sp>
-      <p:sp>
-        <p:nvSpPr>
-          <p:cNvPr id="11" name="Oval 10"/>
+              <a:t>Which standard covers segregating data and power cabling?</a:t>
+            </a:r>
+          </a:p>
+        </p:txBody>
+      </p:sp>
+      <p:sp>
+        <p:nvSpPr>
+          <p:cNvPr id="10" name="Oval 9"/>
           <p:cNvSpPr/>
           <p:nvPr/>
         </p:nvSpPr>
         <p:spPr>
           <a:xfrm>
-            <a:off x="548640" y="3461004"/>
-            <a:ext cx="384048" cy="384048"/>
+            <a:off x="548640" y="4526280"/>
+            <a:ext cx="502920" cy="502920"/>
           </a:xfrm>
           <a:prstGeom prst="ellipse">
             <a:avLst/>
           </a:prstGeom>
           <a:solidFill>
-            <a:srgbClr val="0645AD"/>
+            <a:srgbClr val="33C17A"/>
           </a:solidFill>
           <a:ln>
             <a:noFill/>
@@ -9679,13 +12847,46 @@
           <a:p>
             <a:pPr algn="ctr"/>
             <a:r>
-              <a:rPr sz="1300" b="1">
-                <a:solidFill>
-                  <a:srgbClr val="FFFFFF"/>
-                </a:solidFill>
-                <a:latin typeface="Calibri"/>
-              </a:rPr>
-              <a:t>2</a:t>
+              <a:rPr sz="1600" b="1">
+                <a:solidFill>
+                  <a:srgbClr val="202122"/>
+                </a:solidFill>
+                <a:latin typeface="Calibri"/>
+              </a:rPr>
+              <a:t>3</a:t>
+            </a:r>
+          </a:p>
+        </p:txBody>
+      </p:sp>
+      <p:sp>
+        <p:nvSpPr>
+          <p:cNvPr id="11" name="TextBox 10"/>
+          <p:cNvSpPr txBox="1"/>
+          <p:nvPr/>
+        </p:nvSpPr>
+        <p:spPr>
+          <a:xfrm>
+            <a:off x="1371600" y="4480560"/>
+            <a:ext cx="10271455" cy="1188720"/>
+          </a:xfrm>
+          <a:prstGeom prst="rect">
+            <a:avLst/>
+          </a:prstGeom>
+          <a:noFill/>
+        </p:spPr>
+        <p:txBody>
+          <a:bodyPr wrap="square" anchor="t" lIns="0" rIns="0" tIns="0" bIns="0"/>
+          <a:lstStyle/>
+          <a:p>
+            <a:pPr algn="l"/>
+            <a:r>
+              <a:rPr sz="2400" b="0" i="0">
+                <a:solidFill>
+                  <a:srgbClr val="202122"/>
+                </a:solidFill>
+                <a:latin typeface="Calibri"/>
+              </a:rPr>
+              <a:t>What is the IEEE name for Wi-Fi 6?</a:t>
             </a:r>
           </a:p>
         </p:txBody>
@@ -9698,8 +12899,8 @@
         </p:nvSpPr>
         <p:spPr>
           <a:xfrm>
-            <a:off x="1143000" y="3218688"/>
-            <a:ext cx="5943600" cy="868680"/>
+            <a:off x="548640" y="5852160"/>
+            <a:ext cx="11094415" cy="365760"/>
           </a:xfrm>
           <a:prstGeom prst="rect">
             <a:avLst/>
@@ -9707,353 +12908,18 @@
           <a:noFill/>
         </p:spPr>
         <p:txBody>
-          <a:bodyPr wrap="square" anchor="ctr" lIns="0" rIns="0" tIns="0" bIns="0"/>
+          <a:bodyPr wrap="square" anchor="t" lIns="0" rIns="0" tIns="0" bIns="0"/>
           <a:lstStyle/>
           <a:p>
             <a:pPr algn="l"/>
             <a:r>
-              <a:rPr sz="1700" b="0" i="0">
-                <a:solidFill>
-                  <a:srgbClr val="202122"/>
-                </a:solidFill>
-                <a:latin typeface="Calibri"/>
-              </a:rPr>
-              <a:t>Choose a subnet mask that gives four subnets.</a:t>
-            </a:r>
-          </a:p>
-        </p:txBody>
-      </p:sp>
-      <p:sp>
-        <p:nvSpPr>
-          <p:cNvPr id="13" name="Oval 12"/>
-          <p:cNvSpPr/>
-          <p:nvPr/>
-        </p:nvSpPr>
-        <p:spPr>
-          <a:xfrm>
-            <a:off x="548640" y="4439412"/>
-            <a:ext cx="384048" cy="384048"/>
-          </a:xfrm>
-          <a:prstGeom prst="ellipse">
-            <a:avLst/>
-          </a:prstGeom>
-          <a:solidFill>
-            <a:srgbClr val="0645AD"/>
-          </a:solidFill>
-          <a:ln>
-            <a:noFill/>
-          </a:ln>
-          <a:effectLst/>
-        </p:spPr>
-        <p:style>
-          <a:lnRef idx="1">
-            <a:schemeClr val="accent1"/>
-          </a:lnRef>
-          <a:fillRef idx="3">
-            <a:schemeClr val="accent1"/>
-          </a:fillRef>
-          <a:effectRef idx="2">
-            <a:schemeClr val="accent1"/>
-          </a:effectRef>
-          <a:fontRef idx="minor">
-            <a:schemeClr val="lt1"/>
-          </a:fontRef>
-        </p:style>
-        <p:txBody>
-          <a:bodyPr rtlCol="0" anchor="ctr" lIns="0" rIns="0" tIns="0" bIns="0"/>
-          <a:lstStyle/>
-          <a:p>
-            <a:pPr algn="ctr"/>
-            <a:r>
-              <a:rPr sz="1300" b="1">
-                <a:solidFill>
-                  <a:srgbClr val="FFFFFF"/>
-                </a:solidFill>
-                <a:latin typeface="Calibri"/>
-              </a:rPr>
-              <a:t>3</a:t>
-            </a:r>
-          </a:p>
-        </p:txBody>
-      </p:sp>
-      <p:sp>
-        <p:nvSpPr>
-          <p:cNvPr id="14" name="TextBox 13"/>
-          <p:cNvSpPr txBox="1"/>
-          <p:nvPr/>
-        </p:nvSpPr>
-        <p:spPr>
-          <a:xfrm>
-            <a:off x="1143000" y="4197096"/>
-            <a:ext cx="5943600" cy="868680"/>
-          </a:xfrm>
-          <a:prstGeom prst="rect">
-            <a:avLst/>
-          </a:prstGeom>
-          <a:noFill/>
-        </p:spPr>
-        <p:txBody>
-          <a:bodyPr wrap="square" anchor="ctr" lIns="0" rIns="0" tIns="0" bIns="0"/>
-          <a:lstStyle/>
-          <a:p>
-            <a:pPr algn="l"/>
-            <a:r>
-              <a:rPr sz="1700" b="0" i="0">
-                <a:solidFill>
-                  <a:srgbClr val="202122"/>
-                </a:solidFill>
-                <a:latin typeface="Calibri"/>
-              </a:rPr>
-              <a:t>Write the network address, first and last host and broadcast for each.</a:t>
-            </a:r>
-          </a:p>
-        </p:txBody>
-      </p:sp>
-      <p:sp>
-        <p:nvSpPr>
-          <p:cNvPr id="15" name="Oval 14"/>
-          <p:cNvSpPr/>
-          <p:nvPr/>
-        </p:nvSpPr>
-        <p:spPr>
-          <a:xfrm>
-            <a:off x="548640" y="5417820"/>
-            <a:ext cx="384048" cy="384048"/>
-          </a:xfrm>
-          <a:prstGeom prst="ellipse">
-            <a:avLst/>
-          </a:prstGeom>
-          <a:solidFill>
-            <a:srgbClr val="0645AD"/>
-          </a:solidFill>
-          <a:ln>
-            <a:noFill/>
-          </a:ln>
-          <a:effectLst/>
-        </p:spPr>
-        <p:style>
-          <a:lnRef idx="1">
-            <a:schemeClr val="accent1"/>
-          </a:lnRef>
-          <a:fillRef idx="3">
-            <a:schemeClr val="accent1"/>
-          </a:fillRef>
-          <a:effectRef idx="2">
-            <a:schemeClr val="accent1"/>
-          </a:effectRef>
-          <a:fontRef idx="minor">
-            <a:schemeClr val="lt1"/>
-          </a:fontRef>
-        </p:style>
-        <p:txBody>
-          <a:bodyPr rtlCol="0" anchor="ctr" lIns="0" rIns="0" tIns="0" bIns="0"/>
-          <a:lstStyle/>
-          <a:p>
-            <a:pPr algn="ctr"/>
-            <a:r>
-              <a:rPr sz="1300" b="1">
-                <a:solidFill>
-                  <a:srgbClr val="FFFFFF"/>
-                </a:solidFill>
-                <a:latin typeface="Calibri"/>
-              </a:rPr>
-              <a:t>4</a:t>
-            </a:r>
-          </a:p>
-        </p:txBody>
-      </p:sp>
-      <p:sp>
-        <p:nvSpPr>
-          <p:cNvPr id="16" name="TextBox 15"/>
-          <p:cNvSpPr txBox="1"/>
-          <p:nvPr/>
-        </p:nvSpPr>
-        <p:spPr>
-          <a:xfrm>
-            <a:off x="1143000" y="5175504"/>
-            <a:ext cx="5943600" cy="868680"/>
-          </a:xfrm>
-          <a:prstGeom prst="rect">
-            <a:avLst/>
-          </a:prstGeom>
-          <a:noFill/>
-        </p:spPr>
-        <p:txBody>
-          <a:bodyPr wrap="square" anchor="ctr" lIns="0" rIns="0" tIns="0" bIns="0"/>
-          <a:lstStyle/>
-          <a:p>
-            <a:pPr algn="l"/>
-            <a:r>
-              <a:rPr sz="1700" b="0" i="0">
-                <a:solidFill>
-                  <a:srgbClr val="202122"/>
-                </a:solidFill>
-                <a:latin typeface="Calibri"/>
-              </a:rPr>
-              <a:t>Suggest which resilience principle would protect the file server.</a:t>
-            </a:r>
-          </a:p>
-        </p:txBody>
-      </p:sp>
-      <p:sp>
-        <p:nvSpPr>
-          <p:cNvPr id="17" name="Rounded Rectangle 16"/>
-          <p:cNvSpPr/>
-          <p:nvPr/>
-        </p:nvSpPr>
-        <p:spPr>
-          <a:xfrm>
-            <a:off x="7772400" y="1508760"/>
-            <a:ext cx="3867912" cy="4572000"/>
-          </a:xfrm>
-          <a:prstGeom prst="roundRect">
-            <a:avLst>
-              <a:gd name="adj" fmla="val 8000"/>
-            </a:avLst>
-          </a:prstGeom>
-          <a:solidFill>
-            <a:srgbClr val="EAF3FF"/>
-          </a:solidFill>
-          <a:ln>
-            <a:noFill/>
-          </a:ln>
-          <a:effectLst/>
-        </p:spPr>
-        <p:style>
-          <a:lnRef idx="1">
-            <a:schemeClr val="accent1"/>
-          </a:lnRef>
-          <a:fillRef idx="3">
-            <a:schemeClr val="accent1"/>
-          </a:fillRef>
-          <a:effectRef idx="2">
-            <a:schemeClr val="accent1"/>
-          </a:effectRef>
-          <a:fontRef idx="minor">
-            <a:schemeClr val="lt1"/>
-          </a:fontRef>
-        </p:style>
-        <p:txBody>
-          <a:bodyPr rtlCol="0" anchor="ctr"/>
-          <a:lstStyle/>
-          <a:p/>
-        </p:txBody>
-      </p:sp>
-      <p:sp>
-        <p:nvSpPr>
-          <p:cNvPr id="18" name="TextBox 17"/>
-          <p:cNvSpPr txBox="1"/>
-          <p:nvPr/>
-        </p:nvSpPr>
-        <p:spPr>
-          <a:xfrm>
-            <a:off x="8046720" y="1737360"/>
-            <a:ext cx="3291840" cy="365760"/>
-          </a:xfrm>
-          <a:prstGeom prst="rect">
-            <a:avLst/>
-          </a:prstGeom>
-          <a:noFill/>
-        </p:spPr>
-        <p:txBody>
-          <a:bodyPr wrap="square" anchor="t" lIns="0" rIns="0" tIns="0" bIns="0"/>
-          <a:lstStyle/>
-          <a:p>
-            <a:pPr algn="l"/>
-            <a:r>
-              <a:rPr sz="1300" b="1" i="0">
-                <a:solidFill>
-                  <a:srgbClr val="0645AD"/>
-                </a:solidFill>
-                <a:latin typeface="Calibri"/>
-              </a:rPr>
-              <a:t>SUCCESS CRITERIA</a:t>
-            </a:r>
-          </a:p>
-        </p:txBody>
-      </p:sp>
-      <p:sp>
-        <p:nvSpPr>
-          <p:cNvPr id="19" name="TextBox 18"/>
-          <p:cNvSpPr txBox="1"/>
-          <p:nvPr/>
-        </p:nvSpPr>
-        <p:spPr>
-          <a:xfrm>
-            <a:off x="8046720" y="2240280"/>
-            <a:ext cx="3337560" cy="3657600"/>
-          </a:xfrm>
-          <a:prstGeom prst="rect">
-            <a:avLst/>
-          </a:prstGeom>
-          <a:noFill/>
-        </p:spPr>
-        <p:txBody>
-          <a:bodyPr wrap="square" lIns="0" rIns="0" tIns="0" bIns="0">
-            <a:spAutoFit/>
-          </a:bodyPr>
-          <a:lstStyle/>
-          <a:p>
-            <a:pPr marL="274320" indent="-274320">
-              <a:spcAft>
-                <a:spcPts val="810"/>
-              </a:spcAft>
-              <a:buClr>
-                <a:srgbClr val="0645AD"/>
-              </a:buClr>
-              <a:buFont typeface="Arial"/>
-              <a:buChar char="•"/>
-            </a:pPr>
-            <a:r>
-              <a:rPr sz="1800" b="0">
-                <a:solidFill>
-                  <a:srgbClr val="202122"/>
-                </a:solidFill>
-                <a:latin typeface="Calibri"/>
-              </a:rPr>
-              <a:t>Uses /26 correctly</a:t>
-            </a:r>
-          </a:p>
-          <a:p>
-            <a:pPr marL="274320" indent="-274320">
-              <a:spcAft>
-                <a:spcPts val="810"/>
-              </a:spcAft>
-              <a:buClr>
-                <a:srgbClr val="0645AD"/>
-              </a:buClr>
-              <a:buFont typeface="Arial"/>
-              <a:buChar char="•"/>
-            </a:pPr>
-            <a:r>
-              <a:rPr sz="1800" b="0">
-                <a:solidFill>
-                  <a:srgbClr val="202122"/>
-                </a:solidFill>
-                <a:latin typeface="Calibri"/>
-              </a:rPr>
-              <a:t>Ranges do not overlap</a:t>
-            </a:r>
-          </a:p>
-          <a:p>
-            <a:pPr marL="274320" indent="-274320">
-              <a:spcAft>
-                <a:spcPts val="810"/>
-              </a:spcAft>
-              <a:buClr>
-                <a:srgbClr val="0645AD"/>
-              </a:buClr>
-              <a:buFont typeface="Arial"/>
-              <a:buChar char="•"/>
-            </a:pPr>
-            <a:r>
-              <a:rPr sz="1800" b="0">
-                <a:solidFill>
-                  <a:srgbClr val="202122"/>
-                </a:solidFill>
-                <a:latin typeface="Calibri"/>
-              </a:rPr>
-              <a:t>Resilience choice is justified</a:t>
+              <a:rPr sz="1300" b="0" i="1">
+                <a:solidFill>
+                  <a:srgbClr val="54595D"/>
+                </a:solidFill>
+                <a:latin typeface="Calibri"/>
+              </a:rPr>
+              <a:t>Answer on mini whiteboards or in your book. Answers are in the speaker notes.</a:t>
             </a:r>
           </a:p>
         </p:txBody>
